--- a/Docs/Collateral ontology Story Model AI.pptx
+++ b/Docs/Collateral ontology Story Model AI.pptx
@@ -4,16 +4,17 @@
   <p:sldMasterIdLst>
     <p:sldMasterId id="2147483648" r:id="rId1"/>
   </p:sldMasterIdLst>
+  <p:notesMasterIdLst>
+    <p:notesMasterId r:id="rId6"/>
+  </p:notesMasterIdLst>
   <p:sldIdLst>
     <p:sldId id="256" r:id="rId2"/>
     <p:sldId id="257" r:id="rId3"/>
     <p:sldId id="258" r:id="rId4"/>
+    <p:sldId id="259" r:id="rId5"/>
   </p:sldIdLst>
-  <p:notesMasterIdLst>
-    <p:notesMasterId r:id="rId5"/>
-  </p:notesMasterIdLst>
-  <p:sldSz cx="12191695" cy="6858000"/>
-  <p:notesSz cx="6858000" cy="12191695"/>
+  <p:sldSz cx="12192000" cy="6858000"/>
+  <p:notesSz cx="6858000" cy="12192000"/>
   <p:defaultTextStyle>
     <a:lvl1pPr marL="0" algn="l" defTabSz="914400" rtl="0" eaLnBrk="1" latinLnBrk="0" hangingPunct="1">
       <a:defRPr sz="1800" kern="1200">
@@ -106,6 +107,11 @@
       </a:defRPr>
     </a:lvl9pPr>
   </p:defaultTextStyle>
+  <p:extLst>
+    <p:ext uri="{EFAFB233-063F-42B5-8137-9DF3F51BA10A}">
+      <p15:sldGuideLst xmlns:p15="http://schemas.microsoft.com/office/powerpoint/2012/main"/>
+    </p:ext>
+  </p:extLst>
 </p:presentation>
 </file>
 
@@ -131,234 +137,10 @@
           <a:chExt cx="0" cy="0"/>
         </a:xfrm>
       </p:grpSpPr>
-      <p:sp>
-        <p:nvSpPr>
-          <p:cNvPr id="2" name="Header Placeholder 1"/>
-          <p:cNvSpPr>
-            <a:spLocks noGrp="1"/>
-          </p:cNvSpPr>
-          <p:nvPr>
-            <p:ph type="hdr" sz="quarter"/>
-          </p:nvPr>
-        </p:nvSpPr>
-        <p:spPr>
-          <a:xfrm>
-            <a:off x="0" y="0"/>
-            <a:ext cx="2971800" cy="458788"/>
-          </a:xfrm>
-          <a:prstGeom prst="rect">
-            <a:avLst/>
-          </a:prstGeom>
-        </p:spPr>
-        <p:txBody>
-          <a:bodyPr vert="horz" lIns="91440" tIns="45720" rIns="91440" bIns="45720" rtlCol="0"/>
-          <a:lstStyle>
-            <a:lvl1pPr algn="l">
-              <a:defRPr sz="1200"/>
-            </a:lvl1pPr>
-          </a:lstStyle>
-          <a:p>
-            <a:endParaRPr lang="en-US"/>
-          </a:p>
-        </p:txBody>
-      </p:sp>
-      <p:sp>
-        <p:nvSpPr>
-          <p:cNvPr id="3" name="Date Placeholder 2"/>
-          <p:cNvSpPr>
-            <a:spLocks noGrp="1"/>
-          </p:cNvSpPr>
-          <p:nvPr>
-            <p:ph type="dt" idx="1"/>
-          </p:nvPr>
-        </p:nvSpPr>
-        <p:spPr>
-          <a:xfrm>
-            <a:off x="3884613" y="0"/>
-            <a:ext cx="2971800" cy="458788"/>
-          </a:xfrm>
-          <a:prstGeom prst="rect">
-            <a:avLst/>
-          </a:prstGeom>
-        </p:spPr>
-        <p:txBody>
-          <a:bodyPr vert="horz" lIns="91440" tIns="45720" rIns="91440" bIns="45720" rtlCol="0"/>
-          <a:lstStyle>
-            <a:lvl1pPr algn="r">
-              <a:defRPr sz="1200"/>
-            </a:lvl1pPr>
-          </a:lstStyle>
-          <a:p>
-            <a:fld id="{5282F153-3F37-0F45-9E97-73ACFA13230C}" type="datetimeFigureOut">
-              <a:rPr lang="en-US"/>
-              <a:t>7/23/19</a:t>
-            </a:fld>
-            <a:endParaRPr lang="en-US"/>
-          </a:p>
-        </p:txBody>
-      </p:sp>
-      <p:sp>
-        <p:nvSpPr>
-          <p:cNvPr id="4" name="Slide Image Placeholder 3"/>
-          <p:cNvSpPr>
-            <a:spLocks noGrp="1" noRot="1" noChangeAspect="1"/>
-          </p:cNvSpPr>
-          <p:nvPr>
-            <p:ph type="sldImg" idx="2"/>
-          </p:nvPr>
-        </p:nvSpPr>
-        <p:spPr>
-          <a:xfrm>
-            <a:off x="685800" y="1143000"/>
-            <a:ext cx="5486400" cy="3086100"/>
-          </a:xfrm>
-          <a:prstGeom prst="rect">
-            <a:avLst/>
-          </a:prstGeom>
-          <a:noFill/>
-          <a:ln w="12700">
-            <a:solidFill>
-              <a:prstClr val="black"/>
-            </a:solidFill>
-          </a:ln>
-        </p:spPr>
-        <p:txBody>
-          <a:bodyPr vert="horz" lIns="91440" tIns="45720" rIns="91440" bIns="45720" rtlCol="0" anchor="ctr"/>
-          <a:lstStyle/>
-          <a:p>
-            <a:endParaRPr lang="en-US"/>
-          </a:p>
-        </p:txBody>
-      </p:sp>
-      <p:sp>
-        <p:nvSpPr>
-          <p:cNvPr id="5" name="Notes Placeholder 4"/>
-          <p:cNvSpPr>
-            <a:spLocks noGrp="1"/>
-          </p:cNvSpPr>
-          <p:nvPr>
-            <p:ph type="body" sz="quarter" idx="3"/>
-          </p:nvPr>
-        </p:nvSpPr>
-        <p:spPr>
-          <a:xfrm>
-            <a:off x="685800" y="4400550"/>
-            <a:ext cx="5486400" cy="3600450"/>
-          </a:xfrm>
-          <a:prstGeom prst="rect">
-            <a:avLst/>
-          </a:prstGeom>
-        </p:spPr>
-        <p:txBody>
-          <a:bodyPr vert="horz" lIns="91440" tIns="45720" rIns="91440" bIns="45720" rtlCol="0"/>
-          <a:lstStyle/>
-          <a:p>
-            <a:pPr lvl="0"/>
-            <a:r>
-              <a:rPr lang="en-US"/>
-              <a:t>Click to edit Master text styles</a:t>
-            </a:r>
-          </a:p>
-          <a:p>
-            <a:pPr lvl="1"/>
-            <a:r>
-              <a:rPr lang="en-US"/>
-              <a:t>Second level</a:t>
-            </a:r>
-          </a:p>
-          <a:p>
-            <a:pPr lvl="2"/>
-            <a:r>
-              <a:rPr lang="en-US"/>
-              <a:t>Third level</a:t>
-            </a:r>
-          </a:p>
-          <a:p>
-            <a:pPr lvl="3"/>
-            <a:r>
-              <a:rPr lang="en-US"/>
-              <a:t>Fourth level</a:t>
-            </a:r>
-          </a:p>
-          <a:p>
-            <a:pPr lvl="4"/>
-            <a:r>
-              <a:rPr lang="en-US"/>
-              <a:t>Fifth level</a:t>
-            </a:r>
-          </a:p>
-        </p:txBody>
-      </p:sp>
-      <p:sp>
-        <p:nvSpPr>
-          <p:cNvPr id="6" name="Footer Placeholder 5"/>
-          <p:cNvSpPr>
-            <a:spLocks noGrp="1"/>
-          </p:cNvSpPr>
-          <p:nvPr>
-            <p:ph type="ftr" sz="quarter" idx="4"/>
-          </p:nvPr>
-        </p:nvSpPr>
-        <p:spPr>
-          <a:xfrm>
-            <a:off x="0" y="8685213"/>
-            <a:ext cx="2971800" cy="458787"/>
-          </a:xfrm>
-          <a:prstGeom prst="rect">
-            <a:avLst/>
-          </a:prstGeom>
-        </p:spPr>
-        <p:txBody>
-          <a:bodyPr vert="horz" lIns="91440" tIns="45720" rIns="91440" bIns="45720" rtlCol="0" anchor="b"/>
-          <a:lstStyle>
-            <a:lvl1pPr algn="l">
-              <a:defRPr sz="1200"/>
-            </a:lvl1pPr>
-          </a:lstStyle>
-          <a:p>
-            <a:endParaRPr lang="en-US"/>
-          </a:p>
-        </p:txBody>
-      </p:sp>
-      <p:sp>
-        <p:nvSpPr>
-          <p:cNvPr id="7" name="Slide Number Placeholder 6"/>
-          <p:cNvSpPr>
-            <a:spLocks noGrp="1"/>
-          </p:cNvSpPr>
-          <p:nvPr>
-            <p:ph type="sldNum" sz="quarter" idx="5"/>
-          </p:nvPr>
-        </p:nvSpPr>
-        <p:spPr>
-          <a:xfrm>
-            <a:off x="3884613" y="8685213"/>
-            <a:ext cx="2971800" cy="458787"/>
-          </a:xfrm>
-          <a:prstGeom prst="rect">
-            <a:avLst/>
-          </a:prstGeom>
-        </p:spPr>
-        <p:txBody>
-          <a:bodyPr vert="horz" lIns="91440" tIns="45720" rIns="91440" bIns="45720" rtlCol="0" anchor="b"/>
-          <a:lstStyle>
-            <a:lvl1pPr algn="r">
-              <a:defRPr sz="1200"/>
-            </a:lvl1pPr>
-          </a:lstStyle>
-          <a:p>
-            <a:fld id="{CE5E9CC1-C706-0F49-92D6-E571CC5EEA8F}" type="slidenum">
-              <a:rPr lang="en-US"/>
-              <a:t>‹#›</a:t>
-            </a:fld>
-            <a:endParaRPr lang="en-US"/>
-          </a:p>
-        </p:txBody>
-      </p:sp>
     </p:spTree>
     <p:extLst>
       <p:ext uri="{BB962C8B-B14F-4D97-AF65-F5344CB8AC3E}">
-        <p14:creationId xmlns:p14="http://schemas.microsoft.com/office/powerpoint/2010/main" val="1024086991"/>
+        <p14:creationId xmlns:p14="http://schemas.microsoft.com/office/powerpoint/2010/main" val="2732643178"/>
       </p:ext>
     </p:extLst>
   </p:cSld>
@@ -506,7 +288,6 @@
               <a:rPr lang="en-US" dirty="0"/>
               <a:t>The BCCU story by actor: desks book (Murex/Calypso); Legal/TAMS holds ISDA 1989 + CSA 1689 terms (75k/10k/98%); CMOS values (exposure 14,115,000) and calls (14,040,000, event 390066); BCCU disputes 450k, agrees 13.59M, posts CMB 13.87M credited 13,592,600; Colline settles; Credit Ops investigates the 3-day-old dispute across four systems - the agent use case.</a:t>
             </a:r>
-            <a:endParaRPr lang="en-US" dirty="0"/>
           </a:p>
         </p:txBody>
       </p:sp>
@@ -594,7 +375,6 @@
               <a:rPr lang="en-US" dirty="0"/>
               <a:t>The PD CDM rendered as the story: 1 parties, 2 ISDA umbrella (CSA family only), 3 one agreement in four kinds (is-a, exactly one), 4 the agreement's schedules, 5 trades + applicability (one trade, several margin homes), 6 the daily cycle (one event -&gt; one exposure, at most one call/dispute), 8 the movement (the act), 9 the holding (derived, must reconcile). Every box persists; formulas live in metric views, not as entities.</a:t>
             </a:r>
-            <a:endParaRPr lang="en-US" dirty="0"/>
           </a:p>
         </p:txBody>
       </p:sp>
@@ -682,7 +462,6 @@
               <a:rPr lang="en-US" dirty="0"/>
               <a:t>Three SoRs: CMOS/Colline (OTC, ISDA+CSA family), SFT stack (GMRA/GMSLA), Softek (PBA, not landed). One model + mappings = authored conformance. AI path: MCP (governed, logged) -&gt; entity resolution via client master -&gt; measures from the metric view (Genie executes declarations, never invents joins) -&gt; compiled SQL runs as one scan of the denormalized gold OBT. Answer carries the honest PBA coverage note. Closing: conformance authored once; Genie executes within a product; agents compose across products.</a:t>
             </a:r>
-            <a:endParaRPr lang="en-US" dirty="0"/>
           </a:p>
         </p:txBody>
       </p:sp>
@@ -704,6 +483,90 @@
             <a:fld id="{F7021451-1387-4CA6-816F-3879F97B5CBC}" type="slidenum">
               <a:rPr lang="en-US"/>
               <a:t>3</a:t>
+            </a:fld>
+            <a:endParaRPr lang="en-US"/>
+          </a:p>
+        </p:txBody>
+      </p:sp>
+    </p:spTree>
+    <p:extLst>
+      <p:ext uri="{BB962C8B-B14F-4D97-AF65-F5344CB8AC3E}">
+        <p14:creationId xmlns:p14="http://schemas.microsoft.com/office/powerpoint/2010/main" val="1024086991"/>
+      </p:ext>
+    </p:extLst>
+  </p:cSld>
+  <p:clrMapOvr>
+    <a:masterClrMapping/>
+  </p:clrMapOvr>
+</p:notes>
+</file>
+
+<file path=ppt/notesSlides/notesSlide4.xml><?xml version="1.0" encoding="utf-8"?>
+<p:notes xmlns:a="http://schemas.openxmlformats.org/drawingml/2006/main" xmlns:r="http://schemas.openxmlformats.org/officeDocument/2006/relationships" xmlns:p="http://schemas.openxmlformats.org/presentationml/2006/main">
+  <p:cSld>
+    <p:spTree>
+      <p:nvGrpSpPr>
+        <p:cNvPr id="1" name=""/>
+        <p:cNvGrpSpPr/>
+        <p:nvPr/>
+      </p:nvGrpSpPr>
+      <p:grpSpPr>
+        <a:xfrm>
+          <a:off x="0" y="0"/>
+          <a:ext cx="0" cy="0"/>
+          <a:chOff x="0" y="0"/>
+          <a:chExt cx="0" cy="0"/>
+        </a:xfrm>
+      </p:grpSpPr>
+      <p:sp>
+        <p:nvSpPr>
+          <p:cNvPr id="2" name="Slide Image Placeholder 1"/>
+          <p:cNvSpPr>
+            <a:spLocks noGrp="1" noRot="1" noChangeAspect="1"/>
+          </p:cNvSpPr>
+          <p:nvPr>
+            <p:ph type="sldImg"/>
+          </p:nvPr>
+        </p:nvSpPr>
+        <p:spPr/>
+      </p:sp>
+      <p:sp>
+        <p:nvSpPr>
+          <p:cNvPr id="3" name="Notes Placeholder 2"/>
+          <p:cNvSpPr>
+            <a:spLocks noGrp="1"/>
+          </p:cNvSpPr>
+          <p:nvPr>
+            <p:ph type="body" idx="1"/>
+          </p:nvPr>
+        </p:nvSpPr>
+        <p:spPr/>
+        <p:txBody>
+          <a:bodyPr/>
+          <a:lstStyle/>
+          <a:p>
+            <a:endParaRPr lang="en-US" dirty="0"/>
+          </a:p>
+        </p:txBody>
+      </p:sp>
+      <p:sp>
+        <p:nvSpPr>
+          <p:cNvPr id="4" name="Slide Number Placeholder 3"/>
+          <p:cNvSpPr>
+            <a:spLocks noGrp="1"/>
+          </p:cNvSpPr>
+          <p:nvPr>
+            <p:ph type="sldNum" sz="quarter" idx="10"/>
+          </p:nvPr>
+        </p:nvSpPr>
+        <p:spPr/>
+        <p:txBody>
+          <a:bodyPr/>
+          <a:lstStyle/>
+          <a:p>
+            <a:fld id="{F7021451-1387-4CA6-816F-3879F97B5CBC}" type="slidenum">
+              <a:rPr lang="en-US"/>
+              <a:t>4</a:t>
             </a:fld>
             <a:endParaRPr lang="en-US"/>
           </a:p>
@@ -755,6 +618,11 @@
 <file path=ppt/slideMasters/slideMaster1.xml><?xml version="1.0" encoding="utf-8"?>
 <p:sldMaster xmlns:a="http://schemas.openxmlformats.org/drawingml/2006/main" xmlns:r="http://schemas.openxmlformats.org/officeDocument/2006/relationships" xmlns:p="http://schemas.openxmlformats.org/presentationml/2006/main">
   <p:cSld>
+    <p:bg>
+      <p:bgRef idx="1001">
+        <a:schemeClr val="bg1"/>
+      </p:bgRef>
+    </p:bg>
     <p:spTree>
       <p:nvGrpSpPr>
         <p:cNvPr id="1" name=""/>
@@ -1037,6 +905,7 @@
         <a:solidFill>
           <a:srgbClr val="FFFFFF"/>
         </a:solidFill>
+        <a:effectLst/>
       </p:bgPr>
     </p:bg>
     <p:spTree>
@@ -1074,11 +943,11 @@
           <a:bodyPr wrap="square" lIns="0" tIns="0" rIns="0" bIns="0" rtlCol="0" anchor="ctr"/>
           <a:lstStyle/>
           <a:p>
-            <a:pPr indent="0" marL="0">
-              <a:buNone/>
-            </a:pPr>
-            <a:r>
-              <a:rPr lang="en-US" sz="1100" b="1" spc="200" kern="0" dirty="0">
+            <a:pPr marL="0" indent="0">
+              <a:buNone/>
+            </a:pPr>
+            <a:r>
+              <a:rPr lang="en-US" sz="1100" b="1" kern="0" spc="200" dirty="0">
                 <a:solidFill>
                   <a:srgbClr val="1F7A47"/>
                 </a:solidFill>
@@ -1113,7 +982,7 @@
           <a:bodyPr wrap="square" lIns="0" tIns="0" rIns="0" bIns="0" rtlCol="0" anchor="ctr"/>
           <a:lstStyle/>
           <a:p>
-            <a:pPr indent="0" marL="0">
+            <a:pPr marL="0" indent="0">
               <a:buNone/>
             </a:pPr>
             <a:r>
@@ -1152,7 +1021,7 @@
           <a:bodyPr wrap="square" lIns="0" tIns="0" rIns="0" bIns="0" rtlCol="0" anchor="ctr"/>
           <a:lstStyle/>
           <a:p>
-            <a:pPr indent="0" marL="0">
+            <a:pPr marL="0" indent="0">
               <a:buNone/>
             </a:pPr>
             <a:r>
@@ -1196,6 +1065,13 @@
             <a:prstDash val="solid"/>
           </a:ln>
         </p:spPr>
+        <p:txBody>
+          <a:bodyPr/>
+          <a:lstStyle/>
+          <a:p>
+            <a:endParaRPr lang="en-US"/>
+          </a:p>
+        </p:txBody>
       </p:sp>
       <p:sp>
         <p:nvSpPr>
@@ -1218,7 +1094,7 @@
           <a:bodyPr wrap="square" lIns="0" tIns="0" rIns="0" bIns="0" rtlCol="0" anchor="ctr"/>
           <a:lstStyle/>
           <a:p>
-            <a:pPr algn="ctr" indent="0" marL="0">
+            <a:pPr marL="0" indent="0" algn="ctr">
               <a:buNone/>
             </a:pPr>
             <a:r>
@@ -1262,6 +1138,13 @@
             <a:prstDash val="solid"/>
           </a:ln>
         </p:spPr>
+        <p:txBody>
+          <a:bodyPr/>
+          <a:lstStyle/>
+          <a:p>
+            <a:endParaRPr lang="en-US"/>
+          </a:p>
+        </p:txBody>
       </p:sp>
       <p:sp>
         <p:nvSpPr>
@@ -1284,7 +1167,7 @@
           <a:bodyPr wrap="square" lIns="0" tIns="0" rIns="0" bIns="0" rtlCol="0" anchor="ctr"/>
           <a:lstStyle/>
           <a:p>
-            <a:pPr algn="ctr" indent="0" marL="0">
+            <a:pPr marL="0" indent="0" algn="ctr">
               <a:buNone/>
             </a:pPr>
             <a:r>
@@ -1328,6 +1211,13 @@
             <a:prstDash val="solid"/>
           </a:ln>
         </p:spPr>
+        <p:txBody>
+          <a:bodyPr/>
+          <a:lstStyle/>
+          <a:p>
+            <a:endParaRPr lang="en-US"/>
+          </a:p>
+        </p:txBody>
       </p:sp>
       <p:sp>
         <p:nvSpPr>
@@ -1350,7 +1240,7 @@
           <a:bodyPr wrap="square" lIns="0" tIns="0" rIns="0" bIns="0" rtlCol="0" anchor="ctr"/>
           <a:lstStyle/>
           <a:p>
-            <a:pPr algn="ctr" indent="0" marL="0">
+            <a:pPr marL="0" indent="0" algn="ctr">
               <a:buNone/>
             </a:pPr>
             <a:r>
@@ -1394,6 +1284,13 @@
             <a:prstDash val="solid"/>
           </a:ln>
         </p:spPr>
+        <p:txBody>
+          <a:bodyPr/>
+          <a:lstStyle/>
+          <a:p>
+            <a:endParaRPr lang="en-US"/>
+          </a:p>
+        </p:txBody>
       </p:sp>
       <p:sp>
         <p:nvSpPr>
@@ -1416,7 +1313,7 @@
           <a:bodyPr wrap="square" lIns="0" tIns="0" rIns="0" bIns="0" rtlCol="0" anchor="ctr"/>
           <a:lstStyle/>
           <a:p>
-            <a:pPr algn="ctr" indent="0" marL="0">
+            <a:pPr marL="0" indent="0" algn="ctr">
               <a:buNone/>
             </a:pPr>
             <a:r>
@@ -1460,6 +1357,13 @@
             <a:prstDash val="solid"/>
           </a:ln>
         </p:spPr>
+        <p:txBody>
+          <a:bodyPr/>
+          <a:lstStyle/>
+          <a:p>
+            <a:endParaRPr lang="en-US"/>
+          </a:p>
+        </p:txBody>
       </p:sp>
       <p:sp>
         <p:nvSpPr>
@@ -1482,7 +1386,7 @@
           <a:bodyPr wrap="square" lIns="0" tIns="0" rIns="0" bIns="0" rtlCol="0" anchor="ctr"/>
           <a:lstStyle/>
           <a:p>
-            <a:pPr algn="ctr" indent="0" marL="0">
+            <a:pPr marL="0" indent="0" algn="ctr">
               <a:buNone/>
             </a:pPr>
             <a:r>
@@ -1526,6 +1430,13 @@
             <a:prstDash val="solid"/>
           </a:ln>
         </p:spPr>
+        <p:txBody>
+          <a:bodyPr/>
+          <a:lstStyle/>
+          <a:p>
+            <a:endParaRPr lang="en-US"/>
+          </a:p>
+        </p:txBody>
       </p:sp>
       <p:sp>
         <p:nvSpPr>
@@ -1548,7 +1459,7 @@
           <a:bodyPr wrap="square" lIns="0" tIns="0" rIns="0" bIns="0" rtlCol="0" anchor="ctr"/>
           <a:lstStyle/>
           <a:p>
-            <a:pPr algn="ctr" indent="0" marL="0">
+            <a:pPr marL="0" indent="0" algn="ctr">
               <a:buNone/>
             </a:pPr>
             <a:r>
@@ -1592,6 +1503,13 @@
             <a:prstDash val="solid"/>
           </a:ln>
         </p:spPr>
+        <p:txBody>
+          <a:bodyPr/>
+          <a:lstStyle/>
+          <a:p>
+            <a:endParaRPr lang="en-US"/>
+          </a:p>
+        </p:txBody>
       </p:sp>
       <p:sp>
         <p:nvSpPr>
@@ -1617,6 +1535,13 @@
             <a:prstDash val="solid"/>
           </a:ln>
         </p:spPr>
+        <p:txBody>
+          <a:bodyPr/>
+          <a:lstStyle/>
+          <a:p>
+            <a:endParaRPr lang="en-US"/>
+          </a:p>
+        </p:txBody>
       </p:sp>
       <p:sp>
         <p:nvSpPr>
@@ -1639,7 +1564,7 @@
           <a:bodyPr wrap="square" lIns="0" tIns="0" rIns="0" bIns="0" rtlCol="0" anchor="ctr"/>
           <a:lstStyle/>
           <a:p>
-            <a:pPr algn="ctr" indent="0" marL="0">
+            <a:pPr marL="0" indent="0" algn="ctr">
               <a:buNone/>
             </a:pPr>
             <a:r>
@@ -1683,6 +1608,13 @@
             <a:prstDash val="solid"/>
           </a:ln>
         </p:spPr>
+        <p:txBody>
+          <a:bodyPr/>
+          <a:lstStyle/>
+          <a:p>
+            <a:endParaRPr lang="en-US"/>
+          </a:p>
+        </p:txBody>
       </p:sp>
       <p:sp>
         <p:nvSpPr>
@@ -1705,7 +1637,7 @@
           <a:bodyPr wrap="square" lIns="0" tIns="0" rIns="0" bIns="0" rtlCol="0" anchor="ctr"/>
           <a:lstStyle/>
           <a:p>
-            <a:pPr algn="ctr" indent="0" marL="0">
+            <a:pPr marL="0" indent="0" algn="ctr">
               <a:buNone/>
             </a:pPr>
             <a:r>
@@ -1744,7 +1676,7 @@
           <a:bodyPr wrap="square" lIns="0" tIns="0" rIns="0" bIns="0" rtlCol="0" anchor="ctr"/>
           <a:lstStyle/>
           <a:p>
-            <a:pPr indent="0" marL="0">
+            <a:pPr marL="0" indent="0">
               <a:buNone/>
             </a:pPr>
             <a:r>
@@ -1783,7 +1715,7 @@
           <a:bodyPr wrap="square" lIns="0" tIns="0" rIns="0" bIns="0" rtlCol="0" anchor="t"/>
           <a:lstStyle/>
           <a:p>
-            <a:pPr indent="0" marL="0">
+            <a:pPr marL="0" indent="0">
               <a:lnSpc>
                 <a:spcPct val="103000"/>
               </a:lnSpc>
@@ -1825,7 +1757,7 @@
           <a:bodyPr wrap="square" lIns="0" tIns="0" rIns="0" bIns="0" rtlCol="0" anchor="ctr"/>
           <a:lstStyle/>
           <a:p>
-            <a:pPr indent="0" marL="0">
+            <a:pPr marL="0" indent="0">
               <a:buNone/>
             </a:pPr>
             <a:r>
@@ -1866,6 +1798,13 @@
             <a:tailEnd type="triangle"/>
           </a:ln>
         </p:spPr>
+        <p:txBody>
+          <a:bodyPr/>
+          <a:lstStyle/>
+          <a:p>
+            <a:endParaRPr lang="en-US"/>
+          </a:p>
+        </p:txBody>
       </p:sp>
       <p:sp>
         <p:nvSpPr>
@@ -1893,6 +1832,13 @@
             <a:prstDash val="solid"/>
           </a:ln>
         </p:spPr>
+        <p:txBody>
+          <a:bodyPr/>
+          <a:lstStyle/>
+          <a:p>
+            <a:endParaRPr lang="en-US"/>
+          </a:p>
+        </p:txBody>
       </p:sp>
       <p:sp>
         <p:nvSpPr>
@@ -1918,6 +1864,13 @@
             <a:prstDash val="solid"/>
           </a:ln>
         </p:spPr>
+        <p:txBody>
+          <a:bodyPr/>
+          <a:lstStyle/>
+          <a:p>
+            <a:endParaRPr lang="en-US"/>
+          </a:p>
+        </p:txBody>
       </p:sp>
       <p:sp>
         <p:nvSpPr>
@@ -1940,7 +1893,7 @@
           <a:bodyPr wrap="square" lIns="0" tIns="0" rIns="0" bIns="0" rtlCol="0" anchor="ctr"/>
           <a:lstStyle/>
           <a:p>
-            <a:pPr algn="ctr" indent="0" marL="0">
+            <a:pPr marL="0" indent="0" algn="ctr">
               <a:buNone/>
             </a:pPr>
             <a:r>
@@ -1984,6 +1937,13 @@
             <a:prstDash val="solid"/>
           </a:ln>
         </p:spPr>
+        <p:txBody>
+          <a:bodyPr/>
+          <a:lstStyle/>
+          <a:p>
+            <a:endParaRPr lang="en-US"/>
+          </a:p>
+        </p:txBody>
       </p:sp>
       <p:sp>
         <p:nvSpPr>
@@ -2006,7 +1966,7 @@
           <a:bodyPr wrap="square" lIns="0" tIns="0" rIns="0" bIns="0" rtlCol="0" anchor="ctr"/>
           <a:lstStyle/>
           <a:p>
-            <a:pPr algn="ctr" indent="0" marL="0">
+            <a:pPr marL="0" indent="0" algn="ctr">
               <a:buNone/>
             </a:pPr>
             <a:r>
@@ -2045,7 +2005,7 @@
           <a:bodyPr wrap="square" lIns="0" tIns="0" rIns="0" bIns="0" rtlCol="0" anchor="ctr"/>
           <a:lstStyle/>
           <a:p>
-            <a:pPr indent="0" marL="0">
+            <a:pPr marL="0" indent="0">
               <a:buNone/>
             </a:pPr>
             <a:r>
@@ -2084,7 +2044,7 @@
           <a:bodyPr wrap="square" lIns="0" tIns="0" rIns="0" bIns="0" rtlCol="0" anchor="t"/>
           <a:lstStyle/>
           <a:p>
-            <a:pPr indent="0" marL="0">
+            <a:pPr marL="0" indent="0">
               <a:lnSpc>
                 <a:spcPct val="103000"/>
               </a:lnSpc>
@@ -2126,7 +2086,7 @@
           <a:bodyPr wrap="square" lIns="0" tIns="0" rIns="0" bIns="0" rtlCol="0" anchor="ctr"/>
           <a:lstStyle/>
           <a:p>
-            <a:pPr indent="0" marL="0">
+            <a:pPr marL="0" indent="0">
               <a:buNone/>
             </a:pPr>
             <a:r>
@@ -2167,6 +2127,13 @@
             <a:tailEnd type="triangle"/>
           </a:ln>
         </p:spPr>
+        <p:txBody>
+          <a:bodyPr/>
+          <a:lstStyle/>
+          <a:p>
+            <a:endParaRPr lang="en-US"/>
+          </a:p>
+        </p:txBody>
       </p:sp>
       <p:sp>
         <p:nvSpPr>
@@ -2194,6 +2161,13 @@
             <a:prstDash val="solid"/>
           </a:ln>
         </p:spPr>
+        <p:txBody>
+          <a:bodyPr/>
+          <a:lstStyle/>
+          <a:p>
+            <a:endParaRPr lang="en-US"/>
+          </a:p>
+        </p:txBody>
       </p:sp>
       <p:sp>
         <p:nvSpPr>
@@ -2219,6 +2193,13 @@
             <a:prstDash val="solid"/>
           </a:ln>
         </p:spPr>
+        <p:txBody>
+          <a:bodyPr/>
+          <a:lstStyle/>
+          <a:p>
+            <a:endParaRPr lang="en-US"/>
+          </a:p>
+        </p:txBody>
       </p:sp>
       <p:sp>
         <p:nvSpPr>
@@ -2241,7 +2222,7 @@
           <a:bodyPr wrap="square" lIns="0" tIns="0" rIns="0" bIns="0" rtlCol="0" anchor="ctr"/>
           <a:lstStyle/>
           <a:p>
-            <a:pPr algn="ctr" indent="0" marL="0">
+            <a:pPr marL="0" indent="0" algn="ctr">
               <a:buNone/>
             </a:pPr>
             <a:r>
@@ -2285,6 +2266,13 @@
             <a:prstDash val="solid"/>
           </a:ln>
         </p:spPr>
+        <p:txBody>
+          <a:bodyPr/>
+          <a:lstStyle/>
+          <a:p>
+            <a:endParaRPr lang="en-US"/>
+          </a:p>
+        </p:txBody>
       </p:sp>
       <p:sp>
         <p:nvSpPr>
@@ -2307,7 +2295,7 @@
           <a:bodyPr wrap="square" lIns="0" tIns="0" rIns="0" bIns="0" rtlCol="0" anchor="ctr"/>
           <a:lstStyle/>
           <a:p>
-            <a:pPr algn="ctr" indent="0" marL="0">
+            <a:pPr marL="0" indent="0" algn="ctr">
               <a:buNone/>
             </a:pPr>
             <a:r>
@@ -2346,7 +2334,7 @@
           <a:bodyPr wrap="square" lIns="0" tIns="0" rIns="0" bIns="0" rtlCol="0" anchor="ctr"/>
           <a:lstStyle/>
           <a:p>
-            <a:pPr indent="0" marL="0">
+            <a:pPr marL="0" indent="0">
               <a:buNone/>
             </a:pPr>
             <a:r>
@@ -2385,7 +2373,7 @@
           <a:bodyPr wrap="square" lIns="0" tIns="0" rIns="0" bIns="0" rtlCol="0" anchor="t"/>
           <a:lstStyle/>
           <a:p>
-            <a:pPr indent="0" marL="0">
+            <a:pPr marL="0" indent="0">
               <a:lnSpc>
                 <a:spcPct val="103000"/>
               </a:lnSpc>
@@ -2427,7 +2415,7 @@
           <a:bodyPr wrap="square" lIns="0" tIns="0" rIns="0" bIns="0" rtlCol="0" anchor="ctr"/>
           <a:lstStyle/>
           <a:p>
-            <a:pPr indent="0" marL="0">
+            <a:pPr marL="0" indent="0">
               <a:buNone/>
             </a:pPr>
             <a:r>
@@ -2468,6 +2456,13 @@
             <a:tailEnd type="triangle"/>
           </a:ln>
         </p:spPr>
+        <p:txBody>
+          <a:bodyPr/>
+          <a:lstStyle/>
+          <a:p>
+            <a:endParaRPr lang="en-US"/>
+          </a:p>
+        </p:txBody>
       </p:sp>
       <p:sp>
         <p:nvSpPr>
@@ -2495,6 +2490,13 @@
             <a:prstDash val="solid"/>
           </a:ln>
         </p:spPr>
+        <p:txBody>
+          <a:bodyPr/>
+          <a:lstStyle/>
+          <a:p>
+            <a:endParaRPr lang="en-US"/>
+          </a:p>
+        </p:txBody>
       </p:sp>
       <p:sp>
         <p:nvSpPr>
@@ -2520,6 +2522,13 @@
             <a:prstDash val="solid"/>
           </a:ln>
         </p:spPr>
+        <p:txBody>
+          <a:bodyPr/>
+          <a:lstStyle/>
+          <a:p>
+            <a:endParaRPr lang="en-US"/>
+          </a:p>
+        </p:txBody>
       </p:sp>
       <p:sp>
         <p:nvSpPr>
@@ -2542,7 +2551,7 @@
           <a:bodyPr wrap="square" lIns="0" tIns="0" rIns="0" bIns="0" rtlCol="0" anchor="ctr"/>
           <a:lstStyle/>
           <a:p>
-            <a:pPr algn="ctr" indent="0" marL="0">
+            <a:pPr marL="0" indent="0" algn="ctr">
               <a:buNone/>
             </a:pPr>
             <a:r>
@@ -2586,6 +2595,13 @@
             <a:prstDash val="solid"/>
           </a:ln>
         </p:spPr>
+        <p:txBody>
+          <a:bodyPr/>
+          <a:lstStyle/>
+          <a:p>
+            <a:endParaRPr lang="en-US"/>
+          </a:p>
+        </p:txBody>
       </p:sp>
       <p:sp>
         <p:nvSpPr>
@@ -2608,7 +2624,7 @@
           <a:bodyPr wrap="square" lIns="0" tIns="0" rIns="0" bIns="0" rtlCol="0" anchor="ctr"/>
           <a:lstStyle/>
           <a:p>
-            <a:pPr algn="ctr" indent="0" marL="0">
+            <a:pPr marL="0" indent="0" algn="ctr">
               <a:buNone/>
             </a:pPr>
             <a:r>
@@ -2647,7 +2663,7 @@
           <a:bodyPr wrap="square" lIns="0" tIns="0" rIns="0" bIns="0" rtlCol="0" anchor="ctr"/>
           <a:lstStyle/>
           <a:p>
-            <a:pPr indent="0" marL="0">
+            <a:pPr marL="0" indent="0">
               <a:buNone/>
             </a:pPr>
             <a:r>
@@ -2686,7 +2702,7 @@
           <a:bodyPr wrap="square" lIns="0" tIns="0" rIns="0" bIns="0" rtlCol="0" anchor="t"/>
           <a:lstStyle/>
           <a:p>
-            <a:pPr indent="0" marL="0">
+            <a:pPr marL="0" indent="0">
               <a:lnSpc>
                 <a:spcPct val="103000"/>
               </a:lnSpc>
@@ -2728,7 +2744,7 @@
           <a:bodyPr wrap="square" lIns="0" tIns="0" rIns="0" bIns="0" rtlCol="0" anchor="ctr"/>
           <a:lstStyle/>
           <a:p>
-            <a:pPr indent="0" marL="0">
+            <a:pPr marL="0" indent="0">
               <a:buNone/>
             </a:pPr>
             <a:r>
@@ -2772,6 +2788,13 @@
             <a:prstDash val="solid"/>
           </a:ln>
         </p:spPr>
+        <p:txBody>
+          <a:bodyPr/>
+          <a:lstStyle/>
+          <a:p>
+            <a:endParaRPr lang="en-US"/>
+          </a:p>
+        </p:txBody>
       </p:sp>
       <p:sp>
         <p:nvSpPr>
@@ -2797,6 +2820,13 @@
             <a:prstDash val="solid"/>
           </a:ln>
         </p:spPr>
+        <p:txBody>
+          <a:bodyPr/>
+          <a:lstStyle/>
+          <a:p>
+            <a:endParaRPr lang="en-US"/>
+          </a:p>
+        </p:txBody>
       </p:sp>
       <p:sp>
         <p:nvSpPr>
@@ -2819,7 +2849,7 @@
           <a:bodyPr wrap="square" lIns="0" tIns="0" rIns="0" bIns="0" rtlCol="0" anchor="ctr"/>
           <a:lstStyle/>
           <a:p>
-            <a:pPr algn="ctr" indent="0" marL="0">
+            <a:pPr marL="0" indent="0" algn="ctr">
               <a:buNone/>
             </a:pPr>
             <a:r>
@@ -2863,6 +2893,13 @@
             <a:prstDash val="solid"/>
           </a:ln>
         </p:spPr>
+        <p:txBody>
+          <a:bodyPr/>
+          <a:lstStyle/>
+          <a:p>
+            <a:endParaRPr lang="en-US"/>
+          </a:p>
+        </p:txBody>
       </p:sp>
       <p:sp>
         <p:nvSpPr>
@@ -2885,7 +2922,7 @@
           <a:bodyPr wrap="square" lIns="0" tIns="0" rIns="0" bIns="0" rtlCol="0" anchor="ctr"/>
           <a:lstStyle/>
           <a:p>
-            <a:pPr algn="ctr" indent="0" marL="0">
+            <a:pPr marL="0" indent="0" algn="ctr">
               <a:buNone/>
             </a:pPr>
             <a:r>
@@ -2924,7 +2961,7 @@
           <a:bodyPr wrap="square" lIns="0" tIns="0" rIns="0" bIns="0" rtlCol="0" anchor="ctr"/>
           <a:lstStyle/>
           <a:p>
-            <a:pPr indent="0" marL="0">
+            <a:pPr marL="0" indent="0">
               <a:buNone/>
             </a:pPr>
             <a:r>
@@ -2963,7 +3000,7 @@
           <a:bodyPr wrap="square" lIns="0" tIns="0" rIns="0" bIns="0" rtlCol="0" anchor="t"/>
           <a:lstStyle/>
           <a:p>
-            <a:pPr indent="0" marL="0">
+            <a:pPr marL="0" indent="0">
               <a:lnSpc>
                 <a:spcPct val="103000"/>
               </a:lnSpc>
@@ -3005,7 +3042,7 @@
           <a:bodyPr wrap="square" lIns="0" tIns="0" rIns="0" bIns="0" rtlCol="0" anchor="ctr"/>
           <a:lstStyle/>
           <a:p>
-            <a:pPr indent="0" marL="0">
+            <a:pPr marL="0" indent="0">
               <a:buNone/>
             </a:pPr>
             <a:r>
@@ -3046,6 +3083,13 @@
             <a:tailEnd type="triangle"/>
           </a:ln>
         </p:spPr>
+        <p:txBody>
+          <a:bodyPr/>
+          <a:lstStyle/>
+          <a:p>
+            <a:endParaRPr lang="en-US"/>
+          </a:p>
+        </p:txBody>
       </p:sp>
       <p:sp>
         <p:nvSpPr>
@@ -3073,6 +3117,13 @@
             <a:prstDash val="solid"/>
           </a:ln>
         </p:spPr>
+        <p:txBody>
+          <a:bodyPr/>
+          <a:lstStyle/>
+          <a:p>
+            <a:endParaRPr lang="en-US"/>
+          </a:p>
+        </p:txBody>
       </p:sp>
       <p:sp>
         <p:nvSpPr>
@@ -3098,6 +3149,13 @@
             <a:prstDash val="solid"/>
           </a:ln>
         </p:spPr>
+        <p:txBody>
+          <a:bodyPr/>
+          <a:lstStyle/>
+          <a:p>
+            <a:endParaRPr lang="en-US"/>
+          </a:p>
+        </p:txBody>
       </p:sp>
       <p:sp>
         <p:nvSpPr>
@@ -3120,7 +3178,7 @@
           <a:bodyPr wrap="square" lIns="0" tIns="0" rIns="0" bIns="0" rtlCol="0" anchor="ctr"/>
           <a:lstStyle/>
           <a:p>
-            <a:pPr algn="ctr" indent="0" marL="0">
+            <a:pPr marL="0" indent="0" algn="ctr">
               <a:buNone/>
             </a:pPr>
             <a:r>
@@ -3164,6 +3222,13 @@
             <a:prstDash val="solid"/>
           </a:ln>
         </p:spPr>
+        <p:txBody>
+          <a:bodyPr/>
+          <a:lstStyle/>
+          <a:p>
+            <a:endParaRPr lang="en-US"/>
+          </a:p>
+        </p:txBody>
       </p:sp>
       <p:sp>
         <p:nvSpPr>
@@ -3186,7 +3251,7 @@
           <a:bodyPr wrap="square" lIns="0" tIns="0" rIns="0" bIns="0" rtlCol="0" anchor="ctr"/>
           <a:lstStyle/>
           <a:p>
-            <a:pPr algn="ctr" indent="0" marL="0">
+            <a:pPr marL="0" indent="0" algn="ctr">
               <a:buNone/>
             </a:pPr>
             <a:r>
@@ -3225,7 +3290,7 @@
           <a:bodyPr wrap="square" lIns="0" tIns="0" rIns="0" bIns="0" rtlCol="0" anchor="ctr"/>
           <a:lstStyle/>
           <a:p>
-            <a:pPr indent="0" marL="0">
+            <a:pPr marL="0" indent="0">
               <a:buNone/>
             </a:pPr>
             <a:r>
@@ -3264,7 +3329,7 @@
           <a:bodyPr wrap="square" lIns="0" tIns="0" rIns="0" bIns="0" rtlCol="0" anchor="t"/>
           <a:lstStyle/>
           <a:p>
-            <a:pPr indent="0" marL="0">
+            <a:pPr marL="0" indent="0">
               <a:lnSpc>
                 <a:spcPct val="103000"/>
               </a:lnSpc>
@@ -3306,7 +3371,7 @@
           <a:bodyPr wrap="square" lIns="0" tIns="0" rIns="0" bIns="0" rtlCol="0" anchor="ctr"/>
           <a:lstStyle/>
           <a:p>
-            <a:pPr indent="0" marL="0">
+            <a:pPr marL="0" indent="0">
               <a:buNone/>
             </a:pPr>
             <a:r>
@@ -3347,6 +3412,13 @@
             <a:tailEnd type="triangle"/>
           </a:ln>
         </p:spPr>
+        <p:txBody>
+          <a:bodyPr/>
+          <a:lstStyle/>
+          <a:p>
+            <a:endParaRPr lang="en-US"/>
+          </a:p>
+        </p:txBody>
       </p:sp>
       <p:sp>
         <p:nvSpPr>
@@ -3374,6 +3446,13 @@
             <a:prstDash val="solid"/>
           </a:ln>
         </p:spPr>
+        <p:txBody>
+          <a:bodyPr/>
+          <a:lstStyle/>
+          <a:p>
+            <a:endParaRPr lang="en-US"/>
+          </a:p>
+        </p:txBody>
       </p:sp>
       <p:sp>
         <p:nvSpPr>
@@ -3399,6 +3478,13 @@
             <a:prstDash val="solid"/>
           </a:ln>
         </p:spPr>
+        <p:txBody>
+          <a:bodyPr/>
+          <a:lstStyle/>
+          <a:p>
+            <a:endParaRPr lang="en-US"/>
+          </a:p>
+        </p:txBody>
       </p:sp>
       <p:sp>
         <p:nvSpPr>
@@ -3421,7 +3507,7 @@
           <a:bodyPr wrap="square" lIns="0" tIns="0" rIns="0" bIns="0" rtlCol="0" anchor="ctr"/>
           <a:lstStyle/>
           <a:p>
-            <a:pPr algn="ctr" indent="0" marL="0">
+            <a:pPr marL="0" indent="0" algn="ctr">
               <a:buNone/>
             </a:pPr>
             <a:r>
@@ -3465,6 +3551,13 @@
             <a:prstDash val="solid"/>
           </a:ln>
         </p:spPr>
+        <p:txBody>
+          <a:bodyPr/>
+          <a:lstStyle/>
+          <a:p>
+            <a:endParaRPr lang="en-US"/>
+          </a:p>
+        </p:txBody>
       </p:sp>
       <p:sp>
         <p:nvSpPr>
@@ -3487,7 +3580,7 @@
           <a:bodyPr wrap="square" lIns="0" tIns="0" rIns="0" bIns="0" rtlCol="0" anchor="ctr"/>
           <a:lstStyle/>
           <a:p>
-            <a:pPr algn="ctr" indent="0" marL="0">
+            <a:pPr marL="0" indent="0" algn="ctr">
               <a:buNone/>
             </a:pPr>
             <a:r>
@@ -3526,7 +3619,7 @@
           <a:bodyPr wrap="square" lIns="0" tIns="0" rIns="0" bIns="0" rtlCol="0" anchor="ctr"/>
           <a:lstStyle/>
           <a:p>
-            <a:pPr indent="0" marL="0">
+            <a:pPr marL="0" indent="0">
               <a:buNone/>
             </a:pPr>
             <a:r>
@@ -3565,7 +3658,7 @@
           <a:bodyPr wrap="square" lIns="0" tIns="0" rIns="0" bIns="0" rtlCol="0" anchor="t"/>
           <a:lstStyle/>
           <a:p>
-            <a:pPr indent="0" marL="0">
+            <a:pPr marL="0" indent="0">
               <a:lnSpc>
                 <a:spcPct val="103000"/>
               </a:lnSpc>
@@ -3607,7 +3700,7 @@
           <a:bodyPr wrap="square" lIns="0" tIns="0" rIns="0" bIns="0" rtlCol="0" anchor="ctr"/>
           <a:lstStyle/>
           <a:p>
-            <a:pPr indent="0" marL="0">
+            <a:pPr marL="0" indent="0">
               <a:buNone/>
             </a:pPr>
             <a:r>
@@ -3648,6 +3741,13 @@
             <a:tailEnd type="triangle"/>
           </a:ln>
         </p:spPr>
+        <p:txBody>
+          <a:bodyPr/>
+          <a:lstStyle/>
+          <a:p>
+            <a:endParaRPr lang="en-US"/>
+          </a:p>
+        </p:txBody>
       </p:sp>
       <p:sp>
         <p:nvSpPr>
@@ -3675,6 +3775,13 @@
             <a:prstDash val="solid"/>
           </a:ln>
         </p:spPr>
+        <p:txBody>
+          <a:bodyPr/>
+          <a:lstStyle/>
+          <a:p>
+            <a:endParaRPr lang="en-US"/>
+          </a:p>
+        </p:txBody>
       </p:sp>
       <p:sp>
         <p:nvSpPr>
@@ -3700,6 +3807,13 @@
             <a:prstDash val="solid"/>
           </a:ln>
         </p:spPr>
+        <p:txBody>
+          <a:bodyPr/>
+          <a:lstStyle/>
+          <a:p>
+            <a:endParaRPr lang="en-US"/>
+          </a:p>
+        </p:txBody>
       </p:sp>
       <p:sp>
         <p:nvSpPr>
@@ -3722,7 +3836,7 @@
           <a:bodyPr wrap="square" lIns="0" tIns="0" rIns="0" bIns="0" rtlCol="0" anchor="ctr"/>
           <a:lstStyle/>
           <a:p>
-            <a:pPr algn="ctr" indent="0" marL="0">
+            <a:pPr marL="0" indent="0" algn="ctr">
               <a:buNone/>
             </a:pPr>
             <a:r>
@@ -3766,6 +3880,13 @@
             <a:prstDash val="solid"/>
           </a:ln>
         </p:spPr>
+        <p:txBody>
+          <a:bodyPr/>
+          <a:lstStyle/>
+          <a:p>
+            <a:endParaRPr lang="en-US"/>
+          </a:p>
+        </p:txBody>
       </p:sp>
       <p:sp>
         <p:nvSpPr>
@@ -3788,7 +3909,7 @@
           <a:bodyPr wrap="square" lIns="0" tIns="0" rIns="0" bIns="0" rtlCol="0" anchor="ctr"/>
           <a:lstStyle/>
           <a:p>
-            <a:pPr algn="ctr" indent="0" marL="0">
+            <a:pPr marL="0" indent="0" algn="ctr">
               <a:buNone/>
             </a:pPr>
             <a:r>
@@ -3827,7 +3948,7 @@
           <a:bodyPr wrap="square" lIns="0" tIns="0" rIns="0" bIns="0" rtlCol="0" anchor="ctr"/>
           <a:lstStyle/>
           <a:p>
-            <a:pPr indent="0" marL="0">
+            <a:pPr marL="0" indent="0">
               <a:buNone/>
             </a:pPr>
             <a:r>
@@ -3866,7 +3987,7 @@
           <a:bodyPr wrap="square" lIns="0" tIns="0" rIns="0" bIns="0" rtlCol="0" anchor="t"/>
           <a:lstStyle/>
           <a:p>
-            <a:pPr indent="0" marL="0">
+            <a:pPr marL="0" indent="0">
               <a:lnSpc>
                 <a:spcPct val="103000"/>
               </a:lnSpc>
@@ -3908,7 +4029,7 @@
           <a:bodyPr wrap="square" lIns="0" tIns="0" rIns="0" bIns="0" rtlCol="0" anchor="ctr"/>
           <a:lstStyle/>
           <a:p>
-            <a:pPr indent="0" marL="0">
+            <a:pPr marL="0" indent="0">
               <a:buNone/>
             </a:pPr>
             <a:r>
@@ -3949,6 +4070,13 @@
             <a:tailEnd type="triangle"/>
           </a:ln>
         </p:spPr>
+        <p:txBody>
+          <a:bodyPr/>
+          <a:lstStyle/>
+          <a:p>
+            <a:endParaRPr lang="en-US"/>
+          </a:p>
+        </p:txBody>
       </p:sp>
       <p:sp>
         <p:nvSpPr>
@@ -3971,6 +4099,13 @@
           </a:solidFill>
           <a:ln/>
         </p:spPr>
+        <p:txBody>
+          <a:bodyPr/>
+          <a:lstStyle/>
+          <a:p>
+            <a:endParaRPr lang="en-US"/>
+          </a:p>
+        </p:txBody>
       </p:sp>
       <p:sp>
         <p:nvSpPr>
@@ -3993,7 +4128,7 @@
           <a:bodyPr wrap="square" lIns="0" tIns="0" rIns="0" bIns="0" rtlCol="0" anchor="ctr"/>
           <a:lstStyle/>
           <a:p>
-            <a:pPr indent="0" marL="0">
+            <a:pPr marL="0" indent="0">
               <a:buNone/>
             </a:pPr>
             <a:r>
@@ -4007,9 +4142,6 @@
               </a:rPr>
               <a:t>Every actor writes facts the next actor needs.  </a:t>
             </a:r>
-            <a:pPr indent="0" marL="0">
-              <a:buNone/>
-            </a:pPr>
             <a:r>
               <a:rPr lang="en-US" sz="1050" dirty="0">
                 <a:solidFill>
@@ -4046,7 +4178,7 @@
           <a:bodyPr wrap="square" lIns="0" tIns="0" rIns="0" bIns="0" rtlCol="0" anchor="ctr"/>
           <a:lstStyle/>
           <a:p>
-            <a:pPr indent="0" marL="0">
+            <a:pPr marL="0" indent="0">
               <a:buNone/>
             </a:pPr>
             <a:r>
@@ -4085,7 +4217,7 @@
           <a:bodyPr wrap="square" lIns="0" tIns="0" rIns="0" bIns="0" rtlCol="0" anchor="ctr"/>
           <a:lstStyle/>
           <a:p>
-            <a:pPr algn="r" indent="0" marL="0">
+            <a:pPr marL="0" indent="0" algn="r">
               <a:buNone/>
             </a:pPr>
             <a:r>
@@ -4124,7 +4256,7 @@
           <a:bodyPr wrap="square" lIns="0" tIns="0" rIns="0" bIns="0" rtlCol="0" anchor="ctr"/>
           <a:lstStyle/>
           <a:p>
-            <a:pPr algn="r" indent="0" marL="0">
+            <a:pPr marL="0" indent="0" algn="r">
               <a:buNone/>
             </a:pPr>
             <a:r>
@@ -4158,6 +4290,7 @@
         <a:solidFill>
           <a:srgbClr val="FFFFFF"/>
         </a:solidFill>
+        <a:effectLst/>
       </p:bgPr>
     </p:bg>
     <p:spTree>
@@ -4195,11 +4328,11 @@
           <a:bodyPr wrap="square" lIns="0" tIns="0" rIns="0" bIns="0" rtlCol="0" anchor="ctr"/>
           <a:lstStyle/>
           <a:p>
-            <a:pPr indent="0" marL="0">
-              <a:buNone/>
-            </a:pPr>
-            <a:r>
-              <a:rPr lang="en-US" sz="1100" b="1" spc="200" kern="0" dirty="0">
+            <a:pPr marL="0" indent="0">
+              <a:buNone/>
+            </a:pPr>
+            <a:r>
+              <a:rPr lang="en-US" sz="1100" b="1" kern="0" spc="200" dirty="0">
                 <a:solidFill>
                   <a:srgbClr val="1F7A47"/>
                 </a:solidFill>
@@ -4234,7 +4367,7 @@
           <a:bodyPr wrap="square" lIns="0" tIns="0" rIns="0" bIns="0" rtlCol="0" anchor="ctr"/>
           <a:lstStyle/>
           <a:p>
-            <a:pPr indent="0" marL="0">
+            <a:pPr marL="0" indent="0">
               <a:buNone/>
             </a:pPr>
             <a:r>
@@ -4278,6 +4411,13 @@
             <a:prstDash val="solid"/>
           </a:ln>
         </p:spPr>
+        <p:txBody>
+          <a:bodyPr/>
+          <a:lstStyle/>
+          <a:p>
+            <a:endParaRPr lang="en-US"/>
+          </a:p>
+        </p:txBody>
       </p:sp>
       <p:sp>
         <p:nvSpPr>
@@ -4300,7 +4440,7 @@
           <a:bodyPr wrap="square" lIns="254" tIns="254" rIns="254" bIns="254" rtlCol="0" anchor="ctr"/>
           <a:lstStyle/>
           <a:p>
-            <a:pPr algn="ctr" indent="0" marL="0">
+            <a:pPr marL="0" indent="0" algn="ctr">
               <a:buNone/>
             </a:pPr>
             <a:r>
@@ -4342,6 +4482,13 @@
             <a:prstDash val="solid"/>
           </a:ln>
         </p:spPr>
+        <p:txBody>
+          <a:bodyPr/>
+          <a:lstStyle/>
+          <a:p>
+            <a:endParaRPr lang="en-US"/>
+          </a:p>
+        </p:txBody>
       </p:sp>
       <p:sp>
         <p:nvSpPr>
@@ -4364,7 +4511,7 @@
           <a:bodyPr wrap="square" lIns="0" tIns="0" rIns="0" bIns="0" rtlCol="0" anchor="ctr"/>
           <a:lstStyle/>
           <a:p>
-            <a:pPr algn="ctr" indent="0" marL="0">
+            <a:pPr marL="0" indent="0" algn="ctr">
               <a:buNone/>
             </a:pPr>
             <a:r>
@@ -4408,6 +4555,13 @@
             <a:prstDash val="solid"/>
           </a:ln>
         </p:spPr>
+        <p:txBody>
+          <a:bodyPr/>
+          <a:lstStyle/>
+          <a:p>
+            <a:endParaRPr lang="en-US"/>
+          </a:p>
+        </p:txBody>
       </p:sp>
       <p:sp>
         <p:nvSpPr>
@@ -4430,7 +4584,7 @@
           <a:bodyPr wrap="square" lIns="254" tIns="254" rIns="254" bIns="254" rtlCol="0" anchor="ctr"/>
           <a:lstStyle/>
           <a:p>
-            <a:pPr algn="ctr" indent="0" marL="0">
+            <a:pPr marL="0" indent="0" algn="ctr">
               <a:buNone/>
             </a:pPr>
             <a:r>
@@ -4474,6 +4628,13 @@
             <a:prstDash val="solid"/>
           </a:ln>
         </p:spPr>
+        <p:txBody>
+          <a:bodyPr/>
+          <a:lstStyle/>
+          <a:p>
+            <a:endParaRPr lang="en-US"/>
+          </a:p>
+        </p:txBody>
       </p:sp>
       <p:sp>
         <p:nvSpPr>
@@ -4496,7 +4657,7 @@
           <a:bodyPr wrap="square" lIns="254" tIns="254" rIns="254" bIns="254" rtlCol="0" anchor="ctr"/>
           <a:lstStyle/>
           <a:p>
-            <a:pPr algn="ctr" indent="0" marL="0">
+            <a:pPr marL="0" indent="0" algn="ctr">
               <a:buNone/>
             </a:pPr>
             <a:r>
@@ -4540,6 +4701,13 @@
             <a:prstDash val="solid"/>
           </a:ln>
         </p:spPr>
+        <p:txBody>
+          <a:bodyPr/>
+          <a:lstStyle/>
+          <a:p>
+            <a:endParaRPr lang="en-US"/>
+          </a:p>
+        </p:txBody>
       </p:sp>
       <p:sp>
         <p:nvSpPr>
@@ -4562,7 +4730,7 @@
           <a:bodyPr wrap="square" lIns="254" tIns="254" rIns="254" bIns="254" rtlCol="0" anchor="ctr"/>
           <a:lstStyle/>
           <a:p>
-            <a:pPr algn="ctr" indent="0" marL="0">
+            <a:pPr marL="0" indent="0" algn="ctr">
               <a:buNone/>
             </a:pPr>
             <a:r>
@@ -4606,6 +4774,13 @@
             <a:prstDash val="solid"/>
           </a:ln>
         </p:spPr>
+        <p:txBody>
+          <a:bodyPr/>
+          <a:lstStyle/>
+          <a:p>
+            <a:endParaRPr lang="en-US"/>
+          </a:p>
+        </p:txBody>
       </p:sp>
       <p:sp>
         <p:nvSpPr>
@@ -4628,7 +4803,7 @@
           <a:bodyPr wrap="square" lIns="254" tIns="254" rIns="254" bIns="254" rtlCol="0" anchor="ctr"/>
           <a:lstStyle/>
           <a:p>
-            <a:pPr algn="ctr" indent="0" marL="0">
+            <a:pPr marL="0" indent="0" algn="ctr">
               <a:buNone/>
             </a:pPr>
             <a:r>
@@ -4670,6 +4845,13 @@
             <a:prstDash val="solid"/>
           </a:ln>
         </p:spPr>
+        <p:txBody>
+          <a:bodyPr/>
+          <a:lstStyle/>
+          <a:p>
+            <a:endParaRPr lang="en-US"/>
+          </a:p>
+        </p:txBody>
       </p:sp>
       <p:sp>
         <p:nvSpPr>
@@ -4692,7 +4874,7 @@
           <a:bodyPr wrap="square" lIns="0" tIns="0" rIns="0" bIns="0" rtlCol="0" anchor="ctr"/>
           <a:lstStyle/>
           <a:p>
-            <a:pPr algn="ctr" indent="0" marL="0">
+            <a:pPr marL="0" indent="0" algn="ctr">
               <a:buNone/>
             </a:pPr>
             <a:r>
@@ -4736,6 +4918,13 @@
             <a:prstDash val="solid"/>
           </a:ln>
         </p:spPr>
+        <p:txBody>
+          <a:bodyPr/>
+          <a:lstStyle/>
+          <a:p>
+            <a:endParaRPr lang="en-US"/>
+          </a:p>
+        </p:txBody>
       </p:sp>
       <p:sp>
         <p:nvSpPr>
@@ -4758,7 +4947,7 @@
           <a:bodyPr wrap="square" lIns="254" tIns="254" rIns="254" bIns="254" rtlCol="0" anchor="ctr"/>
           <a:lstStyle/>
           <a:p>
-            <a:pPr algn="ctr" indent="0" marL="0">
+            <a:pPr marL="0" indent="0" algn="ctr">
               <a:buNone/>
             </a:pPr>
             <a:r>
@@ -4775,7 +4964,7 @@
             <a:endParaRPr lang="en-US" sz="1050" dirty="0"/>
           </a:p>
           <a:p>
-            <a:pPr algn="ctr" indent="0" marL="0">
+            <a:pPr marL="0" indent="0" algn="ctr">
               <a:buNone/>
             </a:pPr>
             <a:r>
@@ -4819,6 +5008,13 @@
             <a:prstDash val="solid"/>
           </a:ln>
         </p:spPr>
+        <p:txBody>
+          <a:bodyPr/>
+          <a:lstStyle/>
+          <a:p>
+            <a:endParaRPr lang="en-US"/>
+          </a:p>
+        </p:txBody>
       </p:sp>
       <p:sp>
         <p:nvSpPr>
@@ -4841,7 +5037,7 @@
           <a:bodyPr wrap="square" lIns="254" tIns="254" rIns="254" bIns="254" rtlCol="0" anchor="ctr"/>
           <a:lstStyle/>
           <a:p>
-            <a:pPr algn="ctr" indent="0" marL="0">
+            <a:pPr marL="0" indent="0" algn="ctr">
               <a:buNone/>
             </a:pPr>
             <a:r>
@@ -4883,6 +5079,13 @@
             <a:prstDash val="solid"/>
           </a:ln>
         </p:spPr>
+        <p:txBody>
+          <a:bodyPr/>
+          <a:lstStyle/>
+          <a:p>
+            <a:endParaRPr lang="en-US"/>
+          </a:p>
+        </p:txBody>
       </p:sp>
       <p:sp>
         <p:nvSpPr>
@@ -4905,7 +5108,7 @@
           <a:bodyPr wrap="square" lIns="0" tIns="0" rIns="0" bIns="0" rtlCol="0" anchor="ctr"/>
           <a:lstStyle/>
           <a:p>
-            <a:pPr algn="ctr" indent="0" marL="0">
+            <a:pPr marL="0" indent="0" algn="ctr">
               <a:buNone/>
             </a:pPr>
             <a:r>
@@ -4949,6 +5152,13 @@
             <a:prstDash val="solid"/>
           </a:ln>
         </p:spPr>
+        <p:txBody>
+          <a:bodyPr/>
+          <a:lstStyle/>
+          <a:p>
+            <a:endParaRPr lang="en-US"/>
+          </a:p>
+        </p:txBody>
       </p:sp>
       <p:sp>
         <p:nvSpPr>
@@ -4971,7 +5181,7 @@
           <a:bodyPr wrap="square" lIns="254" tIns="254" rIns="254" bIns="254" rtlCol="0" anchor="ctr"/>
           <a:lstStyle/>
           <a:p>
-            <a:pPr algn="ctr" indent="0" marL="0">
+            <a:pPr marL="0" indent="0" algn="ctr">
               <a:buNone/>
             </a:pPr>
             <a:r>
@@ -5013,6 +5223,13 @@
             <a:prstDash val="solid"/>
           </a:ln>
         </p:spPr>
+        <p:txBody>
+          <a:bodyPr/>
+          <a:lstStyle/>
+          <a:p>
+            <a:endParaRPr lang="en-US"/>
+          </a:p>
+        </p:txBody>
       </p:sp>
       <p:sp>
         <p:nvSpPr>
@@ -5035,7 +5252,7 @@
           <a:bodyPr wrap="square" lIns="0" tIns="0" rIns="0" bIns="0" rtlCol="0" anchor="ctr"/>
           <a:lstStyle/>
           <a:p>
-            <a:pPr algn="ctr" indent="0" marL="0">
+            <a:pPr marL="0" indent="0" algn="ctr">
               <a:buNone/>
             </a:pPr>
             <a:r>
@@ -5079,6 +5296,13 @@
             <a:prstDash val="solid"/>
           </a:ln>
         </p:spPr>
+        <p:txBody>
+          <a:bodyPr/>
+          <a:lstStyle/>
+          <a:p>
+            <a:endParaRPr lang="en-US"/>
+          </a:p>
+        </p:txBody>
       </p:sp>
       <p:sp>
         <p:nvSpPr>
@@ -5101,7 +5325,7 @@
           <a:bodyPr wrap="square" lIns="254" tIns="254" rIns="254" bIns="254" rtlCol="0" anchor="ctr"/>
           <a:lstStyle/>
           <a:p>
-            <a:pPr algn="ctr" indent="0" marL="0">
+            <a:pPr marL="0" indent="0" algn="ctr">
               <a:buNone/>
             </a:pPr>
             <a:r>
@@ -5145,6 +5369,13 @@
             <a:prstDash val="solid"/>
           </a:ln>
         </p:spPr>
+        <p:txBody>
+          <a:bodyPr/>
+          <a:lstStyle/>
+          <a:p>
+            <a:endParaRPr lang="en-US"/>
+          </a:p>
+        </p:txBody>
       </p:sp>
       <p:sp>
         <p:nvSpPr>
@@ -5167,7 +5398,7 @@
           <a:bodyPr wrap="square" lIns="254" tIns="254" rIns="254" bIns="254" rtlCol="0" anchor="ctr"/>
           <a:lstStyle/>
           <a:p>
-            <a:pPr algn="ctr" indent="0" marL="0">
+            <a:pPr marL="0" indent="0" algn="ctr">
               <a:buNone/>
             </a:pPr>
             <a:r>
@@ -5211,6 +5442,13 @@
             <a:prstDash val="solid"/>
           </a:ln>
         </p:spPr>
+        <p:txBody>
+          <a:bodyPr/>
+          <a:lstStyle/>
+          <a:p>
+            <a:endParaRPr lang="en-US"/>
+          </a:p>
+        </p:txBody>
       </p:sp>
       <p:sp>
         <p:nvSpPr>
@@ -5233,7 +5471,7 @@
           <a:bodyPr wrap="square" lIns="254" tIns="254" rIns="254" bIns="254" rtlCol="0" anchor="ctr"/>
           <a:lstStyle/>
           <a:p>
-            <a:pPr algn="ctr" indent="0" marL="0">
+            <a:pPr marL="0" indent="0" algn="ctr">
               <a:buNone/>
             </a:pPr>
             <a:r>
@@ -5277,6 +5515,13 @@
             <a:prstDash val="solid"/>
           </a:ln>
         </p:spPr>
+        <p:txBody>
+          <a:bodyPr/>
+          <a:lstStyle/>
+          <a:p>
+            <a:endParaRPr lang="en-US"/>
+          </a:p>
+        </p:txBody>
       </p:sp>
       <p:sp>
         <p:nvSpPr>
@@ -5299,7 +5544,7 @@
           <a:bodyPr wrap="square" lIns="254" tIns="254" rIns="254" bIns="254" rtlCol="0" anchor="ctr"/>
           <a:lstStyle/>
           <a:p>
-            <a:pPr algn="ctr" indent="0" marL="0">
+            <a:pPr marL="0" indent="0" algn="ctr">
               <a:buNone/>
             </a:pPr>
             <a:r>
@@ -5338,7 +5583,7 @@
           <a:bodyPr wrap="square" lIns="0" tIns="0" rIns="0" bIns="0" rtlCol="0" anchor="ctr"/>
           <a:lstStyle/>
           <a:p>
-            <a:pPr indent="0" marL="0">
+            <a:pPr marL="0" indent="0">
               <a:buNone/>
             </a:pPr>
             <a:r>
@@ -5382,6 +5627,13 @@
             <a:prstDash val="solid"/>
           </a:ln>
         </p:spPr>
+        <p:txBody>
+          <a:bodyPr/>
+          <a:lstStyle/>
+          <a:p>
+            <a:endParaRPr lang="en-US"/>
+          </a:p>
+        </p:txBody>
       </p:sp>
       <p:sp>
         <p:nvSpPr>
@@ -5404,7 +5656,7 @@
           <a:bodyPr wrap="square" lIns="254" tIns="254" rIns="254" bIns="254" rtlCol="0" anchor="ctr"/>
           <a:lstStyle/>
           <a:p>
-            <a:pPr algn="ctr" indent="0" marL="0">
+            <a:pPr marL="0" indent="0" algn="ctr">
               <a:buNone/>
             </a:pPr>
             <a:r>
@@ -5443,11 +5695,11 @@
           <a:bodyPr wrap="square" lIns="0" tIns="0" rIns="0" bIns="0" rtlCol="0" anchor="ctr"/>
           <a:lstStyle/>
           <a:p>
-            <a:pPr indent="0" marL="0">
-              <a:buNone/>
-            </a:pPr>
-            <a:r>
-              <a:rPr lang="en-US" sz="900" b="1" spc="100" kern="0" dirty="0">
+            <a:pPr marL="0" indent="0">
+              <a:buNone/>
+            </a:pPr>
+            <a:r>
+              <a:rPr lang="en-US" sz="900" b="1" kern="0" spc="100" dirty="0">
                 <a:solidFill>
                   <a:srgbClr val="6B7670"/>
                 </a:solidFill>
@@ -5487,6 +5739,13 @@
             <a:prstDash val="solid"/>
           </a:ln>
         </p:spPr>
+        <p:txBody>
+          <a:bodyPr/>
+          <a:lstStyle/>
+          <a:p>
+            <a:endParaRPr lang="en-US"/>
+          </a:p>
+        </p:txBody>
       </p:sp>
       <p:sp>
         <p:nvSpPr>
@@ -5512,6 +5771,13 @@
             <a:prstDash val="solid"/>
           </a:ln>
         </p:spPr>
+        <p:txBody>
+          <a:bodyPr/>
+          <a:lstStyle/>
+          <a:p>
+            <a:endParaRPr lang="en-US"/>
+          </a:p>
+        </p:txBody>
       </p:sp>
       <p:sp>
         <p:nvSpPr>
@@ -5534,7 +5800,7 @@
           <a:bodyPr wrap="square" lIns="0" tIns="0" rIns="0" bIns="0" rtlCol="0" anchor="ctr"/>
           <a:lstStyle/>
           <a:p>
-            <a:pPr algn="ctr" indent="0" marL="0">
+            <a:pPr marL="0" indent="0" algn="ctr">
               <a:buNone/>
             </a:pPr>
             <a:r>
@@ -5578,6 +5844,13 @@
             <a:prstDash val="solid"/>
           </a:ln>
         </p:spPr>
+        <p:txBody>
+          <a:bodyPr/>
+          <a:lstStyle/>
+          <a:p>
+            <a:endParaRPr lang="en-US"/>
+          </a:p>
+        </p:txBody>
       </p:sp>
       <p:sp>
         <p:nvSpPr>
@@ -5600,7 +5873,7 @@
           <a:bodyPr wrap="square" lIns="254" tIns="254" rIns="254" bIns="254" rtlCol="0" anchor="ctr"/>
           <a:lstStyle/>
           <a:p>
-            <a:pPr algn="ctr" indent="0" marL="0">
+            <a:pPr marL="0" indent="0" algn="ctr">
               <a:buNone/>
             </a:pPr>
             <a:r>
@@ -5644,6 +5917,13 @@
             <a:prstDash val="solid"/>
           </a:ln>
         </p:spPr>
+        <p:txBody>
+          <a:bodyPr/>
+          <a:lstStyle/>
+          <a:p>
+            <a:endParaRPr lang="en-US"/>
+          </a:p>
+        </p:txBody>
       </p:sp>
       <p:sp>
         <p:nvSpPr>
@@ -5666,7 +5946,7 @@
           <a:bodyPr wrap="square" lIns="254" tIns="254" rIns="254" bIns="254" rtlCol="0" anchor="ctr"/>
           <a:lstStyle/>
           <a:p>
-            <a:pPr algn="ctr" indent="0" marL="0">
+            <a:pPr marL="0" indent="0" algn="ctr">
               <a:buNone/>
             </a:pPr>
             <a:r>
@@ -5710,6 +5990,13 @@
             <a:prstDash val="solid"/>
           </a:ln>
         </p:spPr>
+        <p:txBody>
+          <a:bodyPr/>
+          <a:lstStyle/>
+          <a:p>
+            <a:endParaRPr lang="en-US"/>
+          </a:p>
+        </p:txBody>
       </p:sp>
       <p:sp>
         <p:nvSpPr>
@@ -5732,7 +6019,7 @@
           <a:bodyPr wrap="square" lIns="254" tIns="254" rIns="254" bIns="254" rtlCol="0" anchor="ctr"/>
           <a:lstStyle/>
           <a:p>
-            <a:pPr algn="ctr" indent="0" marL="0">
+            <a:pPr marL="0" indent="0" algn="ctr">
               <a:buNone/>
             </a:pPr>
             <a:r>
@@ -5776,6 +6063,13 @@
             <a:prstDash val="solid"/>
           </a:ln>
         </p:spPr>
+        <p:txBody>
+          <a:bodyPr/>
+          <a:lstStyle/>
+          <a:p>
+            <a:endParaRPr lang="en-US"/>
+          </a:p>
+        </p:txBody>
       </p:sp>
       <p:sp>
         <p:nvSpPr>
@@ -5798,7 +6092,7 @@
           <a:bodyPr wrap="square" lIns="254" tIns="254" rIns="254" bIns="254" rtlCol="0" anchor="ctr"/>
           <a:lstStyle/>
           <a:p>
-            <a:pPr algn="ctr" indent="0" marL="0">
+            <a:pPr marL="0" indent="0" algn="ctr">
               <a:buNone/>
             </a:pPr>
             <a:r>
@@ -5837,11 +6131,11 @@
           <a:bodyPr wrap="square" lIns="0" tIns="0" rIns="0" bIns="0" rtlCol="0" anchor="ctr"/>
           <a:lstStyle/>
           <a:p>
-            <a:pPr indent="0" marL="0">
-              <a:buNone/>
-            </a:pPr>
-            <a:r>
-              <a:rPr lang="en-US" sz="900" b="1" spc="100" kern="0" dirty="0">
+            <a:pPr marL="0" indent="0">
+              <a:buNone/>
+            </a:pPr>
+            <a:r>
+              <a:rPr lang="en-US" sz="900" b="1" kern="0" spc="100" dirty="0">
                 <a:solidFill>
                   <a:srgbClr val="6B7670"/>
                 </a:solidFill>
@@ -5881,6 +6175,13 @@
             <a:prstDash val="solid"/>
           </a:ln>
         </p:spPr>
+        <p:txBody>
+          <a:bodyPr/>
+          <a:lstStyle/>
+          <a:p>
+            <a:endParaRPr lang="en-US"/>
+          </a:p>
+        </p:txBody>
       </p:sp>
       <p:sp>
         <p:nvSpPr>
@@ -5906,6 +6207,13 @@
             <a:prstDash val="solid"/>
           </a:ln>
         </p:spPr>
+        <p:txBody>
+          <a:bodyPr/>
+          <a:lstStyle/>
+          <a:p>
+            <a:endParaRPr lang="en-US"/>
+          </a:p>
+        </p:txBody>
       </p:sp>
       <p:sp>
         <p:nvSpPr>
@@ -5928,7 +6236,7 @@
           <a:bodyPr wrap="square" lIns="0" tIns="0" rIns="0" bIns="0" rtlCol="0" anchor="ctr"/>
           <a:lstStyle/>
           <a:p>
-            <a:pPr algn="ctr" indent="0" marL="0">
+            <a:pPr marL="0" indent="0" algn="ctr">
               <a:buNone/>
             </a:pPr>
             <a:r>
@@ -5972,6 +6280,13 @@
             <a:prstDash val="solid"/>
           </a:ln>
         </p:spPr>
+        <p:txBody>
+          <a:bodyPr/>
+          <a:lstStyle/>
+          <a:p>
+            <a:endParaRPr lang="en-US"/>
+          </a:p>
+        </p:txBody>
       </p:sp>
       <p:sp>
         <p:nvSpPr>
@@ -5994,7 +6309,7 @@
           <a:bodyPr wrap="square" lIns="254" tIns="254" rIns="254" bIns="254" rtlCol="0" anchor="ctr"/>
           <a:lstStyle/>
           <a:p>
-            <a:pPr algn="ctr" indent="0" marL="0">
+            <a:pPr marL="0" indent="0" algn="ctr">
               <a:buNone/>
             </a:pPr>
             <a:r>
@@ -6038,6 +6353,13 @@
             <a:prstDash val="solid"/>
           </a:ln>
         </p:spPr>
+        <p:txBody>
+          <a:bodyPr/>
+          <a:lstStyle/>
+          <a:p>
+            <a:endParaRPr lang="en-US"/>
+          </a:p>
+        </p:txBody>
       </p:sp>
       <p:sp>
         <p:nvSpPr>
@@ -6060,7 +6382,7 @@
           <a:bodyPr wrap="square" lIns="254" tIns="254" rIns="254" bIns="254" rtlCol="0" anchor="ctr"/>
           <a:lstStyle/>
           <a:p>
-            <a:pPr algn="ctr" indent="0" marL="0">
+            <a:pPr marL="0" indent="0" algn="ctr">
               <a:buNone/>
             </a:pPr>
             <a:r>
@@ -6104,6 +6426,13 @@
             <a:prstDash val="solid"/>
           </a:ln>
         </p:spPr>
+        <p:txBody>
+          <a:bodyPr/>
+          <a:lstStyle/>
+          <a:p>
+            <a:endParaRPr lang="en-US"/>
+          </a:p>
+        </p:txBody>
       </p:sp>
       <p:sp>
         <p:nvSpPr>
@@ -6126,7 +6455,7 @@
           <a:bodyPr wrap="square" lIns="254" tIns="254" rIns="254" bIns="254" rtlCol="0" anchor="ctr"/>
           <a:lstStyle/>
           <a:p>
-            <a:pPr algn="ctr" indent="0" marL="0">
+            <a:pPr marL="0" indent="0" algn="ctr">
               <a:buNone/>
             </a:pPr>
             <a:r>
@@ -6170,6 +6499,13 @@
             <a:prstDash val="solid"/>
           </a:ln>
         </p:spPr>
+        <p:txBody>
+          <a:bodyPr/>
+          <a:lstStyle/>
+          <a:p>
+            <a:endParaRPr lang="en-US"/>
+          </a:p>
+        </p:txBody>
       </p:sp>
       <p:sp>
         <p:nvSpPr>
@@ -6192,7 +6528,7 @@
           <a:bodyPr wrap="square" lIns="254" tIns="254" rIns="254" bIns="254" rtlCol="0" anchor="ctr"/>
           <a:lstStyle/>
           <a:p>
-            <a:pPr algn="ctr" indent="0" marL="0">
+            <a:pPr marL="0" indent="0" algn="ctr">
               <a:buNone/>
             </a:pPr>
             <a:r>
@@ -6234,6 +6570,13 @@
             <a:prstDash val="solid"/>
           </a:ln>
         </p:spPr>
+        <p:txBody>
+          <a:bodyPr/>
+          <a:lstStyle/>
+          <a:p>
+            <a:endParaRPr lang="en-US"/>
+          </a:p>
+        </p:txBody>
       </p:sp>
       <p:sp>
         <p:nvSpPr>
@@ -6256,7 +6599,7 @@
           <a:bodyPr wrap="square" lIns="0" tIns="0" rIns="0" bIns="0" rtlCol="0" anchor="ctr"/>
           <a:lstStyle/>
           <a:p>
-            <a:pPr algn="ctr" indent="0" marL="0">
+            <a:pPr marL="0" indent="0" algn="ctr">
               <a:buNone/>
             </a:pPr>
             <a:r>
@@ -6295,7 +6638,7 @@
           <a:bodyPr wrap="square" lIns="0" tIns="0" rIns="0" bIns="0" rtlCol="0" anchor="ctr"/>
           <a:lstStyle/>
           <a:p>
-            <a:pPr indent="0" marL="0">
+            <a:pPr marL="0" indent="0">
               <a:buNone/>
             </a:pPr>
             <a:r>
@@ -6312,7 +6655,7 @@
             <a:endParaRPr lang="en-US" sz="800" dirty="0"/>
           </a:p>
           <a:p>
-            <a:pPr indent="0" marL="0">
+            <a:pPr marL="0" indent="0">
               <a:buNone/>
             </a:pPr>
             <a:r>
@@ -6356,6 +6699,13 @@
             <a:prstDash val="solid"/>
           </a:ln>
         </p:spPr>
+        <p:txBody>
+          <a:bodyPr/>
+          <a:lstStyle/>
+          <a:p>
+            <a:endParaRPr lang="en-US"/>
+          </a:p>
+        </p:txBody>
       </p:sp>
       <p:sp>
         <p:nvSpPr>
@@ -6378,7 +6728,7 @@
           <a:bodyPr wrap="square" lIns="254" tIns="254" rIns="254" bIns="254" rtlCol="0" anchor="ctr"/>
           <a:lstStyle/>
           <a:p>
-            <a:pPr algn="ctr" indent="0" marL="0">
+            <a:pPr marL="0" indent="0" algn="ctr">
               <a:buNone/>
             </a:pPr>
             <a:r>
@@ -6420,6 +6770,13 @@
             <a:prstDash val="solid"/>
           </a:ln>
         </p:spPr>
+        <p:txBody>
+          <a:bodyPr/>
+          <a:lstStyle/>
+          <a:p>
+            <a:endParaRPr lang="en-US"/>
+          </a:p>
+        </p:txBody>
       </p:sp>
       <p:sp>
         <p:nvSpPr>
@@ -6442,7 +6799,7 @@
           <a:bodyPr wrap="square" lIns="0" tIns="0" rIns="0" bIns="0" rtlCol="0" anchor="ctr"/>
           <a:lstStyle/>
           <a:p>
-            <a:pPr algn="ctr" indent="0" marL="0">
+            <a:pPr marL="0" indent="0" algn="ctr">
               <a:buNone/>
             </a:pPr>
             <a:r>
@@ -6486,6 +6843,13 @@
             <a:prstDash val="solid"/>
           </a:ln>
         </p:spPr>
+        <p:txBody>
+          <a:bodyPr/>
+          <a:lstStyle/>
+          <a:p>
+            <a:endParaRPr lang="en-US"/>
+          </a:p>
+        </p:txBody>
       </p:sp>
       <p:sp>
         <p:nvSpPr>
@@ -6508,7 +6872,7 @@
           <a:bodyPr wrap="square" lIns="254" tIns="254" rIns="254" bIns="254" rtlCol="0" anchor="ctr"/>
           <a:lstStyle/>
           <a:p>
-            <a:pPr algn="ctr" indent="0" marL="0">
+            <a:pPr marL="0" indent="0" algn="ctr">
               <a:buNone/>
             </a:pPr>
             <a:r>
@@ -6550,6 +6914,13 @@
             <a:prstDash val="solid"/>
           </a:ln>
         </p:spPr>
+        <p:txBody>
+          <a:bodyPr/>
+          <a:lstStyle/>
+          <a:p>
+            <a:endParaRPr lang="en-US"/>
+          </a:p>
+        </p:txBody>
       </p:sp>
       <p:sp>
         <p:nvSpPr>
@@ -6572,7 +6943,7 @@
           <a:bodyPr wrap="square" lIns="0" tIns="0" rIns="0" bIns="0" rtlCol="0" anchor="ctr"/>
           <a:lstStyle/>
           <a:p>
-            <a:pPr algn="ctr" indent="0" marL="0">
+            <a:pPr marL="0" indent="0" algn="ctr">
               <a:buNone/>
             </a:pPr>
             <a:r>
@@ -6611,7 +6982,7 @@
           <a:bodyPr wrap="square" lIns="0" tIns="0" rIns="0" bIns="0" rtlCol="0" anchor="ctr"/>
           <a:lstStyle/>
           <a:p>
-            <a:pPr indent="0" marL="0">
+            <a:pPr marL="0" indent="0">
               <a:buNone/>
             </a:pPr>
             <a:r>
@@ -6652,6 +7023,13 @@
             <a:tailEnd type="triangle"/>
           </a:ln>
         </p:spPr>
+        <p:txBody>
+          <a:bodyPr/>
+          <a:lstStyle/>
+          <a:p>
+            <a:endParaRPr lang="en-US"/>
+          </a:p>
+        </p:txBody>
       </p:sp>
       <p:sp>
         <p:nvSpPr>
@@ -6674,7 +7052,7 @@
           <a:bodyPr wrap="square" lIns="0" tIns="0" rIns="0" bIns="0" rtlCol="0" anchor="ctr"/>
           <a:lstStyle/>
           <a:p>
-            <a:pPr indent="0" marL="0">
+            <a:pPr marL="0" indent="0">
               <a:buNone/>
             </a:pPr>
             <a:r>
@@ -6715,6 +7093,13 @@
             <a:tailEnd type="triangle"/>
           </a:ln>
         </p:spPr>
+        <p:txBody>
+          <a:bodyPr/>
+          <a:lstStyle/>
+          <a:p>
+            <a:endParaRPr lang="en-US"/>
+          </a:p>
+        </p:txBody>
       </p:sp>
       <p:sp>
         <p:nvSpPr>
@@ -6737,7 +7122,7 @@
           <a:bodyPr wrap="square" lIns="0" tIns="0" rIns="0" bIns="0" rtlCol="0" anchor="ctr"/>
           <a:lstStyle/>
           <a:p>
-            <a:pPr indent="0" marL="0">
+            <a:pPr marL="0" indent="0">
               <a:buNone/>
             </a:pPr>
             <a:r>
@@ -6778,6 +7163,13 @@
             <a:tailEnd type="triangle"/>
           </a:ln>
         </p:spPr>
+        <p:txBody>
+          <a:bodyPr/>
+          <a:lstStyle/>
+          <a:p>
+            <a:endParaRPr lang="en-US"/>
+          </a:p>
+        </p:txBody>
       </p:sp>
       <p:sp>
         <p:nvSpPr>
@@ -6800,7 +7192,7 @@
           <a:bodyPr wrap="square" lIns="0" tIns="0" rIns="0" bIns="0" rtlCol="0" anchor="ctr"/>
           <a:lstStyle/>
           <a:p>
-            <a:pPr indent="0" marL="0">
+            <a:pPr marL="0" indent="0">
               <a:buNone/>
             </a:pPr>
             <a:r>
@@ -6841,6 +7233,13 @@
             <a:tailEnd type="triangle"/>
           </a:ln>
         </p:spPr>
+        <p:txBody>
+          <a:bodyPr/>
+          <a:lstStyle/>
+          <a:p>
+            <a:endParaRPr lang="en-US"/>
+          </a:p>
+        </p:txBody>
       </p:sp>
       <p:sp>
         <p:nvSpPr>
@@ -6863,7 +7262,7 @@
           <a:bodyPr wrap="square" lIns="0" tIns="0" rIns="0" bIns="0" rtlCol="0" anchor="ctr"/>
           <a:lstStyle/>
           <a:p>
-            <a:pPr indent="0" marL="0">
+            <a:pPr marL="0" indent="0">
               <a:buNone/>
             </a:pPr>
             <a:r>
@@ -6904,6 +7303,13 @@
             <a:tailEnd type="triangle"/>
           </a:ln>
         </p:spPr>
+        <p:txBody>
+          <a:bodyPr/>
+          <a:lstStyle/>
+          <a:p>
+            <a:endParaRPr lang="en-US"/>
+          </a:p>
+        </p:txBody>
       </p:sp>
       <p:sp>
         <p:nvSpPr>
@@ -6926,7 +7332,7 @@
           <a:bodyPr wrap="square" lIns="0" tIns="0" rIns="0" bIns="0" rtlCol="0" anchor="ctr"/>
           <a:lstStyle/>
           <a:p>
-            <a:pPr indent="0" marL="0">
+            <a:pPr marL="0" indent="0">
               <a:buNone/>
             </a:pPr>
             <a:r>
@@ -6967,6 +7373,13 @@
             <a:tailEnd type="triangle"/>
           </a:ln>
         </p:spPr>
+        <p:txBody>
+          <a:bodyPr/>
+          <a:lstStyle/>
+          <a:p>
+            <a:endParaRPr lang="en-US"/>
+          </a:p>
+        </p:txBody>
       </p:sp>
       <p:sp>
         <p:nvSpPr>
@@ -6989,7 +7402,7 @@
           <a:bodyPr wrap="square" lIns="0" tIns="0" rIns="0" bIns="0" rtlCol="0" anchor="ctr"/>
           <a:lstStyle/>
           <a:p>
-            <a:pPr indent="0" marL="0">
+            <a:pPr marL="0" indent="0">
               <a:buNone/>
             </a:pPr>
             <a:r>
@@ -7030,6 +7443,13 @@
             <a:tailEnd type="triangle"/>
           </a:ln>
         </p:spPr>
+        <p:txBody>
+          <a:bodyPr/>
+          <a:lstStyle/>
+          <a:p>
+            <a:endParaRPr lang="en-US"/>
+          </a:p>
+        </p:txBody>
       </p:sp>
       <p:sp>
         <p:nvSpPr>
@@ -7052,7 +7472,7 @@
           <a:bodyPr wrap="square" lIns="0" tIns="0" rIns="0" bIns="0" rtlCol="0" anchor="ctr"/>
           <a:lstStyle/>
           <a:p>
-            <a:pPr indent="0" marL="0">
+            <a:pPr marL="0" indent="0">
               <a:buNone/>
             </a:pPr>
             <a:r>
@@ -7093,6 +7513,13 @@
             <a:tailEnd type="triangle"/>
           </a:ln>
         </p:spPr>
+        <p:txBody>
+          <a:bodyPr/>
+          <a:lstStyle/>
+          <a:p>
+            <a:endParaRPr lang="en-US"/>
+          </a:p>
+        </p:txBody>
       </p:sp>
       <p:sp>
         <p:nvSpPr>
@@ -7115,7 +7542,7 @@
           <a:bodyPr wrap="square" lIns="0" tIns="0" rIns="0" bIns="0" rtlCol="0" anchor="ctr"/>
           <a:lstStyle/>
           <a:p>
-            <a:pPr indent="0" marL="0">
+            <a:pPr marL="0" indent="0">
               <a:buNone/>
             </a:pPr>
             <a:r>
@@ -7159,6 +7586,13 @@
             <a:prstDash val="solid"/>
           </a:ln>
         </p:spPr>
+        <p:txBody>
+          <a:bodyPr/>
+          <a:lstStyle/>
+          <a:p>
+            <a:endParaRPr lang="en-US"/>
+          </a:p>
+        </p:txBody>
       </p:sp>
       <p:sp>
         <p:nvSpPr>
@@ -7181,7 +7615,7 @@
           <a:bodyPr wrap="square" lIns="0" tIns="0" rIns="0" bIns="0" rtlCol="0" anchor="ctr"/>
           <a:lstStyle/>
           <a:p>
-            <a:pPr indent="0" marL="0">
+            <a:pPr marL="0" indent="0">
               <a:buNone/>
             </a:pPr>
             <a:r>
@@ -7195,9 +7629,6 @@
               </a:rPr>
               <a:t>■ </a:t>
             </a:r>
-            <a:pPr indent="0" marL="0">
-              <a:buNone/>
-            </a:pPr>
             <a:r>
               <a:rPr lang="en-US" sz="950" dirty="0">
                 <a:solidFill>
@@ -7209,9 +7640,6 @@
               </a:rPr>
               <a:t>upstream reference   </a:t>
             </a:r>
-            <a:pPr indent="0" marL="0">
-              <a:buNone/>
-            </a:pPr>
             <a:r>
               <a:rPr lang="en-US" sz="950" dirty="0">
                 <a:solidFill>
@@ -7223,9 +7651,6 @@
               </a:rPr>
               <a:t>■ </a:t>
             </a:r>
-            <a:pPr indent="0" marL="0">
-              <a:buNone/>
-            </a:pPr>
             <a:r>
               <a:rPr lang="en-US" sz="950" dirty="0">
                 <a:solidFill>
@@ -7237,9 +7662,6 @@
               </a:rPr>
               <a:t>trading   </a:t>
             </a:r>
-            <a:pPr indent="0" marL="0">
-              <a:buNone/>
-            </a:pPr>
             <a:r>
               <a:rPr lang="en-US" sz="950" dirty="0">
                 <a:solidFill>
@@ -7251,9 +7673,6 @@
               </a:rPr>
               <a:t>■ </a:t>
             </a:r>
-            <a:pPr indent="0" marL="0">
-              <a:buNone/>
-            </a:pPr>
             <a:r>
               <a:rPr lang="en-US" sz="950" dirty="0">
                 <a:solidFill>
@@ -7265,9 +7684,6 @@
               </a:rPr>
               <a:t>legal (one agreement, four kinds)   </a:t>
             </a:r>
-            <a:pPr indent="0" marL="0">
-              <a:buNone/>
-            </a:pPr>
             <a:r>
               <a:rPr lang="en-US" sz="950" dirty="0">
                 <a:solidFill>
@@ -7279,9 +7695,6 @@
               </a:rPr>
               <a:t>■ </a:t>
             </a:r>
-            <a:pPr indent="0" marL="0">
-              <a:buNone/>
-            </a:pPr>
             <a:r>
               <a:rPr lang="en-US" sz="950" dirty="0">
                 <a:solidFill>
@@ -7293,9 +7706,6 @@
               </a:rPr>
               <a:t>its schedules   </a:t>
             </a:r>
-            <a:pPr indent="0" marL="0">
-              <a:buNone/>
-            </a:pPr>
             <a:r>
               <a:rPr lang="en-US" sz="950" dirty="0">
                 <a:solidFill>
@@ -7307,9 +7717,6 @@
               </a:rPr>
               <a:t>■ </a:t>
             </a:r>
-            <a:pPr indent="0" marL="0">
-              <a:buNone/>
-            </a:pPr>
             <a:r>
               <a:rPr lang="en-US" sz="950" dirty="0">
                 <a:solidFill>
@@ -7321,9 +7728,6 @@
               </a:rPr>
               <a:t>the daily operations   </a:t>
             </a:r>
-            <a:pPr indent="0" marL="0">
-              <a:buNone/>
-            </a:pPr>
             <a:r>
               <a:rPr lang="en-US" sz="950" dirty="0">
                 <a:solidFill>
@@ -7335,9 +7739,6 @@
               </a:rPr>
               <a:t>■ </a:t>
             </a:r>
-            <a:pPr indent="0" marL="0">
-              <a:buNone/>
-            </a:pPr>
             <a:r>
               <a:rPr lang="en-US" sz="950" dirty="0">
                 <a:solidFill>
@@ -7349,9 +7750,6 @@
               </a:rPr>
               <a:t>derived — must reconcile.   </a:t>
             </a:r>
-            <a:pPr indent="0" marL="0">
-              <a:buNone/>
-            </a:pPr>
             <a:r>
               <a:rPr lang="en-US" sz="950" b="1" dirty="0">
                 <a:solidFill>
@@ -7388,7 +7786,7 @@
           <a:bodyPr wrap="square" lIns="0" tIns="0" rIns="0" bIns="0" rtlCol="0" anchor="ctr"/>
           <a:lstStyle/>
           <a:p>
-            <a:pPr indent="0" marL="0">
+            <a:pPr marL="0" indent="0">
               <a:buNone/>
             </a:pPr>
             <a:r>
@@ -7427,7 +7825,7 @@
           <a:bodyPr wrap="square" lIns="0" tIns="0" rIns="0" bIns="0" rtlCol="0" anchor="ctr"/>
           <a:lstStyle/>
           <a:p>
-            <a:pPr algn="r" indent="0" marL="0">
+            <a:pPr marL="0" indent="0" algn="r">
               <a:buNone/>
             </a:pPr>
             <a:r>
@@ -7466,7 +7864,7 @@
           <a:bodyPr wrap="square" lIns="0" tIns="0" rIns="0" bIns="0" rtlCol="0" anchor="ctr"/>
           <a:lstStyle/>
           <a:p>
-            <a:pPr algn="r" indent="0" marL="0">
+            <a:pPr marL="0" indent="0" algn="r">
               <a:buNone/>
             </a:pPr>
             <a:r>
@@ -7500,6 +7898,7 @@
         <a:solidFill>
           <a:srgbClr val="FFFFFF"/>
         </a:solidFill>
+        <a:effectLst/>
       </p:bgPr>
     </p:bg>
     <p:spTree>
@@ -7537,11 +7936,11 @@
           <a:bodyPr wrap="square" lIns="0" tIns="0" rIns="0" bIns="0" rtlCol="0" anchor="ctr"/>
           <a:lstStyle/>
           <a:p>
-            <a:pPr indent="0" marL="0">
-              <a:buNone/>
-            </a:pPr>
-            <a:r>
-              <a:rPr lang="en-US" sz="1100" b="1" spc="200" kern="0" dirty="0">
+            <a:pPr marL="0" indent="0">
+              <a:buNone/>
+            </a:pPr>
+            <a:r>
+              <a:rPr lang="en-US" sz="1100" b="1" kern="0" spc="200" dirty="0">
                 <a:solidFill>
                   <a:srgbClr val="1F7A47"/>
                 </a:solidFill>
@@ -7576,7 +7975,7 @@
           <a:bodyPr wrap="square" lIns="0" tIns="0" rIns="0" bIns="0" rtlCol="0" anchor="ctr"/>
           <a:lstStyle/>
           <a:p>
-            <a:pPr indent="0" marL="0">
+            <a:pPr marL="0" indent="0">
               <a:buNone/>
             </a:pPr>
             <a:r>
@@ -7620,6 +8019,13 @@
             <a:prstDash val="solid"/>
           </a:ln>
         </p:spPr>
+        <p:txBody>
+          <a:bodyPr/>
+          <a:lstStyle/>
+          <a:p>
+            <a:endParaRPr lang="en-US"/>
+          </a:p>
+        </p:txBody>
       </p:sp>
       <p:sp>
         <p:nvSpPr>
@@ -7642,7 +8048,7 @@
           <a:bodyPr wrap="square" lIns="0" tIns="0" rIns="0" bIns="0" rtlCol="0" anchor="ctr"/>
           <a:lstStyle/>
           <a:p>
-            <a:pPr indent="0" marL="0">
+            <a:pPr marL="0" indent="0">
               <a:buNone/>
             </a:pPr>
             <a:r>
@@ -7681,7 +8087,7 @@
           <a:bodyPr wrap="square" lIns="0" tIns="0" rIns="0" bIns="0" rtlCol="0" anchor="ctr"/>
           <a:lstStyle/>
           <a:p>
-            <a:pPr indent="0" marL="0">
+            <a:pPr marL="0" indent="0">
               <a:lnSpc>
                 <a:spcPct val="102000"/>
               </a:lnSpc>
@@ -7728,6 +8134,13 @@
             <a:prstDash val="solid"/>
           </a:ln>
         </p:spPr>
+        <p:txBody>
+          <a:bodyPr/>
+          <a:lstStyle/>
+          <a:p>
+            <a:endParaRPr lang="en-US"/>
+          </a:p>
+        </p:txBody>
       </p:sp>
       <p:sp>
         <p:nvSpPr>
@@ -7750,7 +8163,7 @@
           <a:bodyPr wrap="square" lIns="0" tIns="0" rIns="0" bIns="0" rtlCol="0" anchor="ctr"/>
           <a:lstStyle/>
           <a:p>
-            <a:pPr indent="0" marL="0">
+            <a:pPr marL="0" indent="0">
               <a:buNone/>
             </a:pPr>
             <a:r>
@@ -7789,7 +8202,7 @@
           <a:bodyPr wrap="square" lIns="0" tIns="0" rIns="0" bIns="0" rtlCol="0" anchor="ctr"/>
           <a:lstStyle/>
           <a:p>
-            <a:pPr indent="0" marL="0">
+            <a:pPr marL="0" indent="0">
               <a:lnSpc>
                 <a:spcPct val="102000"/>
               </a:lnSpc>
@@ -7836,6 +8249,13 @@
             <a:prstDash val="solid"/>
           </a:ln>
         </p:spPr>
+        <p:txBody>
+          <a:bodyPr/>
+          <a:lstStyle/>
+          <a:p>
+            <a:endParaRPr lang="en-US"/>
+          </a:p>
+        </p:txBody>
       </p:sp>
       <p:sp>
         <p:nvSpPr>
@@ -7858,7 +8278,7 @@
           <a:bodyPr wrap="square" lIns="0" tIns="0" rIns="0" bIns="0" rtlCol="0" anchor="ctr"/>
           <a:lstStyle/>
           <a:p>
-            <a:pPr indent="0" marL="0">
+            <a:pPr marL="0" indent="0">
               <a:buNone/>
             </a:pPr>
             <a:r>
@@ -7897,7 +8317,7 @@
           <a:bodyPr wrap="square" lIns="0" tIns="0" rIns="0" bIns="0" rtlCol="0" anchor="ctr"/>
           <a:lstStyle/>
           <a:p>
-            <a:pPr indent="0" marL="0">
+            <a:pPr marL="0" indent="0">
               <a:lnSpc>
                 <a:spcPct val="102000"/>
               </a:lnSpc>
@@ -7941,6 +8361,13 @@
             <a:tailEnd type="triangle"/>
           </a:ln>
         </p:spPr>
+        <p:txBody>
+          <a:bodyPr/>
+          <a:lstStyle/>
+          <a:p>
+            <a:endParaRPr lang="en-US"/>
+          </a:p>
+        </p:txBody>
       </p:sp>
       <p:sp>
         <p:nvSpPr>
@@ -7963,6 +8390,13 @@
           </a:solidFill>
           <a:ln/>
         </p:spPr>
+        <p:txBody>
+          <a:bodyPr/>
+          <a:lstStyle/>
+          <a:p>
+            <a:endParaRPr lang="en-US"/>
+          </a:p>
+        </p:txBody>
       </p:sp>
       <p:sp>
         <p:nvSpPr>
@@ -7985,7 +8419,7 @@
           <a:bodyPr wrap="square" lIns="0" tIns="0" rIns="0" bIns="0" rtlCol="0" anchor="ctr"/>
           <a:lstStyle/>
           <a:p>
-            <a:pPr indent="0" marL="0">
+            <a:pPr marL="0" indent="0">
               <a:buNone/>
             </a:pPr>
             <a:r>
@@ -7999,9 +8433,6 @@
               </a:rPr>
               <a:t>ONE MODEL + MAPPINGS — conformance authored once:  </a:t>
             </a:r>
-            <a:pPr indent="0" marL="0">
-              <a:buNone/>
-            </a:pPr>
             <a:r>
               <a:rPr lang="en-US" sz="1050" dirty="0">
                 <a:solidFill>
@@ -8043,6 +8474,13 @@
             <a:prstDash val="solid"/>
           </a:ln>
         </p:spPr>
+        <p:txBody>
+          <a:bodyPr/>
+          <a:lstStyle/>
+          <a:p>
+            <a:endParaRPr lang="en-US"/>
+          </a:p>
+        </p:txBody>
       </p:sp>
       <p:sp>
         <p:nvSpPr>
@@ -8065,11 +8503,11 @@
           <a:bodyPr wrap="square" lIns="0" tIns="0" rIns="0" bIns="0" rtlCol="0" anchor="ctr"/>
           <a:lstStyle/>
           <a:p>
-            <a:pPr indent="0" marL="0">
-              <a:buNone/>
-            </a:pPr>
-            <a:r>
-              <a:rPr lang="en-US" sz="950" b="1" spc="100" kern="0" dirty="0">
+            <a:pPr marL="0" indent="0">
+              <a:buNone/>
+            </a:pPr>
+            <a:r>
+              <a:rPr lang="en-US" sz="950" b="1" kern="0" spc="100" dirty="0">
                 <a:solidFill>
                   <a:srgbClr val="1F7A47"/>
                 </a:solidFill>
@@ -8104,7 +8542,7 @@
           <a:bodyPr wrap="square" lIns="0" tIns="0" rIns="0" bIns="0" rtlCol="0" anchor="ctr"/>
           <a:lstStyle/>
           <a:p>
-            <a:pPr indent="0" marL="0">
+            <a:pPr marL="0" indent="0">
               <a:buNone/>
             </a:pPr>
             <a:r>
@@ -8143,7 +8581,7 @@
           <a:bodyPr wrap="square" lIns="0" tIns="0" rIns="0" bIns="0" rtlCol="0" anchor="t"/>
           <a:lstStyle/>
           <a:p>
-            <a:pPr indent="0" marL="0">
+            <a:pPr marL="0" indent="0">
               <a:lnSpc>
                 <a:spcPct val="112000"/>
               </a:lnSpc>
@@ -8160,12 +8598,6 @@
               </a:rPr>
               <a:t>1 · MCP  </a:t>
             </a:r>
-            <a:pPr indent="0" marL="0">
-              <a:lnSpc>
-                <a:spcPct val="112000"/>
-              </a:lnSpc>
-              <a:buNone/>
-            </a:pPr>
             <a:r>
               <a:rPr lang="en-US" sz="950" dirty="0">
                 <a:solidFill>
@@ -8178,12 +8610,6 @@
               <a:t>— the assistant calls the governed Genie tool; catalog permissions apply; call logged.
 </a:t>
             </a:r>
-            <a:pPr indent="0" marL="0">
-              <a:lnSpc>
-                <a:spcPct val="112000"/>
-              </a:lnSpc>
-              <a:buNone/>
-            </a:pPr>
             <a:r>
               <a:rPr lang="en-US" sz="950" b="1" dirty="0">
                 <a:solidFill>
@@ -8195,12 +8621,6 @@
               </a:rPr>
               <a:t>2 · Resolve  </a:t>
             </a:r>
-            <a:pPr indent="0" marL="0">
-              <a:lnSpc>
-                <a:spcPct val="112000"/>
-              </a:lnSpc>
-              <a:buNone/>
-            </a:pPr>
             <a:r>
               <a:rPr lang="en-US" sz="950" dirty="0">
                 <a:solidFill>
@@ -8213,12 +8633,6 @@
               <a:t>— “Central 1” → BCCU via the client master (one golden record).
 </a:t>
             </a:r>
-            <a:pPr indent="0" marL="0">
-              <a:lnSpc>
-                <a:spcPct val="112000"/>
-              </a:lnSpc>
-              <a:buNone/>
-            </a:pPr>
             <a:r>
               <a:rPr lang="en-US" sz="950" b="1" dirty="0">
                 <a:solidFill>
@@ -8230,12 +8644,6 @@
               </a:rPr>
               <a:t>3 · Semantics  </a:t>
             </a:r>
-            <a:pPr indent="0" marL="0">
-              <a:lnSpc>
-                <a:spcPct val="112000"/>
-              </a:lnSpc>
-              <a:buNone/>
-            </a:pPr>
             <a:r>
               <a:rPr lang="en-US" sz="950" dirty="0">
                 <a:solidFill>
@@ -8248,12 +8656,6 @@
               <a:t>— “eligible collateral” and “disputed” resolve to governed MEASURES — not a guessed formula. Genie executes what was declared; it does not invent joins.
 </a:t>
             </a:r>
-            <a:pPr indent="0" marL="0">
-              <a:lnSpc>
-                <a:spcPct val="112000"/>
-              </a:lnSpc>
-              <a:buNone/>
-            </a:pPr>
             <a:r>
               <a:rPr lang="en-US" sz="950" b="1" dirty="0">
                 <a:solidFill>
@@ -8265,12 +8667,6 @@
               </a:rPr>
               <a:t>4 · Compile &amp; run  </a:t>
             </a:r>
-            <a:pPr indent="0" marL="0">
-              <a:lnSpc>
-                <a:spcPct val="112000"/>
-              </a:lnSpc>
-              <a:buNone/>
-            </a:pPr>
             <a:r>
               <a:rPr lang="en-US" sz="950" dirty="0">
                 <a:solidFill>
@@ -8307,6 +8703,13 @@
           </a:solidFill>
           <a:ln/>
         </p:spPr>
+        <p:txBody>
+          <a:bodyPr/>
+          <a:lstStyle/>
+          <a:p>
+            <a:endParaRPr lang="en-US"/>
+          </a:p>
+        </p:txBody>
       </p:sp>
       <p:sp>
         <p:nvSpPr>
@@ -8329,7 +8732,7 @@
           <a:bodyPr wrap="square" lIns="0" tIns="0" rIns="0" bIns="0" rtlCol="0" anchor="t"/>
           <a:lstStyle/>
           <a:p>
-            <a:pPr indent="0" marL="0">
+            <a:pPr marL="0" indent="0">
               <a:lnSpc>
                 <a:spcPct val="105000"/>
               </a:lnSpc>
@@ -8349,7 +8752,7 @@
             <a:endParaRPr lang="en-US" sz="820" dirty="0"/>
           </a:p>
           <a:p>
-            <a:pPr indent="0" marL="0">
+            <a:pPr marL="0" indent="0">
               <a:lnSpc>
                 <a:spcPct val="105000"/>
               </a:lnSpc>
@@ -8369,7 +8772,7 @@
             <a:endParaRPr lang="en-US" sz="820" dirty="0"/>
           </a:p>
           <a:p>
-            <a:pPr indent="0" marL="0">
+            <a:pPr marL="0" indent="0">
               <a:lnSpc>
                 <a:spcPct val="105000"/>
               </a:lnSpc>
@@ -8389,7 +8792,7 @@
             <a:endParaRPr lang="en-US" sz="820" dirty="0"/>
           </a:p>
           <a:p>
-            <a:pPr indent="0" marL="0">
+            <a:pPr marL="0" indent="0">
               <a:lnSpc>
                 <a:spcPct val="105000"/>
               </a:lnSpc>
@@ -8409,7 +8812,7 @@
             <a:endParaRPr lang="en-US" sz="820" dirty="0"/>
           </a:p>
           <a:p>
-            <a:pPr indent="0" marL="0">
+            <a:pPr marL="0" indent="0">
               <a:lnSpc>
                 <a:spcPct val="105000"/>
               </a:lnSpc>
@@ -8429,7 +8832,7 @@
             <a:endParaRPr lang="en-US" sz="820" dirty="0"/>
           </a:p>
           <a:p>
-            <a:pPr indent="0" marL="0">
+            <a:pPr marL="0" indent="0">
               <a:lnSpc>
                 <a:spcPct val="105000"/>
               </a:lnSpc>
@@ -8471,7 +8874,7 @@
           <a:bodyPr wrap="square" lIns="0" tIns="0" rIns="0" bIns="0" rtlCol="0" anchor="ctr"/>
           <a:lstStyle/>
           <a:p>
-            <a:pPr indent="0" marL="0">
+            <a:pPr marL="0" indent="0">
               <a:lnSpc>
                 <a:spcPct val="104000"/>
               </a:lnSpc>
@@ -8488,12 +8891,6 @@
               </a:rPr>
               <a:t>Executes as ONE SCAN of the denormalized gold table </a:t>
             </a:r>
-            <a:pPr indent="0" marL="0">
-              <a:lnSpc>
-                <a:spcPct val="104000"/>
-              </a:lnSpc>
-              <a:buNone/>
-            </a:pPr>
             <a:r>
               <a:rPr lang="en-US" sz="950" dirty="0">
                 <a:solidFill>
@@ -8535,6 +8932,13 @@
             <a:prstDash val="solid"/>
           </a:ln>
         </p:spPr>
+        <p:txBody>
+          <a:bodyPr/>
+          <a:lstStyle/>
+          <a:p>
+            <a:endParaRPr lang="en-US"/>
+          </a:p>
+        </p:txBody>
       </p:sp>
       <p:sp>
         <p:nvSpPr>
@@ -8557,7 +8961,7 @@
           <a:bodyPr wrap="square" lIns="0" tIns="0" rIns="0" bIns="0" rtlCol="0" anchor="t"/>
           <a:lstStyle/>
           <a:p>
-            <a:pPr indent="0" marL="0">
+            <a:pPr marL="0" indent="0">
               <a:lnSpc>
                 <a:spcPct val="110000"/>
               </a:lnSpc>
@@ -8577,7 +8981,7 @@
             <a:endParaRPr lang="en-US" sz="840" dirty="0"/>
           </a:p>
           <a:p>
-            <a:pPr indent="0" marL="0">
+            <a:pPr marL="0" indent="0">
               <a:lnSpc>
                 <a:spcPct val="110000"/>
               </a:lnSpc>
@@ -8597,7 +9001,7 @@
             <a:endParaRPr lang="en-US" sz="840" dirty="0"/>
           </a:p>
           <a:p>
-            <a:pPr indent="0" marL="0">
+            <a:pPr marL="0" indent="0">
               <a:lnSpc>
                 <a:spcPct val="110000"/>
               </a:lnSpc>
@@ -8617,7 +9021,7 @@
             <a:endParaRPr lang="en-US" sz="840" dirty="0"/>
           </a:p>
           <a:p>
-            <a:pPr indent="0" marL="0">
+            <a:pPr marL="0" indent="0">
               <a:lnSpc>
                 <a:spcPct val="110000"/>
               </a:lnSpc>
@@ -8659,6 +9063,13 @@
           </a:solidFill>
           <a:ln/>
         </p:spPr>
+        <p:txBody>
+          <a:bodyPr/>
+          <a:lstStyle/>
+          <a:p>
+            <a:endParaRPr lang="en-US"/>
+          </a:p>
+        </p:txBody>
       </p:sp>
       <p:sp>
         <p:nvSpPr>
@@ -8681,7 +9092,7 @@
           <a:bodyPr wrap="square" lIns="0" tIns="0" rIns="0" bIns="0" rtlCol="0" anchor="ctr"/>
           <a:lstStyle/>
           <a:p>
-            <a:pPr indent="0" marL="0">
+            <a:pPr marL="0" indent="0">
               <a:buNone/>
             </a:pPr>
             <a:r>
@@ -8695,9 +9106,6 @@
               </a:rPr>
               <a:t>The division of labour:  </a:t>
             </a:r>
-            <a:pPr indent="0" marL="0">
-              <a:buNone/>
-            </a:pPr>
             <a:r>
               <a:rPr lang="en-US" sz="1050" dirty="0">
                 <a:solidFill>
@@ -8734,7 +9142,7 @@
           <a:bodyPr wrap="square" lIns="0" tIns="0" rIns="0" bIns="0" rtlCol="0" anchor="ctr"/>
           <a:lstStyle/>
           <a:p>
-            <a:pPr indent="0" marL="0">
+            <a:pPr marL="0" indent="0">
               <a:buNone/>
             </a:pPr>
             <a:r>
@@ -8773,7 +9181,7 @@
           <a:bodyPr wrap="square" lIns="0" tIns="0" rIns="0" bIns="0" rtlCol="0" anchor="ctr"/>
           <a:lstStyle/>
           <a:p>
-            <a:pPr algn="r" indent="0" marL="0">
+            <a:pPr marL="0" indent="0" algn="r">
               <a:buNone/>
             </a:pPr>
             <a:r>
@@ -8812,7 +9220,7 @@
           <a:bodyPr wrap="square" lIns="0" tIns="0" rIns="0" bIns="0" rtlCol="0" anchor="ctr"/>
           <a:lstStyle/>
           <a:p>
-            <a:pPr algn="r" indent="0" marL="0">
+            <a:pPr marL="0" indent="0" algn="r">
               <a:buNone/>
             </a:pPr>
             <a:r>
@@ -8825,6 +9233,3905 @@
                 <a:cs typeface="Calibri" pitchFamily="34" charset="-120"/>
               </a:rPr>
               <a:t>3</a:t>
+            </a:r>
+            <a:endParaRPr lang="en-US" sz="900" dirty="0"/>
+          </a:p>
+        </p:txBody>
+      </p:sp>
+    </p:spTree>
+  </p:cSld>
+  <p:clrMapOvr>
+    <a:masterClrMapping/>
+  </p:clrMapOvr>
+</p:sld>
+</file>
+
+<file path=ppt/slides/slide4.xml><?xml version="1.0" encoding="utf-8"?>
+<p:sld xmlns:a="http://schemas.openxmlformats.org/drawingml/2006/main" xmlns:r="http://schemas.openxmlformats.org/officeDocument/2006/relationships" xmlns:p="http://schemas.openxmlformats.org/presentationml/2006/main">
+  <p:cSld>
+    <p:spTree>
+      <p:nvGrpSpPr>
+        <p:cNvPr id="1" name=""/>
+        <p:cNvGrpSpPr/>
+        <p:nvPr/>
+      </p:nvGrpSpPr>
+      <p:grpSpPr>
+        <a:xfrm>
+          <a:off x="0" y="0"/>
+          <a:ext cx="0" cy="0"/>
+          <a:chOff x="0" y="0"/>
+          <a:chExt cx="0" cy="0"/>
+        </a:xfrm>
+      </p:grpSpPr>
+      <p:sp>
+        <p:nvSpPr>
+          <p:cNvPr id="2" name="Text 0"/>
+          <p:cNvSpPr/>
+          <p:nvPr/>
+        </p:nvSpPr>
+        <p:spPr>
+          <a:xfrm>
+            <a:off x="365760" y="274320"/>
+            <a:ext cx="8229600" cy="274320"/>
+          </a:xfrm>
+          <a:prstGeom prst="rect">
+            <a:avLst/>
+          </a:prstGeom>
+          <a:noFill/>
+          <a:ln/>
+        </p:spPr>
+        <p:txBody>
+          <a:bodyPr wrap="square" lIns="0" tIns="0" rIns="0" bIns="0" rtlCol="0" anchor="ctr"/>
+          <a:lstStyle/>
+          <a:p>
+            <a:pPr marL="0" indent="0">
+              <a:buNone/>
+            </a:pPr>
+            <a:r>
+              <a:rPr lang="en-US" sz="1100" b="1" kern="0" spc="200" dirty="0">
+                <a:solidFill>
+                  <a:srgbClr val="1F7A47"/>
+                </a:solidFill>
+                <a:latin typeface="Calibri" pitchFamily="34" charset="0"/>
+                <a:ea typeface="Calibri" pitchFamily="34" charset="-122"/>
+                <a:cs typeface="Calibri" pitchFamily="34" charset="-120"/>
+              </a:rPr>
+              <a:t>COLLATERAL  ·  THE WHOLE BOARD</a:t>
+            </a:r>
+            <a:endParaRPr lang="en-US" sz="1100" dirty="0"/>
+          </a:p>
+        </p:txBody>
+      </p:sp>
+      <p:sp>
+        <p:nvSpPr>
+          <p:cNvPr id="3" name="Text 1"/>
+          <p:cNvSpPr/>
+          <p:nvPr/>
+        </p:nvSpPr>
+        <p:spPr>
+          <a:xfrm>
+            <a:off x="365760" y="530352"/>
+            <a:ext cx="10515600" cy="457200"/>
+          </a:xfrm>
+          <a:prstGeom prst="rect">
+            <a:avLst/>
+          </a:prstGeom>
+          <a:noFill/>
+          <a:ln/>
+        </p:spPr>
+        <p:txBody>
+          <a:bodyPr wrap="square" lIns="0" tIns="0" rIns="0" bIns="0" rtlCol="0" anchor="ctr"/>
+          <a:lstStyle/>
+          <a:p>
+            <a:pPr marL="0" indent="0">
+              <a:buNone/>
+            </a:pPr>
+            <a:r>
+              <a:rPr lang="en-US" sz="2200" b="1" dirty="0">
+                <a:solidFill>
+                  <a:srgbClr val="0E3D29"/>
+                </a:solidFill>
+                <a:latin typeface="Calibri" pitchFamily="34" charset="0"/>
+                <a:ea typeface="Calibri" pitchFamily="34" charset="-122"/>
+                <a:cs typeface="Calibri" pitchFamily="34" charset="-120"/>
+              </a:rPr>
+              <a:t>The ontology — nouns, verbs, one derived card</a:t>
+            </a:r>
+            <a:endParaRPr lang="en-US" sz="2200" dirty="0"/>
+          </a:p>
+        </p:txBody>
+      </p:sp>
+      <p:sp>
+        <p:nvSpPr>
+          <p:cNvPr id="4" name="Shape 2"/>
+          <p:cNvSpPr/>
+          <p:nvPr/>
+        </p:nvSpPr>
+        <p:spPr>
+          <a:xfrm>
+            <a:off x="723748" y="1380744"/>
+            <a:ext cx="1885401" cy="534924"/>
+          </a:xfrm>
+          <a:prstGeom prst="roundRect">
+            <a:avLst>
+              <a:gd name="adj" fmla="val 8547"/>
+            </a:avLst>
+          </a:prstGeom>
+          <a:solidFill>
+            <a:srgbClr val="F4EDDD"/>
+          </a:solidFill>
+          <a:ln w="15240">
+            <a:solidFill>
+              <a:srgbClr val="8A6A2F"/>
+            </a:solidFill>
+            <a:prstDash val="solid"/>
+          </a:ln>
+        </p:spPr>
+        <p:txBody>
+          <a:bodyPr/>
+          <a:lstStyle/>
+          <a:p>
+            <a:endParaRPr lang="en-US"/>
+          </a:p>
+        </p:txBody>
+      </p:sp>
+      <p:sp>
+        <p:nvSpPr>
+          <p:cNvPr id="5" name="Text 3"/>
+          <p:cNvSpPr/>
+          <p:nvPr/>
+        </p:nvSpPr>
+        <p:spPr>
+          <a:xfrm>
+            <a:off x="796900" y="1408176"/>
+            <a:ext cx="1739097" cy="146304"/>
+          </a:xfrm>
+          <a:prstGeom prst="rect">
+            <a:avLst/>
+          </a:prstGeom>
+          <a:noFill/>
+          <a:ln/>
+        </p:spPr>
+        <p:txBody>
+          <a:bodyPr wrap="square" lIns="0" tIns="0" rIns="0" bIns="0" rtlCol="0" anchor="ctr"/>
+          <a:lstStyle/>
+          <a:p>
+            <a:pPr marL="0" indent="0">
+              <a:buNone/>
+            </a:pPr>
+            <a:r>
+              <a:rPr lang="en-US" sz="650" b="1" kern="0" spc="100" dirty="0">
+                <a:solidFill>
+                  <a:srgbClr val="8A6A2F"/>
+                </a:solidFill>
+                <a:latin typeface="Consolas" pitchFamily="34" charset="0"/>
+                <a:ea typeface="Consolas" pitchFamily="34" charset="-122"/>
+                <a:cs typeface="Consolas" pitchFamily="34" charset="-120"/>
+              </a:rPr>
+              <a:t>PARTY</a:t>
+            </a:r>
+            <a:endParaRPr lang="en-US" sz="650" dirty="0"/>
+          </a:p>
+        </p:txBody>
+      </p:sp>
+      <p:sp>
+        <p:nvSpPr>
+          <p:cNvPr id="6" name="Text 4"/>
+          <p:cNvSpPr/>
+          <p:nvPr/>
+        </p:nvSpPr>
+        <p:spPr>
+          <a:xfrm>
+            <a:off x="796900" y="1536192"/>
+            <a:ext cx="1739097" cy="201168"/>
+          </a:xfrm>
+          <a:prstGeom prst="rect">
+            <a:avLst/>
+          </a:prstGeom>
+          <a:noFill/>
+          <a:ln/>
+        </p:spPr>
+        <p:txBody>
+          <a:bodyPr wrap="square" lIns="0" tIns="0" rIns="0" bIns="0" rtlCol="0" anchor="ctr"/>
+          <a:lstStyle/>
+          <a:p>
+            <a:pPr marL="0" indent="0">
+              <a:buNone/>
+            </a:pPr>
+            <a:r>
+              <a:rPr lang="en-US" sz="1100" b="1" dirty="0">
+                <a:solidFill>
+                  <a:srgbClr val="1C2830"/>
+                </a:solidFill>
+                <a:latin typeface="Georgia" pitchFamily="34" charset="0"/>
+                <a:ea typeface="Georgia" pitchFamily="34" charset="-122"/>
+                <a:cs typeface="Georgia" pitchFamily="34" charset="-120"/>
+              </a:rPr>
+              <a:t>Counterparty</a:t>
+            </a:r>
+            <a:endParaRPr lang="en-US" sz="1100" dirty="0"/>
+          </a:p>
+        </p:txBody>
+      </p:sp>
+      <p:sp>
+        <p:nvSpPr>
+          <p:cNvPr id="7" name="Text 5"/>
+          <p:cNvSpPr/>
+          <p:nvPr/>
+        </p:nvSpPr>
+        <p:spPr>
+          <a:xfrm>
+            <a:off x="796900" y="1732788"/>
+            <a:ext cx="1739097" cy="155448"/>
+          </a:xfrm>
+          <a:prstGeom prst="rect">
+            <a:avLst/>
+          </a:prstGeom>
+          <a:noFill/>
+          <a:ln/>
+        </p:spPr>
+        <p:txBody>
+          <a:bodyPr wrap="square" lIns="0" tIns="0" rIns="0" bIns="0" rtlCol="0" anchor="ctr"/>
+          <a:lstStyle/>
+          <a:p>
+            <a:pPr marL="0" indent="0">
+              <a:buNone/>
+            </a:pPr>
+            <a:r>
+              <a:rPr lang="en-US" sz="700" dirty="0">
+                <a:solidFill>
+                  <a:srgbClr val="5A6B75"/>
+                </a:solidFill>
+                <a:latin typeface="Consolas" pitchFamily="34" charset="0"/>
+                <a:ea typeface="Consolas" pitchFamily="34" charset="-122"/>
+                <a:cs typeface="Consolas" pitchFamily="34" charset="-120"/>
+              </a:rPr>
+              <a:t>Central 1 CU · BCCU</a:t>
+            </a:r>
+            <a:endParaRPr lang="en-US" sz="700" dirty="0"/>
+          </a:p>
+        </p:txBody>
+      </p:sp>
+      <p:sp>
+        <p:nvSpPr>
+          <p:cNvPr id="8" name="Shape 6"/>
+          <p:cNvSpPr/>
+          <p:nvPr/>
+        </p:nvSpPr>
+        <p:spPr>
+          <a:xfrm>
+            <a:off x="723748" y="2183130"/>
+            <a:ext cx="1885401" cy="534924"/>
+          </a:xfrm>
+          <a:prstGeom prst="roundRect">
+            <a:avLst>
+              <a:gd name="adj" fmla="val 8547"/>
+            </a:avLst>
+          </a:prstGeom>
+          <a:solidFill>
+            <a:srgbClr val="F4EDDD"/>
+          </a:solidFill>
+          <a:ln w="15240">
+            <a:solidFill>
+              <a:srgbClr val="8A6A2F"/>
+            </a:solidFill>
+            <a:prstDash val="solid"/>
+          </a:ln>
+        </p:spPr>
+        <p:txBody>
+          <a:bodyPr/>
+          <a:lstStyle/>
+          <a:p>
+            <a:endParaRPr lang="en-US"/>
+          </a:p>
+        </p:txBody>
+      </p:sp>
+      <p:sp>
+        <p:nvSpPr>
+          <p:cNvPr id="9" name="Text 7"/>
+          <p:cNvSpPr/>
+          <p:nvPr/>
+        </p:nvSpPr>
+        <p:spPr>
+          <a:xfrm>
+            <a:off x="796900" y="2210562"/>
+            <a:ext cx="1739097" cy="146304"/>
+          </a:xfrm>
+          <a:prstGeom prst="rect">
+            <a:avLst/>
+          </a:prstGeom>
+          <a:noFill/>
+          <a:ln/>
+        </p:spPr>
+        <p:txBody>
+          <a:bodyPr wrap="square" lIns="0" tIns="0" rIns="0" bIns="0" rtlCol="0" anchor="ctr"/>
+          <a:lstStyle/>
+          <a:p>
+            <a:pPr marL="0" indent="0">
+              <a:buNone/>
+            </a:pPr>
+            <a:r>
+              <a:rPr lang="en-US" sz="650" b="1" kern="0" spc="100" dirty="0">
+                <a:solidFill>
+                  <a:srgbClr val="8A6A2F"/>
+                </a:solidFill>
+                <a:latin typeface="Consolas" pitchFamily="34" charset="0"/>
+                <a:ea typeface="Consolas" pitchFamily="34" charset="-122"/>
+                <a:cs typeface="Consolas" pitchFamily="34" charset="-120"/>
+              </a:rPr>
+              <a:t>PARTY</a:t>
+            </a:r>
+            <a:endParaRPr lang="en-US" sz="650" dirty="0"/>
+          </a:p>
+        </p:txBody>
+      </p:sp>
+      <p:sp>
+        <p:nvSpPr>
+          <p:cNvPr id="10" name="Text 8"/>
+          <p:cNvSpPr/>
+          <p:nvPr/>
+        </p:nvSpPr>
+        <p:spPr>
+          <a:xfrm>
+            <a:off x="796900" y="2338578"/>
+            <a:ext cx="1739097" cy="201168"/>
+          </a:xfrm>
+          <a:prstGeom prst="rect">
+            <a:avLst/>
+          </a:prstGeom>
+          <a:noFill/>
+          <a:ln/>
+        </p:spPr>
+        <p:txBody>
+          <a:bodyPr wrap="square" lIns="0" tIns="0" rIns="0" bIns="0" rtlCol="0" anchor="ctr"/>
+          <a:lstStyle/>
+          <a:p>
+            <a:pPr marL="0" indent="0">
+              <a:buNone/>
+            </a:pPr>
+            <a:r>
+              <a:rPr lang="en-US" sz="1100" b="1" dirty="0">
+                <a:solidFill>
+                  <a:srgbClr val="1C2830"/>
+                </a:solidFill>
+                <a:latin typeface="Georgia" pitchFamily="34" charset="0"/>
+                <a:ea typeface="Georgia" pitchFamily="34" charset="-122"/>
+                <a:cs typeface="Georgia" pitchFamily="34" charset="-120"/>
+              </a:rPr>
+              <a:t>TD Entity</a:t>
+            </a:r>
+            <a:endParaRPr lang="en-US" sz="1100" dirty="0"/>
+          </a:p>
+        </p:txBody>
+      </p:sp>
+      <p:sp>
+        <p:nvSpPr>
+          <p:cNvPr id="11" name="Text 9"/>
+          <p:cNvSpPr/>
+          <p:nvPr/>
+        </p:nvSpPr>
+        <p:spPr>
+          <a:xfrm>
+            <a:off x="796900" y="2535174"/>
+            <a:ext cx="1739097" cy="155448"/>
+          </a:xfrm>
+          <a:prstGeom prst="rect">
+            <a:avLst/>
+          </a:prstGeom>
+          <a:noFill/>
+          <a:ln/>
+        </p:spPr>
+        <p:txBody>
+          <a:bodyPr wrap="square" lIns="0" tIns="0" rIns="0" bIns="0" rtlCol="0" anchor="ctr"/>
+          <a:lstStyle/>
+          <a:p>
+            <a:pPr marL="0" indent="0">
+              <a:buNone/>
+            </a:pPr>
+            <a:r>
+              <a:rPr lang="en-US" sz="700" dirty="0">
+                <a:solidFill>
+                  <a:srgbClr val="5A6B75"/>
+                </a:solidFill>
+                <a:latin typeface="Consolas" pitchFamily="34" charset="0"/>
+                <a:ea typeface="Consolas" pitchFamily="34" charset="-122"/>
+                <a:cs typeface="Consolas" pitchFamily="34" charset="-120"/>
+              </a:rPr>
+              <a:t>TD Bank · TDBK</a:t>
+            </a:r>
+            <a:endParaRPr lang="en-US" sz="700" dirty="0"/>
+          </a:p>
+        </p:txBody>
+      </p:sp>
+      <p:sp>
+        <p:nvSpPr>
+          <p:cNvPr id="12" name="Shape 10"/>
+          <p:cNvSpPr/>
+          <p:nvPr/>
+        </p:nvSpPr>
+        <p:spPr>
+          <a:xfrm>
+            <a:off x="3348990" y="1469898"/>
+            <a:ext cx="1909267" cy="534924"/>
+          </a:xfrm>
+          <a:prstGeom prst="roundRect">
+            <a:avLst>
+              <a:gd name="adj" fmla="val 8547"/>
+            </a:avLst>
+          </a:prstGeom>
+          <a:solidFill>
+            <a:srgbClr val="F4EDDD"/>
+          </a:solidFill>
+          <a:ln w="15240">
+            <a:solidFill>
+              <a:srgbClr val="8A6A2F"/>
+            </a:solidFill>
+            <a:prstDash val="solid"/>
+          </a:ln>
+        </p:spPr>
+        <p:txBody>
+          <a:bodyPr/>
+          <a:lstStyle/>
+          <a:p>
+            <a:endParaRPr lang="en-US"/>
+          </a:p>
+        </p:txBody>
+      </p:sp>
+      <p:sp>
+        <p:nvSpPr>
+          <p:cNvPr id="13" name="Text 11"/>
+          <p:cNvSpPr/>
+          <p:nvPr/>
+        </p:nvSpPr>
+        <p:spPr>
+          <a:xfrm>
+            <a:off x="3422142" y="1497330"/>
+            <a:ext cx="1762963" cy="146304"/>
+          </a:xfrm>
+          <a:prstGeom prst="rect">
+            <a:avLst/>
+          </a:prstGeom>
+          <a:noFill/>
+          <a:ln/>
+        </p:spPr>
+        <p:txBody>
+          <a:bodyPr wrap="square" lIns="0" tIns="0" rIns="0" bIns="0" rtlCol="0" anchor="ctr"/>
+          <a:lstStyle/>
+          <a:p>
+            <a:pPr marL="0" indent="0">
+              <a:buNone/>
+            </a:pPr>
+            <a:r>
+              <a:rPr lang="en-US" sz="650" b="1" kern="0" spc="100" dirty="0">
+                <a:solidFill>
+                  <a:srgbClr val="8A6A2F"/>
+                </a:solidFill>
+                <a:latin typeface="Consolas" pitchFamily="34" charset="0"/>
+                <a:ea typeface="Consolas" pitchFamily="34" charset="-122"/>
+                <a:cs typeface="Consolas" pitchFamily="34" charset="-120"/>
+              </a:rPr>
+              <a:t>LEGAL UMBRELLA</a:t>
+            </a:r>
+            <a:endParaRPr lang="en-US" sz="650" dirty="0"/>
+          </a:p>
+        </p:txBody>
+      </p:sp>
+      <p:sp>
+        <p:nvSpPr>
+          <p:cNvPr id="14" name="Text 12"/>
+          <p:cNvSpPr/>
+          <p:nvPr/>
+        </p:nvSpPr>
+        <p:spPr>
+          <a:xfrm>
+            <a:off x="3422142" y="1625346"/>
+            <a:ext cx="1762963" cy="201168"/>
+          </a:xfrm>
+          <a:prstGeom prst="rect">
+            <a:avLst/>
+          </a:prstGeom>
+          <a:noFill/>
+          <a:ln/>
+        </p:spPr>
+        <p:txBody>
+          <a:bodyPr wrap="square" lIns="0" tIns="0" rIns="0" bIns="0" rtlCol="0" anchor="ctr"/>
+          <a:lstStyle/>
+          <a:p>
+            <a:pPr marL="0" indent="0">
+              <a:buNone/>
+            </a:pPr>
+            <a:r>
+              <a:rPr lang="en-US" sz="1100" b="1" dirty="0">
+                <a:solidFill>
+                  <a:srgbClr val="1C2830"/>
+                </a:solidFill>
+                <a:latin typeface="Georgia" pitchFamily="34" charset="0"/>
+                <a:ea typeface="Georgia" pitchFamily="34" charset="-122"/>
+                <a:cs typeface="Georgia" pitchFamily="34" charset="-120"/>
+              </a:rPr>
+              <a:t>ISDA Master</a:t>
+            </a:r>
+            <a:endParaRPr lang="en-US" sz="1100" dirty="0"/>
+          </a:p>
+        </p:txBody>
+      </p:sp>
+      <p:sp>
+        <p:nvSpPr>
+          <p:cNvPr id="15" name="Text 13"/>
+          <p:cNvSpPr/>
+          <p:nvPr/>
+        </p:nvSpPr>
+        <p:spPr>
+          <a:xfrm>
+            <a:off x="3422142" y="1821942"/>
+            <a:ext cx="1762963" cy="155448"/>
+          </a:xfrm>
+          <a:prstGeom prst="rect">
+            <a:avLst/>
+          </a:prstGeom>
+          <a:noFill/>
+          <a:ln/>
+        </p:spPr>
+        <p:txBody>
+          <a:bodyPr wrap="square" lIns="0" tIns="0" rIns="0" bIns="0" rtlCol="0" anchor="ctr"/>
+          <a:lstStyle/>
+          <a:p>
+            <a:pPr marL="0" indent="0">
+              <a:buNone/>
+            </a:pPr>
+            <a:r>
+              <a:rPr lang="en-US" sz="700" dirty="0">
+                <a:solidFill>
+                  <a:srgbClr val="5A6B75"/>
+                </a:solidFill>
+                <a:latin typeface="Consolas" pitchFamily="34" charset="0"/>
+                <a:ea typeface="Consolas" pitchFamily="34" charset="-122"/>
+                <a:cs typeface="Consolas" pitchFamily="34" charset="-120"/>
+              </a:rPr>
+              <a:t>1989 · group TDBK_BCCU_GEN</a:t>
+            </a:r>
+            <a:endParaRPr lang="en-US" sz="700" dirty="0"/>
+          </a:p>
+        </p:txBody>
+      </p:sp>
+      <p:sp>
+        <p:nvSpPr>
+          <p:cNvPr id="16" name="Shape 14"/>
+          <p:cNvSpPr/>
+          <p:nvPr/>
+        </p:nvSpPr>
+        <p:spPr>
+          <a:xfrm>
+            <a:off x="3348990" y="2361438"/>
+            <a:ext cx="1909267" cy="570586"/>
+          </a:xfrm>
+          <a:prstGeom prst="roundRect">
+            <a:avLst>
+              <a:gd name="adj" fmla="val 8013"/>
+            </a:avLst>
+          </a:prstGeom>
+          <a:solidFill>
+            <a:srgbClr val="F4EDDD"/>
+          </a:solidFill>
+          <a:ln w="15240">
+            <a:solidFill>
+              <a:srgbClr val="8A6A2F"/>
+            </a:solidFill>
+            <a:prstDash val="solid"/>
+          </a:ln>
+        </p:spPr>
+        <p:txBody>
+          <a:bodyPr/>
+          <a:lstStyle/>
+          <a:p>
+            <a:endParaRPr lang="en-US"/>
+          </a:p>
+        </p:txBody>
+      </p:sp>
+      <p:sp>
+        <p:nvSpPr>
+          <p:cNvPr id="17" name="Text 15"/>
+          <p:cNvSpPr/>
+          <p:nvPr/>
+        </p:nvSpPr>
+        <p:spPr>
+          <a:xfrm>
+            <a:off x="3422142" y="2388870"/>
+            <a:ext cx="1762963" cy="146304"/>
+          </a:xfrm>
+          <a:prstGeom prst="rect">
+            <a:avLst/>
+          </a:prstGeom>
+          <a:noFill/>
+          <a:ln/>
+        </p:spPr>
+        <p:txBody>
+          <a:bodyPr wrap="square" lIns="0" tIns="0" rIns="0" bIns="0" rtlCol="0" anchor="ctr"/>
+          <a:lstStyle/>
+          <a:p>
+            <a:pPr marL="0" indent="0">
+              <a:buNone/>
+            </a:pPr>
+            <a:r>
+              <a:rPr lang="en-US" sz="650" b="1" kern="0" spc="100" dirty="0">
+                <a:solidFill>
+                  <a:srgbClr val="8A6A2F"/>
+                </a:solidFill>
+                <a:latin typeface="Consolas" pitchFamily="34" charset="0"/>
+                <a:ea typeface="Consolas" pitchFamily="34" charset="-122"/>
+                <a:cs typeface="Consolas" pitchFamily="34" charset="-120"/>
+              </a:rPr>
+              <a:t>LEGAL TERMS</a:t>
+            </a:r>
+            <a:endParaRPr lang="en-US" sz="650" dirty="0"/>
+          </a:p>
+        </p:txBody>
+      </p:sp>
+      <p:sp>
+        <p:nvSpPr>
+          <p:cNvPr id="18" name="Text 16"/>
+          <p:cNvSpPr/>
+          <p:nvPr/>
+        </p:nvSpPr>
+        <p:spPr>
+          <a:xfrm>
+            <a:off x="3422142" y="2516886"/>
+            <a:ext cx="1762963" cy="201168"/>
+          </a:xfrm>
+          <a:prstGeom prst="rect">
+            <a:avLst/>
+          </a:prstGeom>
+          <a:noFill/>
+          <a:ln/>
+        </p:spPr>
+        <p:txBody>
+          <a:bodyPr wrap="square" lIns="0" tIns="0" rIns="0" bIns="0" rtlCol="0" anchor="ctr"/>
+          <a:lstStyle/>
+          <a:p>
+            <a:pPr marL="0" indent="0">
+              <a:buNone/>
+            </a:pPr>
+            <a:r>
+              <a:rPr lang="en-US" sz="1100" b="1" dirty="0">
+                <a:solidFill>
+                  <a:srgbClr val="1C2830"/>
+                </a:solidFill>
+                <a:latin typeface="Georgia" pitchFamily="34" charset="0"/>
+                <a:ea typeface="Georgia" pitchFamily="34" charset="-122"/>
+                <a:cs typeface="Georgia" pitchFamily="34" charset="-120"/>
+              </a:rPr>
+              <a:t>CSA</a:t>
+            </a:r>
+            <a:endParaRPr lang="en-US" sz="1100" dirty="0"/>
+          </a:p>
+        </p:txBody>
+      </p:sp>
+      <p:sp>
+        <p:nvSpPr>
+          <p:cNvPr id="19" name="Text 17"/>
+          <p:cNvSpPr/>
+          <p:nvPr/>
+        </p:nvSpPr>
+        <p:spPr>
+          <a:xfrm>
+            <a:off x="3422142" y="2749144"/>
+            <a:ext cx="1762963" cy="155448"/>
+          </a:xfrm>
+          <a:prstGeom prst="rect">
+            <a:avLst/>
+          </a:prstGeom>
+          <a:noFill/>
+          <a:ln/>
+        </p:spPr>
+        <p:txBody>
+          <a:bodyPr wrap="square" lIns="0" tIns="0" rIns="0" bIns="0" rtlCol="0" anchor="ctr"/>
+          <a:lstStyle/>
+          <a:p>
+            <a:pPr marL="0" indent="0">
+              <a:buNone/>
+            </a:pPr>
+            <a:r>
+              <a:rPr lang="en-US" sz="700" dirty="0">
+                <a:solidFill>
+                  <a:srgbClr val="5A6B75"/>
+                </a:solidFill>
+                <a:latin typeface="Consolas" pitchFamily="34" charset="0"/>
+                <a:ea typeface="Consolas" pitchFamily="34" charset="-122"/>
+                <a:cs typeface="Consolas" pitchFamily="34" charset="-120"/>
+              </a:rPr>
+              <a:t>1689 · GENERAL_CSA · TAMS</a:t>
+            </a:r>
+            <a:endParaRPr lang="en-US" sz="700" dirty="0"/>
+          </a:p>
+        </p:txBody>
+      </p:sp>
+      <p:sp>
+        <p:nvSpPr>
+          <p:cNvPr id="20" name="Shape 18"/>
+          <p:cNvSpPr/>
+          <p:nvPr/>
+        </p:nvSpPr>
+        <p:spPr>
+          <a:xfrm>
+            <a:off x="723748" y="3698748"/>
+            <a:ext cx="2028596" cy="570586"/>
+          </a:xfrm>
+          <a:prstGeom prst="roundRect">
+            <a:avLst>
+              <a:gd name="adj" fmla="val 8013"/>
+            </a:avLst>
+          </a:prstGeom>
+          <a:solidFill>
+            <a:srgbClr val="F4EDDD"/>
+          </a:solidFill>
+          <a:ln w="15240">
+            <a:solidFill>
+              <a:srgbClr val="8A6A2F"/>
+            </a:solidFill>
+            <a:prstDash val="solid"/>
+          </a:ln>
+        </p:spPr>
+        <p:txBody>
+          <a:bodyPr/>
+          <a:lstStyle/>
+          <a:p>
+            <a:endParaRPr lang="en-US"/>
+          </a:p>
+        </p:txBody>
+      </p:sp>
+      <p:sp>
+        <p:nvSpPr>
+          <p:cNvPr id="21" name="Text 19"/>
+          <p:cNvSpPr/>
+          <p:nvPr/>
+        </p:nvSpPr>
+        <p:spPr>
+          <a:xfrm>
+            <a:off x="796900" y="3726180"/>
+            <a:ext cx="1882292" cy="146304"/>
+          </a:xfrm>
+          <a:prstGeom prst="rect">
+            <a:avLst/>
+          </a:prstGeom>
+          <a:noFill/>
+          <a:ln/>
+        </p:spPr>
+        <p:txBody>
+          <a:bodyPr wrap="square" lIns="0" tIns="0" rIns="0" bIns="0" rtlCol="0" anchor="ctr"/>
+          <a:lstStyle/>
+          <a:p>
+            <a:pPr marL="0" indent="0">
+              <a:buNone/>
+            </a:pPr>
+            <a:r>
+              <a:rPr lang="en-US" sz="650" b="1" kern="0" spc="100" dirty="0">
+                <a:solidFill>
+                  <a:srgbClr val="8A6A2F"/>
+                </a:solidFill>
+                <a:latin typeface="Consolas" pitchFamily="34" charset="0"/>
+                <a:ea typeface="Consolas" pitchFamily="34" charset="-122"/>
+                <a:cs typeface="Consolas" pitchFamily="34" charset="-120"/>
+              </a:rPr>
+              <a:t>TERMS · SCHEDULE</a:t>
+            </a:r>
+            <a:endParaRPr lang="en-US" sz="650" dirty="0"/>
+          </a:p>
+        </p:txBody>
+      </p:sp>
+      <p:sp>
+        <p:nvSpPr>
+          <p:cNvPr id="22" name="Text 20"/>
+          <p:cNvSpPr/>
+          <p:nvPr/>
+        </p:nvSpPr>
+        <p:spPr>
+          <a:xfrm>
+            <a:off x="796900" y="3854196"/>
+            <a:ext cx="1882292" cy="201168"/>
+          </a:xfrm>
+          <a:prstGeom prst="rect">
+            <a:avLst/>
+          </a:prstGeom>
+          <a:noFill/>
+          <a:ln/>
+        </p:spPr>
+        <p:txBody>
+          <a:bodyPr wrap="square" lIns="0" tIns="0" rIns="0" bIns="0" rtlCol="0" anchor="ctr"/>
+          <a:lstStyle/>
+          <a:p>
+            <a:pPr marL="0" indent="0">
+              <a:buNone/>
+            </a:pPr>
+            <a:r>
+              <a:rPr lang="en-US" sz="1100" b="1" dirty="0">
+                <a:solidFill>
+                  <a:srgbClr val="1C2830"/>
+                </a:solidFill>
+                <a:latin typeface="Georgia" pitchFamily="34" charset="0"/>
+                <a:ea typeface="Georgia" pitchFamily="34" charset="-122"/>
+                <a:cs typeface="Georgia" pitchFamily="34" charset="-120"/>
+              </a:rPr>
+              <a:t>Eligibility Entry</a:t>
+            </a:r>
+            <a:endParaRPr lang="en-US" sz="1100" dirty="0"/>
+          </a:p>
+        </p:txBody>
+      </p:sp>
+      <p:sp>
+        <p:nvSpPr>
+          <p:cNvPr id="23" name="Text 21"/>
+          <p:cNvSpPr/>
+          <p:nvPr/>
+        </p:nvSpPr>
+        <p:spPr>
+          <a:xfrm>
+            <a:off x="796900" y="4086454"/>
+            <a:ext cx="1882292" cy="155448"/>
+          </a:xfrm>
+          <a:prstGeom prst="rect">
+            <a:avLst/>
+          </a:prstGeom>
+          <a:noFill/>
+          <a:ln/>
+        </p:spPr>
+        <p:txBody>
+          <a:bodyPr wrap="square" lIns="0" tIns="0" rIns="0" bIns="0" rtlCol="0" anchor="ctr"/>
+          <a:lstStyle/>
+          <a:p>
+            <a:pPr marL="0" indent="0">
+              <a:buNone/>
+            </a:pPr>
+            <a:r>
+              <a:rPr lang="en-US" sz="700" dirty="0">
+                <a:solidFill>
+                  <a:srgbClr val="5A6B75"/>
+                </a:solidFill>
+                <a:latin typeface="Consolas" pitchFamily="34" charset="0"/>
+                <a:ea typeface="Consolas" pitchFamily="34" charset="-122"/>
+                <a:cs typeface="Consolas" pitchFamily="34" charset="-120"/>
+              </a:rPr>
+              <a:t>CMB 98% · CAD cash · GoC</a:t>
+            </a:r>
+            <a:endParaRPr lang="en-US" sz="700" dirty="0"/>
+          </a:p>
+        </p:txBody>
+      </p:sp>
+      <p:sp>
+        <p:nvSpPr>
+          <p:cNvPr id="24" name="Shape 22"/>
+          <p:cNvSpPr/>
+          <p:nvPr/>
+        </p:nvSpPr>
+        <p:spPr>
+          <a:xfrm>
+            <a:off x="723748" y="4518965"/>
+            <a:ext cx="2028596" cy="570586"/>
+          </a:xfrm>
+          <a:prstGeom prst="roundRect">
+            <a:avLst>
+              <a:gd name="adj" fmla="val 8013"/>
+            </a:avLst>
+          </a:prstGeom>
+          <a:solidFill>
+            <a:srgbClr val="F4EDDD"/>
+          </a:solidFill>
+          <a:ln w="15240">
+            <a:solidFill>
+              <a:srgbClr val="8A6A2F"/>
+            </a:solidFill>
+            <a:prstDash val="solid"/>
+          </a:ln>
+        </p:spPr>
+        <p:txBody>
+          <a:bodyPr/>
+          <a:lstStyle/>
+          <a:p>
+            <a:endParaRPr lang="en-US"/>
+          </a:p>
+        </p:txBody>
+      </p:sp>
+      <p:sp>
+        <p:nvSpPr>
+          <p:cNvPr id="25" name="Text 23"/>
+          <p:cNvSpPr/>
+          <p:nvPr/>
+        </p:nvSpPr>
+        <p:spPr>
+          <a:xfrm>
+            <a:off x="796900" y="4546397"/>
+            <a:ext cx="1882292" cy="146304"/>
+          </a:xfrm>
+          <a:prstGeom prst="rect">
+            <a:avLst/>
+          </a:prstGeom>
+          <a:noFill/>
+          <a:ln/>
+        </p:spPr>
+        <p:txBody>
+          <a:bodyPr wrap="square" lIns="0" tIns="0" rIns="0" bIns="0" rtlCol="0" anchor="ctr"/>
+          <a:lstStyle/>
+          <a:p>
+            <a:pPr marL="0" indent="0">
+              <a:buNone/>
+            </a:pPr>
+            <a:r>
+              <a:rPr lang="en-US" sz="650" b="1" kern="0" spc="100" dirty="0">
+                <a:solidFill>
+                  <a:srgbClr val="8A6A2F"/>
+                </a:solidFill>
+                <a:latin typeface="Consolas" pitchFamily="34" charset="0"/>
+                <a:ea typeface="Consolas" pitchFamily="34" charset="-122"/>
+                <a:cs typeface="Consolas" pitchFamily="34" charset="-120"/>
+              </a:rPr>
+              <a:t>TERMS · SCHEDULE</a:t>
+            </a:r>
+            <a:endParaRPr lang="en-US" sz="650" dirty="0"/>
+          </a:p>
+        </p:txBody>
+      </p:sp>
+      <p:sp>
+        <p:nvSpPr>
+          <p:cNvPr id="26" name="Text 24"/>
+          <p:cNvSpPr/>
+          <p:nvPr/>
+        </p:nvSpPr>
+        <p:spPr>
+          <a:xfrm>
+            <a:off x="796900" y="4674413"/>
+            <a:ext cx="1882292" cy="201168"/>
+          </a:xfrm>
+          <a:prstGeom prst="rect">
+            <a:avLst/>
+          </a:prstGeom>
+          <a:noFill/>
+          <a:ln/>
+        </p:spPr>
+        <p:txBody>
+          <a:bodyPr wrap="square" lIns="0" tIns="0" rIns="0" bIns="0" rtlCol="0" anchor="ctr"/>
+          <a:lstStyle/>
+          <a:p>
+            <a:pPr marL="0" indent="0">
+              <a:buNone/>
+            </a:pPr>
+            <a:r>
+              <a:rPr lang="en-US" sz="1100" b="1" dirty="0">
+                <a:solidFill>
+                  <a:srgbClr val="1C2830"/>
+                </a:solidFill>
+                <a:latin typeface="Georgia" pitchFamily="34" charset="0"/>
+                <a:ea typeface="Georgia" pitchFamily="34" charset="-122"/>
+                <a:cs typeface="Georgia" pitchFamily="34" charset="-120"/>
+              </a:rPr>
+              <a:t>Threshold Entry</a:t>
+            </a:r>
+            <a:endParaRPr lang="en-US" sz="1100" dirty="0"/>
+          </a:p>
+        </p:txBody>
+      </p:sp>
+      <p:sp>
+        <p:nvSpPr>
+          <p:cNvPr id="27" name="Text 25"/>
+          <p:cNvSpPr/>
+          <p:nvPr/>
+        </p:nvSpPr>
+        <p:spPr>
+          <a:xfrm>
+            <a:off x="796900" y="4906670"/>
+            <a:ext cx="1882292" cy="155448"/>
+          </a:xfrm>
+          <a:prstGeom prst="rect">
+            <a:avLst/>
+          </a:prstGeom>
+          <a:noFill/>
+          <a:ln/>
+        </p:spPr>
+        <p:txBody>
+          <a:bodyPr wrap="square" lIns="0" tIns="0" rIns="0" bIns="0" rtlCol="0" anchor="ctr"/>
+          <a:lstStyle/>
+          <a:p>
+            <a:pPr marL="0" indent="0">
+              <a:buNone/>
+            </a:pPr>
+            <a:r>
+              <a:rPr lang="en-US" sz="700" dirty="0">
+                <a:solidFill>
+                  <a:srgbClr val="5A6B75"/>
+                </a:solidFill>
+                <a:latin typeface="Consolas" pitchFamily="34" charset="0"/>
+                <a:ea typeface="Consolas" pitchFamily="34" charset="-122"/>
+                <a:cs typeface="Consolas" pitchFamily="34" charset="-120"/>
+              </a:rPr>
+              <a:t>Thr $75k · MTA $10k</a:t>
+            </a:r>
+            <a:endParaRPr lang="en-US" sz="700" dirty="0"/>
+          </a:p>
+        </p:txBody>
+      </p:sp>
+      <p:sp>
+        <p:nvSpPr>
+          <p:cNvPr id="28" name="Shape 26"/>
+          <p:cNvSpPr/>
+          <p:nvPr/>
+        </p:nvSpPr>
+        <p:spPr>
+          <a:xfrm>
+            <a:off x="723748" y="5339182"/>
+            <a:ext cx="2028596" cy="534924"/>
+          </a:xfrm>
+          <a:prstGeom prst="roundRect">
+            <a:avLst>
+              <a:gd name="adj" fmla="val 8547"/>
+            </a:avLst>
+          </a:prstGeom>
+          <a:solidFill>
+            <a:srgbClr val="F4EDDD"/>
+          </a:solidFill>
+          <a:ln w="15240">
+            <a:solidFill>
+              <a:srgbClr val="8A6A2F"/>
+            </a:solidFill>
+            <a:prstDash val="solid"/>
+          </a:ln>
+        </p:spPr>
+        <p:txBody>
+          <a:bodyPr/>
+          <a:lstStyle/>
+          <a:p>
+            <a:endParaRPr lang="en-US"/>
+          </a:p>
+        </p:txBody>
+      </p:sp>
+      <p:sp>
+        <p:nvSpPr>
+          <p:cNvPr id="29" name="Text 27"/>
+          <p:cNvSpPr/>
+          <p:nvPr/>
+        </p:nvSpPr>
+        <p:spPr>
+          <a:xfrm>
+            <a:off x="796900" y="5366614"/>
+            <a:ext cx="1882292" cy="146304"/>
+          </a:xfrm>
+          <a:prstGeom prst="rect">
+            <a:avLst/>
+          </a:prstGeom>
+          <a:noFill/>
+          <a:ln/>
+        </p:spPr>
+        <p:txBody>
+          <a:bodyPr wrap="square" lIns="0" tIns="0" rIns="0" bIns="0" rtlCol="0" anchor="ctr"/>
+          <a:lstStyle/>
+          <a:p>
+            <a:pPr marL="0" indent="0">
+              <a:buNone/>
+            </a:pPr>
+            <a:r>
+              <a:rPr lang="en-US" sz="650" b="1" kern="0" spc="100" dirty="0">
+                <a:solidFill>
+                  <a:srgbClr val="8A6A2F"/>
+                </a:solidFill>
+                <a:latin typeface="Consolas" pitchFamily="34" charset="0"/>
+                <a:ea typeface="Consolas" pitchFamily="34" charset="-122"/>
+                <a:cs typeface="Consolas" pitchFamily="34" charset="-120"/>
+              </a:rPr>
+              <a:t>REFERENCE</a:t>
+            </a:r>
+            <a:endParaRPr lang="en-US" sz="650" dirty="0"/>
+          </a:p>
+        </p:txBody>
+      </p:sp>
+      <p:sp>
+        <p:nvSpPr>
+          <p:cNvPr id="30" name="Text 28"/>
+          <p:cNvSpPr/>
+          <p:nvPr/>
+        </p:nvSpPr>
+        <p:spPr>
+          <a:xfrm>
+            <a:off x="796900" y="5494630"/>
+            <a:ext cx="1882292" cy="201168"/>
+          </a:xfrm>
+          <a:prstGeom prst="rect">
+            <a:avLst/>
+          </a:prstGeom>
+          <a:noFill/>
+          <a:ln/>
+        </p:spPr>
+        <p:txBody>
+          <a:bodyPr wrap="square" lIns="0" tIns="0" rIns="0" bIns="0" rtlCol="0" anchor="ctr"/>
+          <a:lstStyle/>
+          <a:p>
+            <a:pPr marL="0" indent="0">
+              <a:buNone/>
+            </a:pPr>
+            <a:r>
+              <a:rPr lang="en-US" sz="1100" b="1" dirty="0">
+                <a:solidFill>
+                  <a:srgbClr val="1C2830"/>
+                </a:solidFill>
+                <a:latin typeface="Georgia" pitchFamily="34" charset="0"/>
+                <a:ea typeface="Georgia" pitchFamily="34" charset="-122"/>
+                <a:cs typeface="Georgia" pitchFamily="34" charset="-120"/>
+              </a:rPr>
+              <a:t>Credit Rating</a:t>
+            </a:r>
+            <a:endParaRPr lang="en-US" sz="1100" dirty="0"/>
+          </a:p>
+        </p:txBody>
+      </p:sp>
+      <p:sp>
+        <p:nvSpPr>
+          <p:cNvPr id="31" name="Text 29"/>
+          <p:cNvSpPr/>
+          <p:nvPr/>
+        </p:nvSpPr>
+        <p:spPr>
+          <a:xfrm>
+            <a:off x="796900" y="5691226"/>
+            <a:ext cx="1882292" cy="155448"/>
+          </a:xfrm>
+          <a:prstGeom prst="rect">
+            <a:avLst/>
+          </a:prstGeom>
+          <a:noFill/>
+          <a:ln/>
+        </p:spPr>
+        <p:txBody>
+          <a:bodyPr wrap="square" lIns="0" tIns="0" rIns="0" bIns="0" rtlCol="0" anchor="ctr"/>
+          <a:lstStyle/>
+          <a:p>
+            <a:pPr marL="0" indent="0">
+              <a:buNone/>
+            </a:pPr>
+            <a:r>
+              <a:rPr lang="en-US" sz="700" dirty="0">
+                <a:solidFill>
+                  <a:srgbClr val="5A6B75"/>
+                </a:solidFill>
+                <a:latin typeface="Consolas" pitchFamily="34" charset="0"/>
+                <a:ea typeface="Consolas" pitchFamily="34" charset="-122"/>
+                <a:cs typeface="Consolas" pitchFamily="34" charset="-120"/>
+              </a:rPr>
+              <a:t>BCCU: AA- (S&amp;P) · 1C int.</a:t>
+            </a:r>
+            <a:endParaRPr lang="en-US" sz="700" dirty="0"/>
+          </a:p>
+        </p:txBody>
+      </p:sp>
+      <p:sp>
+        <p:nvSpPr>
+          <p:cNvPr id="32" name="Shape 30"/>
+          <p:cNvSpPr/>
+          <p:nvPr/>
+        </p:nvSpPr>
+        <p:spPr>
+          <a:xfrm>
+            <a:off x="3348990" y="3698748"/>
+            <a:ext cx="1909267" cy="570586"/>
+          </a:xfrm>
+          <a:prstGeom prst="roundRect">
+            <a:avLst>
+              <a:gd name="adj" fmla="val 8013"/>
+            </a:avLst>
+          </a:prstGeom>
+          <a:solidFill>
+            <a:srgbClr val="E9EEF4"/>
+          </a:solidFill>
+          <a:ln w="15240">
+            <a:solidFill>
+              <a:srgbClr val="2E4A66"/>
+            </a:solidFill>
+            <a:prstDash val="solid"/>
+          </a:ln>
+        </p:spPr>
+        <p:txBody>
+          <a:bodyPr/>
+          <a:lstStyle/>
+          <a:p>
+            <a:endParaRPr lang="en-US"/>
+          </a:p>
+        </p:txBody>
+      </p:sp>
+      <p:sp>
+        <p:nvSpPr>
+          <p:cNvPr id="33" name="Text 31"/>
+          <p:cNvSpPr/>
+          <p:nvPr/>
+        </p:nvSpPr>
+        <p:spPr>
+          <a:xfrm>
+            <a:off x="3422142" y="3726180"/>
+            <a:ext cx="1762963" cy="146304"/>
+          </a:xfrm>
+          <a:prstGeom prst="rect">
+            <a:avLst/>
+          </a:prstGeom>
+          <a:noFill/>
+          <a:ln/>
+        </p:spPr>
+        <p:txBody>
+          <a:bodyPr wrap="square" lIns="0" tIns="0" rIns="0" bIns="0" rtlCol="0" anchor="ctr"/>
+          <a:lstStyle/>
+          <a:p>
+            <a:pPr marL="0" indent="0">
+              <a:buNone/>
+            </a:pPr>
+            <a:r>
+              <a:rPr lang="en-US" sz="650" b="1" kern="0" spc="100" dirty="0">
+                <a:solidFill>
+                  <a:srgbClr val="2E4A66"/>
+                </a:solidFill>
+                <a:latin typeface="Consolas" pitchFamily="34" charset="0"/>
+                <a:ea typeface="Consolas" pitchFamily="34" charset="-122"/>
+                <a:cs typeface="Consolas" pitchFamily="34" charset="-120"/>
+              </a:rPr>
+              <a:t>TRADING</a:t>
+            </a:r>
+            <a:endParaRPr lang="en-US" sz="650" dirty="0"/>
+          </a:p>
+        </p:txBody>
+      </p:sp>
+      <p:sp>
+        <p:nvSpPr>
+          <p:cNvPr id="34" name="Text 32"/>
+          <p:cNvSpPr/>
+          <p:nvPr/>
+        </p:nvSpPr>
+        <p:spPr>
+          <a:xfrm>
+            <a:off x="3422142" y="3854196"/>
+            <a:ext cx="1762963" cy="201168"/>
+          </a:xfrm>
+          <a:prstGeom prst="rect">
+            <a:avLst/>
+          </a:prstGeom>
+          <a:noFill/>
+          <a:ln/>
+        </p:spPr>
+        <p:txBody>
+          <a:bodyPr wrap="square" lIns="0" tIns="0" rIns="0" bIns="0" rtlCol="0" anchor="ctr"/>
+          <a:lstStyle/>
+          <a:p>
+            <a:pPr marL="0" indent="0">
+              <a:buNone/>
+            </a:pPr>
+            <a:r>
+              <a:rPr lang="en-US" sz="1100" b="1" dirty="0">
+                <a:solidFill>
+                  <a:srgbClr val="1C2830"/>
+                </a:solidFill>
+                <a:latin typeface="Georgia" pitchFamily="34" charset="0"/>
+                <a:ea typeface="Georgia" pitchFamily="34" charset="-122"/>
+                <a:cs typeface="Georgia" pitchFamily="34" charset="-120"/>
+              </a:rPr>
+              <a:t>Netting Set</a:t>
+            </a:r>
+            <a:endParaRPr lang="en-US" sz="1100" dirty="0"/>
+          </a:p>
+        </p:txBody>
+      </p:sp>
+      <p:sp>
+        <p:nvSpPr>
+          <p:cNvPr id="35" name="Text 33"/>
+          <p:cNvSpPr/>
+          <p:nvPr/>
+        </p:nvSpPr>
+        <p:spPr>
+          <a:xfrm>
+            <a:off x="3422142" y="4086454"/>
+            <a:ext cx="1762963" cy="155448"/>
+          </a:xfrm>
+          <a:prstGeom prst="rect">
+            <a:avLst/>
+          </a:prstGeom>
+          <a:noFill/>
+          <a:ln/>
+        </p:spPr>
+        <p:txBody>
+          <a:bodyPr wrap="square" lIns="0" tIns="0" rIns="0" bIns="0" rtlCol="0" anchor="ctr"/>
+          <a:lstStyle/>
+          <a:p>
+            <a:pPr marL="0" indent="0">
+              <a:buNone/>
+            </a:pPr>
+            <a:r>
+              <a:rPr lang="en-US" sz="700" dirty="0">
+                <a:solidFill>
+                  <a:srgbClr val="5A6B75"/>
+                </a:solidFill>
+                <a:latin typeface="Consolas" pitchFamily="34" charset="0"/>
+                <a:ea typeface="Consolas" pitchFamily="34" charset="-122"/>
+                <a:cs typeface="Consolas" pitchFamily="34" charset="-120"/>
+              </a:rPr>
+              <a:t>NS-1689 · from CSA scope</a:t>
+            </a:r>
+            <a:endParaRPr lang="en-US" sz="700" dirty="0"/>
+          </a:p>
+        </p:txBody>
+      </p:sp>
+      <p:sp>
+        <p:nvSpPr>
+          <p:cNvPr id="36" name="Shape 34"/>
+          <p:cNvSpPr/>
+          <p:nvPr/>
+        </p:nvSpPr>
+        <p:spPr>
+          <a:xfrm>
+            <a:off x="3348990" y="4857750"/>
+            <a:ext cx="1909267" cy="570586"/>
+          </a:xfrm>
+          <a:prstGeom prst="roundRect">
+            <a:avLst>
+              <a:gd name="adj" fmla="val 8013"/>
+            </a:avLst>
+          </a:prstGeom>
+          <a:solidFill>
+            <a:srgbClr val="E9EEF4"/>
+          </a:solidFill>
+          <a:ln w="15240">
+            <a:solidFill>
+              <a:srgbClr val="2E4A66"/>
+            </a:solidFill>
+            <a:prstDash val="solid"/>
+          </a:ln>
+        </p:spPr>
+        <p:txBody>
+          <a:bodyPr/>
+          <a:lstStyle/>
+          <a:p>
+            <a:endParaRPr lang="en-US"/>
+          </a:p>
+        </p:txBody>
+      </p:sp>
+      <p:sp>
+        <p:nvSpPr>
+          <p:cNvPr id="37" name="Text 35"/>
+          <p:cNvSpPr/>
+          <p:nvPr/>
+        </p:nvSpPr>
+        <p:spPr>
+          <a:xfrm>
+            <a:off x="3422142" y="4885182"/>
+            <a:ext cx="1762963" cy="146304"/>
+          </a:xfrm>
+          <a:prstGeom prst="rect">
+            <a:avLst/>
+          </a:prstGeom>
+          <a:noFill/>
+          <a:ln/>
+        </p:spPr>
+        <p:txBody>
+          <a:bodyPr wrap="square" lIns="0" tIns="0" rIns="0" bIns="0" rtlCol="0" anchor="ctr"/>
+          <a:lstStyle/>
+          <a:p>
+            <a:pPr marL="0" indent="0">
+              <a:buNone/>
+            </a:pPr>
+            <a:r>
+              <a:rPr lang="en-US" sz="650" b="1" kern="0" spc="100" dirty="0">
+                <a:solidFill>
+                  <a:srgbClr val="2E4A66"/>
+                </a:solidFill>
+                <a:latin typeface="Consolas" pitchFamily="34" charset="0"/>
+                <a:ea typeface="Consolas" pitchFamily="34" charset="-122"/>
+                <a:cs typeface="Consolas" pitchFamily="34" charset="-120"/>
+              </a:rPr>
+              <a:t>TRADING</a:t>
+            </a:r>
+            <a:endParaRPr lang="en-US" sz="650" dirty="0"/>
+          </a:p>
+        </p:txBody>
+      </p:sp>
+      <p:sp>
+        <p:nvSpPr>
+          <p:cNvPr id="38" name="Text 36"/>
+          <p:cNvSpPr/>
+          <p:nvPr/>
+        </p:nvSpPr>
+        <p:spPr>
+          <a:xfrm>
+            <a:off x="3422142" y="5013198"/>
+            <a:ext cx="1762963" cy="201168"/>
+          </a:xfrm>
+          <a:prstGeom prst="rect">
+            <a:avLst/>
+          </a:prstGeom>
+          <a:noFill/>
+          <a:ln/>
+        </p:spPr>
+        <p:txBody>
+          <a:bodyPr wrap="square" lIns="0" tIns="0" rIns="0" bIns="0" rtlCol="0" anchor="ctr"/>
+          <a:lstStyle/>
+          <a:p>
+            <a:pPr marL="0" indent="0">
+              <a:buNone/>
+            </a:pPr>
+            <a:r>
+              <a:rPr lang="en-US" sz="1100" b="1" dirty="0">
+                <a:solidFill>
+                  <a:srgbClr val="1C2830"/>
+                </a:solidFill>
+                <a:latin typeface="Georgia" pitchFamily="34" charset="0"/>
+                <a:ea typeface="Georgia" pitchFamily="34" charset="-122"/>
+                <a:cs typeface="Georgia" pitchFamily="34" charset="-120"/>
+              </a:rPr>
+              <a:t>Trade</a:t>
+            </a:r>
+            <a:endParaRPr lang="en-US" sz="1100" dirty="0"/>
+          </a:p>
+        </p:txBody>
+      </p:sp>
+      <p:sp>
+        <p:nvSpPr>
+          <p:cNvPr id="39" name="Text 37"/>
+          <p:cNvSpPr/>
+          <p:nvPr/>
+        </p:nvSpPr>
+        <p:spPr>
+          <a:xfrm>
+            <a:off x="3422142" y="5245456"/>
+            <a:ext cx="1762963" cy="155448"/>
+          </a:xfrm>
+          <a:prstGeom prst="rect">
+            <a:avLst/>
+          </a:prstGeom>
+          <a:noFill/>
+          <a:ln/>
+        </p:spPr>
+        <p:txBody>
+          <a:bodyPr wrap="square" lIns="0" tIns="0" rIns="0" bIns="0" rtlCol="0" anchor="ctr"/>
+          <a:lstStyle/>
+          <a:p>
+            <a:pPr marL="0" indent="0">
+              <a:buNone/>
+            </a:pPr>
+            <a:r>
+              <a:rPr lang="en-US" sz="700" dirty="0">
+                <a:solidFill>
+                  <a:srgbClr val="5A6B75"/>
+                </a:solidFill>
+                <a:latin typeface="Consolas" pitchFamily="34" charset="0"/>
+                <a:ea typeface="Consolas" pitchFamily="34" charset="-122"/>
+                <a:cs typeface="Consolas" pitchFamily="34" charset="-120"/>
+              </a:rPr>
+              <a:t>FX options · CDS (Murex/Calypso)</a:t>
+            </a:r>
+            <a:endParaRPr lang="en-US" sz="700" dirty="0"/>
+          </a:p>
+        </p:txBody>
+      </p:sp>
+      <p:sp>
+        <p:nvSpPr>
+          <p:cNvPr id="40" name="Shape 38"/>
+          <p:cNvSpPr/>
+          <p:nvPr/>
+        </p:nvSpPr>
+        <p:spPr>
+          <a:xfrm>
+            <a:off x="5974232" y="3698748"/>
+            <a:ext cx="1885401" cy="570586"/>
+          </a:xfrm>
+          <a:prstGeom prst="roundRect">
+            <a:avLst>
+              <a:gd name="adj" fmla="val 8013"/>
+            </a:avLst>
+          </a:prstGeom>
+          <a:solidFill>
+            <a:srgbClr val="E9EEF4"/>
+          </a:solidFill>
+          <a:ln w="15240">
+            <a:solidFill>
+              <a:srgbClr val="2E4A66"/>
+            </a:solidFill>
+            <a:prstDash val="solid"/>
+          </a:ln>
+        </p:spPr>
+        <p:txBody>
+          <a:bodyPr/>
+          <a:lstStyle/>
+          <a:p>
+            <a:endParaRPr lang="en-US"/>
+          </a:p>
+        </p:txBody>
+      </p:sp>
+      <p:sp>
+        <p:nvSpPr>
+          <p:cNvPr id="41" name="Text 39"/>
+          <p:cNvSpPr/>
+          <p:nvPr/>
+        </p:nvSpPr>
+        <p:spPr>
+          <a:xfrm>
+            <a:off x="6047384" y="3726180"/>
+            <a:ext cx="1739097" cy="146304"/>
+          </a:xfrm>
+          <a:prstGeom prst="rect">
+            <a:avLst/>
+          </a:prstGeom>
+          <a:noFill/>
+          <a:ln/>
+        </p:spPr>
+        <p:txBody>
+          <a:bodyPr wrap="square" lIns="0" tIns="0" rIns="0" bIns="0" rtlCol="0" anchor="ctr"/>
+          <a:lstStyle/>
+          <a:p>
+            <a:pPr marL="0" indent="0">
+              <a:buNone/>
+            </a:pPr>
+            <a:r>
+              <a:rPr lang="en-US" sz="650" b="1" kern="0" spc="100" dirty="0">
+                <a:solidFill>
+                  <a:srgbClr val="2E4A66"/>
+                </a:solidFill>
+                <a:latin typeface="Consolas" pitchFamily="34" charset="0"/>
+                <a:ea typeface="Consolas" pitchFamily="34" charset="-122"/>
+                <a:cs typeface="Consolas" pitchFamily="34" charset="-120"/>
+              </a:rPr>
+              <a:t>TRADING · DAILY</a:t>
+            </a:r>
+            <a:endParaRPr lang="en-US" sz="650" dirty="0"/>
+          </a:p>
+        </p:txBody>
+      </p:sp>
+      <p:sp>
+        <p:nvSpPr>
+          <p:cNvPr id="42" name="Text 40"/>
+          <p:cNvSpPr/>
+          <p:nvPr/>
+        </p:nvSpPr>
+        <p:spPr>
+          <a:xfrm>
+            <a:off x="6047384" y="3854196"/>
+            <a:ext cx="1739097" cy="201168"/>
+          </a:xfrm>
+          <a:prstGeom prst="rect">
+            <a:avLst/>
+          </a:prstGeom>
+          <a:noFill/>
+          <a:ln/>
+        </p:spPr>
+        <p:txBody>
+          <a:bodyPr wrap="square" lIns="0" tIns="0" rIns="0" bIns="0" rtlCol="0" anchor="ctr"/>
+          <a:lstStyle/>
+          <a:p>
+            <a:pPr marL="0" indent="0">
+              <a:buNone/>
+            </a:pPr>
+            <a:r>
+              <a:rPr lang="en-US" sz="1100" b="1" dirty="0">
+                <a:solidFill>
+                  <a:srgbClr val="1C2830"/>
+                </a:solidFill>
+                <a:latin typeface="Georgia" pitchFamily="34" charset="0"/>
+                <a:ea typeface="Georgia" pitchFamily="34" charset="-122"/>
+                <a:cs typeface="Georgia" pitchFamily="34" charset="-120"/>
+              </a:rPr>
+              <a:t>Exposure</a:t>
+            </a:r>
+            <a:endParaRPr lang="en-US" sz="1100" dirty="0"/>
+          </a:p>
+        </p:txBody>
+      </p:sp>
+      <p:sp>
+        <p:nvSpPr>
+          <p:cNvPr id="43" name="Text 41"/>
+          <p:cNvSpPr/>
+          <p:nvPr/>
+        </p:nvSpPr>
+        <p:spPr>
+          <a:xfrm>
+            <a:off x="6047384" y="4086454"/>
+            <a:ext cx="1739097" cy="155448"/>
+          </a:xfrm>
+          <a:prstGeom prst="rect">
+            <a:avLst/>
+          </a:prstGeom>
+          <a:noFill/>
+          <a:ln/>
+        </p:spPr>
+        <p:txBody>
+          <a:bodyPr wrap="square" lIns="0" tIns="0" rIns="0" bIns="0" rtlCol="0" anchor="ctr"/>
+          <a:lstStyle/>
+          <a:p>
+            <a:pPr marL="0" indent="0">
+              <a:buNone/>
+            </a:pPr>
+            <a:r>
+              <a:rPr lang="en-US" sz="700" dirty="0">
+                <a:solidFill>
+                  <a:srgbClr val="5A6B75"/>
+                </a:solidFill>
+                <a:latin typeface="Consolas" pitchFamily="34" charset="0"/>
+                <a:ea typeface="Consolas" pitchFamily="34" charset="-122"/>
+                <a:cs typeface="Consolas" pitchFamily="34" charset="-120"/>
+              </a:rPr>
+              <a:t>net MtM +$14.115M</a:t>
+            </a:r>
+            <a:endParaRPr lang="en-US" sz="700" dirty="0"/>
+          </a:p>
+        </p:txBody>
+      </p:sp>
+      <p:sp>
+        <p:nvSpPr>
+          <p:cNvPr id="44" name="Shape 42"/>
+          <p:cNvSpPr/>
+          <p:nvPr/>
+        </p:nvSpPr>
+        <p:spPr>
+          <a:xfrm>
+            <a:off x="5974232" y="2539746"/>
+            <a:ext cx="1885401" cy="570586"/>
+          </a:xfrm>
+          <a:prstGeom prst="roundRect">
+            <a:avLst>
+              <a:gd name="adj" fmla="val 8013"/>
+            </a:avLst>
+          </a:prstGeom>
+          <a:solidFill>
+            <a:srgbClr val="E5F0ED"/>
+          </a:solidFill>
+          <a:ln w="15240">
+            <a:solidFill>
+              <a:srgbClr val="216A5E"/>
+            </a:solidFill>
+            <a:prstDash val="solid"/>
+          </a:ln>
+        </p:spPr>
+        <p:txBody>
+          <a:bodyPr/>
+          <a:lstStyle/>
+          <a:p>
+            <a:endParaRPr lang="en-US"/>
+          </a:p>
+        </p:txBody>
+      </p:sp>
+      <p:sp>
+        <p:nvSpPr>
+          <p:cNvPr id="45" name="Text 43"/>
+          <p:cNvSpPr/>
+          <p:nvPr/>
+        </p:nvSpPr>
+        <p:spPr>
+          <a:xfrm>
+            <a:off x="6047384" y="2567178"/>
+            <a:ext cx="1739097" cy="146304"/>
+          </a:xfrm>
+          <a:prstGeom prst="rect">
+            <a:avLst/>
+          </a:prstGeom>
+          <a:noFill/>
+          <a:ln/>
+        </p:spPr>
+        <p:txBody>
+          <a:bodyPr wrap="square" lIns="0" tIns="0" rIns="0" bIns="0" rtlCol="0" anchor="ctr"/>
+          <a:lstStyle/>
+          <a:p>
+            <a:pPr marL="0" indent="0">
+              <a:buNone/>
+            </a:pPr>
+            <a:r>
+              <a:rPr lang="en-US" sz="650" b="1" kern="0" spc="100" dirty="0">
+                <a:solidFill>
+                  <a:srgbClr val="216A5E"/>
+                </a:solidFill>
+                <a:latin typeface="Consolas" pitchFamily="34" charset="0"/>
+                <a:ea typeface="Consolas" pitchFamily="34" charset="-122"/>
+                <a:cs typeface="Consolas" pitchFamily="34" charset="-120"/>
+              </a:rPr>
+              <a:t>EVENT · CMOS</a:t>
+            </a:r>
+            <a:endParaRPr lang="en-US" sz="650" dirty="0"/>
+          </a:p>
+        </p:txBody>
+      </p:sp>
+      <p:sp>
+        <p:nvSpPr>
+          <p:cNvPr id="46" name="Text 44"/>
+          <p:cNvSpPr/>
+          <p:nvPr/>
+        </p:nvSpPr>
+        <p:spPr>
+          <a:xfrm>
+            <a:off x="6047384" y="2695194"/>
+            <a:ext cx="1739097" cy="201168"/>
+          </a:xfrm>
+          <a:prstGeom prst="rect">
+            <a:avLst/>
+          </a:prstGeom>
+          <a:noFill/>
+          <a:ln/>
+        </p:spPr>
+        <p:txBody>
+          <a:bodyPr wrap="square" lIns="0" tIns="0" rIns="0" bIns="0" rtlCol="0" anchor="ctr"/>
+          <a:lstStyle/>
+          <a:p>
+            <a:pPr marL="0" indent="0">
+              <a:buNone/>
+            </a:pPr>
+            <a:r>
+              <a:rPr lang="en-US" sz="1100" b="1" dirty="0">
+                <a:solidFill>
+                  <a:srgbClr val="1C2830"/>
+                </a:solidFill>
+                <a:latin typeface="Georgia" pitchFamily="34" charset="0"/>
+                <a:ea typeface="Georgia" pitchFamily="34" charset="-122"/>
+                <a:cs typeface="Georgia" pitchFamily="34" charset="-120"/>
+              </a:rPr>
+              <a:t>Margin Call</a:t>
+            </a:r>
+            <a:endParaRPr lang="en-US" sz="1100" dirty="0"/>
+          </a:p>
+        </p:txBody>
+      </p:sp>
+      <p:sp>
+        <p:nvSpPr>
+          <p:cNvPr id="47" name="Text 45"/>
+          <p:cNvSpPr/>
+          <p:nvPr/>
+        </p:nvSpPr>
+        <p:spPr>
+          <a:xfrm>
+            <a:off x="6047384" y="2927452"/>
+            <a:ext cx="1739097" cy="155448"/>
+          </a:xfrm>
+          <a:prstGeom prst="rect">
+            <a:avLst/>
+          </a:prstGeom>
+          <a:noFill/>
+          <a:ln/>
+        </p:spPr>
+        <p:txBody>
+          <a:bodyPr wrap="square" lIns="0" tIns="0" rIns="0" bIns="0" rtlCol="0" anchor="ctr"/>
+          <a:lstStyle/>
+          <a:p>
+            <a:pPr marL="0" indent="0">
+              <a:buNone/>
+            </a:pPr>
+            <a:r>
+              <a:rPr lang="en-US" sz="700" dirty="0">
+                <a:solidFill>
+                  <a:srgbClr val="5A6B75"/>
+                </a:solidFill>
+                <a:latin typeface="Consolas" pitchFamily="34" charset="0"/>
+                <a:ea typeface="Consolas" pitchFamily="34" charset="-122"/>
+                <a:cs typeface="Consolas" pitchFamily="34" charset="-120"/>
+              </a:rPr>
+              <a:t>VM · $14.04M · disputed</a:t>
+            </a:r>
+            <a:endParaRPr lang="en-US" sz="700" dirty="0"/>
+          </a:p>
+        </p:txBody>
+      </p:sp>
+      <p:sp>
+        <p:nvSpPr>
+          <p:cNvPr id="48" name="Shape 46"/>
+          <p:cNvSpPr/>
+          <p:nvPr/>
+        </p:nvSpPr>
+        <p:spPr>
+          <a:xfrm>
+            <a:off x="5974232" y="4857750"/>
+            <a:ext cx="1885401" cy="624078"/>
+          </a:xfrm>
+          <a:prstGeom prst="roundRect">
+            <a:avLst>
+              <a:gd name="adj" fmla="val 7326"/>
+            </a:avLst>
+          </a:prstGeom>
+          <a:solidFill>
+            <a:srgbClr val="E5F0ED"/>
+          </a:solidFill>
+          <a:ln w="15240">
+            <a:solidFill>
+              <a:srgbClr val="216A5E"/>
+            </a:solidFill>
+            <a:prstDash val="solid"/>
+          </a:ln>
+        </p:spPr>
+        <p:txBody>
+          <a:bodyPr/>
+          <a:lstStyle/>
+          <a:p>
+            <a:endParaRPr lang="en-US"/>
+          </a:p>
+        </p:txBody>
+      </p:sp>
+      <p:sp>
+        <p:nvSpPr>
+          <p:cNvPr id="49" name="Text 47"/>
+          <p:cNvSpPr/>
+          <p:nvPr/>
+        </p:nvSpPr>
+        <p:spPr>
+          <a:xfrm>
+            <a:off x="6047384" y="4885182"/>
+            <a:ext cx="1739097" cy="146304"/>
+          </a:xfrm>
+          <a:prstGeom prst="rect">
+            <a:avLst/>
+          </a:prstGeom>
+          <a:noFill/>
+          <a:ln/>
+        </p:spPr>
+        <p:txBody>
+          <a:bodyPr wrap="square" lIns="0" tIns="0" rIns="0" bIns="0" rtlCol="0" anchor="ctr"/>
+          <a:lstStyle/>
+          <a:p>
+            <a:pPr marL="0" indent="0">
+              <a:buNone/>
+            </a:pPr>
+            <a:r>
+              <a:rPr lang="en-US" sz="650" b="1" kern="0" spc="100" dirty="0">
+                <a:solidFill>
+                  <a:srgbClr val="216A5E"/>
+                </a:solidFill>
+                <a:latin typeface="Consolas" pitchFamily="34" charset="0"/>
+                <a:ea typeface="Consolas" pitchFamily="34" charset="-122"/>
+                <a:cs typeface="Consolas" pitchFamily="34" charset="-120"/>
+              </a:rPr>
+              <a:t>EVENT · COLLINE</a:t>
+            </a:r>
+            <a:endParaRPr lang="en-US" sz="650" dirty="0"/>
+          </a:p>
+        </p:txBody>
+      </p:sp>
+      <p:sp>
+        <p:nvSpPr>
+          <p:cNvPr id="50" name="Text 48"/>
+          <p:cNvSpPr/>
+          <p:nvPr/>
+        </p:nvSpPr>
+        <p:spPr>
+          <a:xfrm>
+            <a:off x="6047384" y="5013198"/>
+            <a:ext cx="1739097" cy="201168"/>
+          </a:xfrm>
+          <a:prstGeom prst="rect">
+            <a:avLst/>
+          </a:prstGeom>
+          <a:noFill/>
+          <a:ln/>
+        </p:spPr>
+        <p:txBody>
+          <a:bodyPr wrap="square" lIns="0" tIns="0" rIns="0" bIns="0" rtlCol="0" anchor="ctr"/>
+          <a:lstStyle/>
+          <a:p>
+            <a:pPr marL="0" indent="0">
+              <a:buNone/>
+            </a:pPr>
+            <a:r>
+              <a:rPr lang="en-US" sz="1100" b="1" dirty="0">
+                <a:solidFill>
+                  <a:srgbClr val="1C2830"/>
+                </a:solidFill>
+                <a:latin typeface="Georgia" pitchFamily="34" charset="0"/>
+                <a:ea typeface="Georgia" pitchFamily="34" charset="-122"/>
+                <a:cs typeface="Georgia" pitchFamily="34" charset="-120"/>
+              </a:rPr>
+              <a:t>Collateral Movement</a:t>
+            </a:r>
+            <a:endParaRPr lang="en-US" sz="1100" dirty="0"/>
+          </a:p>
+        </p:txBody>
+      </p:sp>
+      <p:sp>
+        <p:nvSpPr>
+          <p:cNvPr id="51" name="Text 49"/>
+          <p:cNvSpPr/>
+          <p:nvPr/>
+        </p:nvSpPr>
+        <p:spPr>
+          <a:xfrm>
+            <a:off x="6047384" y="5298948"/>
+            <a:ext cx="1739097" cy="155448"/>
+          </a:xfrm>
+          <a:prstGeom prst="rect">
+            <a:avLst/>
+          </a:prstGeom>
+          <a:noFill/>
+          <a:ln/>
+        </p:spPr>
+        <p:txBody>
+          <a:bodyPr wrap="square" lIns="0" tIns="0" rIns="0" bIns="0" rtlCol="0" anchor="ctr"/>
+          <a:lstStyle/>
+          <a:p>
+            <a:pPr marL="0" indent="0">
+              <a:buNone/>
+            </a:pPr>
+            <a:r>
+              <a:rPr lang="en-US" sz="700" dirty="0">
+                <a:solidFill>
+                  <a:srgbClr val="5A6B75"/>
+                </a:solidFill>
+                <a:latin typeface="Consolas" pitchFamily="34" charset="0"/>
+                <a:ea typeface="Consolas" pitchFamily="34" charset="-122"/>
+                <a:cs typeface="Consolas" pitchFamily="34" charset="-120"/>
+              </a:rPr>
+              <a:t>MV-0402 · $13.87M CMB</a:t>
+            </a:r>
+            <a:endParaRPr lang="en-US" sz="700" dirty="0"/>
+          </a:p>
+        </p:txBody>
+      </p:sp>
+      <p:sp>
+        <p:nvSpPr>
+          <p:cNvPr id="52" name="Shape 50"/>
+          <p:cNvSpPr/>
+          <p:nvPr/>
+        </p:nvSpPr>
+        <p:spPr>
+          <a:xfrm>
+            <a:off x="8718804" y="5481828"/>
+            <a:ext cx="1789938" cy="534924"/>
+          </a:xfrm>
+          <a:prstGeom prst="roundRect">
+            <a:avLst>
+              <a:gd name="adj" fmla="val 8547"/>
+            </a:avLst>
+          </a:prstGeom>
+          <a:solidFill>
+            <a:srgbClr val="E9EEF4"/>
+          </a:solidFill>
+          <a:ln w="15240">
+            <a:solidFill>
+              <a:srgbClr val="2E4A66"/>
+            </a:solidFill>
+            <a:prstDash val="solid"/>
+          </a:ln>
+        </p:spPr>
+        <p:txBody>
+          <a:bodyPr/>
+          <a:lstStyle/>
+          <a:p>
+            <a:endParaRPr lang="en-US"/>
+          </a:p>
+        </p:txBody>
+      </p:sp>
+      <p:sp>
+        <p:nvSpPr>
+          <p:cNvPr id="53" name="Text 51"/>
+          <p:cNvSpPr/>
+          <p:nvPr/>
+        </p:nvSpPr>
+        <p:spPr>
+          <a:xfrm>
+            <a:off x="8791956" y="5509260"/>
+            <a:ext cx="1643634" cy="146304"/>
+          </a:xfrm>
+          <a:prstGeom prst="rect">
+            <a:avLst/>
+          </a:prstGeom>
+          <a:noFill/>
+          <a:ln/>
+        </p:spPr>
+        <p:txBody>
+          <a:bodyPr wrap="square" lIns="0" tIns="0" rIns="0" bIns="0" rtlCol="0" anchor="ctr"/>
+          <a:lstStyle/>
+          <a:p>
+            <a:pPr marL="0" indent="0">
+              <a:buNone/>
+            </a:pPr>
+            <a:r>
+              <a:rPr lang="en-US" sz="650" b="1" kern="0" spc="100" dirty="0">
+                <a:solidFill>
+                  <a:srgbClr val="2E4A66"/>
+                </a:solidFill>
+                <a:latin typeface="Consolas" pitchFamily="34" charset="0"/>
+                <a:ea typeface="Consolas" pitchFamily="34" charset="-122"/>
+                <a:cs typeface="Consolas" pitchFamily="34" charset="-120"/>
+              </a:rPr>
+              <a:t>REFERENCE</a:t>
+            </a:r>
+            <a:endParaRPr lang="en-US" sz="650" dirty="0"/>
+          </a:p>
+        </p:txBody>
+      </p:sp>
+      <p:sp>
+        <p:nvSpPr>
+          <p:cNvPr id="54" name="Text 52"/>
+          <p:cNvSpPr/>
+          <p:nvPr/>
+        </p:nvSpPr>
+        <p:spPr>
+          <a:xfrm>
+            <a:off x="8791956" y="5637276"/>
+            <a:ext cx="1643634" cy="201168"/>
+          </a:xfrm>
+          <a:prstGeom prst="rect">
+            <a:avLst/>
+          </a:prstGeom>
+          <a:noFill/>
+          <a:ln/>
+        </p:spPr>
+        <p:txBody>
+          <a:bodyPr wrap="square" lIns="0" tIns="0" rIns="0" bIns="0" rtlCol="0" anchor="ctr"/>
+          <a:lstStyle/>
+          <a:p>
+            <a:pPr marL="0" indent="0">
+              <a:buNone/>
+            </a:pPr>
+            <a:r>
+              <a:rPr lang="en-US" sz="1100" b="1" dirty="0">
+                <a:solidFill>
+                  <a:srgbClr val="1C2830"/>
+                </a:solidFill>
+                <a:latin typeface="Georgia" pitchFamily="34" charset="0"/>
+                <a:ea typeface="Georgia" pitchFamily="34" charset="-122"/>
+                <a:cs typeface="Georgia" pitchFamily="34" charset="-120"/>
+              </a:rPr>
+              <a:t>Asset</a:t>
+            </a:r>
+            <a:endParaRPr lang="en-US" sz="1100" dirty="0"/>
+          </a:p>
+        </p:txBody>
+      </p:sp>
+      <p:sp>
+        <p:nvSpPr>
+          <p:cNvPr id="55" name="Text 53"/>
+          <p:cNvSpPr/>
+          <p:nvPr/>
+        </p:nvSpPr>
+        <p:spPr>
+          <a:xfrm>
+            <a:off x="8791956" y="5833872"/>
+            <a:ext cx="1643634" cy="155448"/>
+          </a:xfrm>
+          <a:prstGeom prst="rect">
+            <a:avLst/>
+          </a:prstGeom>
+          <a:noFill/>
+          <a:ln/>
+        </p:spPr>
+        <p:txBody>
+          <a:bodyPr wrap="square" lIns="0" tIns="0" rIns="0" bIns="0" rtlCol="0" anchor="ctr"/>
+          <a:lstStyle/>
+          <a:p>
+            <a:pPr marL="0" indent="0">
+              <a:buNone/>
+            </a:pPr>
+            <a:r>
+              <a:rPr lang="en-US" sz="700" dirty="0">
+                <a:solidFill>
+                  <a:srgbClr val="5A6B75"/>
+                </a:solidFill>
+                <a:latin typeface="Consolas" pitchFamily="34" charset="0"/>
+                <a:ea typeface="Consolas" pitchFamily="34" charset="-122"/>
+                <a:cs typeface="Consolas" pitchFamily="34" charset="-120"/>
+              </a:rPr>
+              <a:t>Canada Mortgage Bond</a:t>
+            </a:r>
+            <a:endParaRPr lang="en-US" sz="700" dirty="0"/>
+          </a:p>
+        </p:txBody>
+      </p:sp>
+      <p:sp>
+        <p:nvSpPr>
+          <p:cNvPr id="56" name="Shape 54"/>
+          <p:cNvSpPr/>
+          <p:nvPr/>
+        </p:nvSpPr>
+        <p:spPr>
+          <a:xfrm>
+            <a:off x="8718804" y="3698748"/>
+            <a:ext cx="2028596" cy="570586"/>
+          </a:xfrm>
+          <a:prstGeom prst="roundRect">
+            <a:avLst>
+              <a:gd name="adj" fmla="val 8013"/>
+            </a:avLst>
+          </a:prstGeom>
+          <a:solidFill>
+            <a:srgbClr val="EEF1F2"/>
+          </a:solidFill>
+          <a:ln w="15240">
+            <a:solidFill>
+              <a:srgbClr val="5A6B75"/>
+            </a:solidFill>
+            <a:prstDash val="dash"/>
+          </a:ln>
+        </p:spPr>
+        <p:txBody>
+          <a:bodyPr/>
+          <a:lstStyle/>
+          <a:p>
+            <a:endParaRPr lang="en-US"/>
+          </a:p>
+        </p:txBody>
+      </p:sp>
+      <p:sp>
+        <p:nvSpPr>
+          <p:cNvPr id="57" name="Text 55"/>
+          <p:cNvSpPr/>
+          <p:nvPr/>
+        </p:nvSpPr>
+        <p:spPr>
+          <a:xfrm>
+            <a:off x="8791956" y="3726180"/>
+            <a:ext cx="1882292" cy="146304"/>
+          </a:xfrm>
+          <a:prstGeom prst="rect">
+            <a:avLst/>
+          </a:prstGeom>
+          <a:noFill/>
+          <a:ln/>
+        </p:spPr>
+        <p:txBody>
+          <a:bodyPr wrap="square" lIns="0" tIns="0" rIns="0" bIns="0" rtlCol="0" anchor="ctr"/>
+          <a:lstStyle/>
+          <a:p>
+            <a:pPr marL="0" indent="0">
+              <a:buNone/>
+            </a:pPr>
+            <a:r>
+              <a:rPr lang="en-US" sz="650" b="1" kern="0" spc="100" dirty="0">
+                <a:solidFill>
+                  <a:srgbClr val="5A6B75"/>
+                </a:solidFill>
+                <a:latin typeface="Consolas" pitchFamily="34" charset="0"/>
+                <a:ea typeface="Consolas" pitchFamily="34" charset="-122"/>
+                <a:cs typeface="Consolas" pitchFamily="34" charset="-120"/>
+              </a:rPr>
+              <a:t>DERIVED — NEVER STORED</a:t>
+            </a:r>
+            <a:endParaRPr lang="en-US" sz="650" dirty="0"/>
+          </a:p>
+        </p:txBody>
+      </p:sp>
+      <p:sp>
+        <p:nvSpPr>
+          <p:cNvPr id="58" name="Text 56"/>
+          <p:cNvSpPr/>
+          <p:nvPr/>
+        </p:nvSpPr>
+        <p:spPr>
+          <a:xfrm>
+            <a:off x="8791956" y="3854196"/>
+            <a:ext cx="1882292" cy="201168"/>
+          </a:xfrm>
+          <a:prstGeom prst="rect">
+            <a:avLst/>
+          </a:prstGeom>
+          <a:noFill/>
+          <a:ln/>
+        </p:spPr>
+        <p:txBody>
+          <a:bodyPr wrap="square" lIns="0" tIns="0" rIns="0" bIns="0" rtlCol="0" anchor="ctr"/>
+          <a:lstStyle/>
+          <a:p>
+            <a:pPr marL="0" indent="0">
+              <a:buNone/>
+            </a:pPr>
+            <a:r>
+              <a:rPr lang="en-US" sz="1100" b="1" dirty="0">
+                <a:solidFill>
+                  <a:srgbClr val="1C2830"/>
+                </a:solidFill>
+                <a:latin typeface="Georgia" pitchFamily="34" charset="0"/>
+                <a:ea typeface="Georgia" pitchFamily="34" charset="-122"/>
+                <a:cs typeface="Georgia" pitchFamily="34" charset="-120"/>
+              </a:rPr>
+              <a:t>Collateral Position</a:t>
+            </a:r>
+            <a:endParaRPr lang="en-US" sz="1100" dirty="0"/>
+          </a:p>
+        </p:txBody>
+      </p:sp>
+      <p:sp>
+        <p:nvSpPr>
+          <p:cNvPr id="59" name="Text 57"/>
+          <p:cNvSpPr/>
+          <p:nvPr/>
+        </p:nvSpPr>
+        <p:spPr>
+          <a:xfrm>
+            <a:off x="8791956" y="4086454"/>
+            <a:ext cx="1882292" cy="155448"/>
+          </a:xfrm>
+          <a:prstGeom prst="rect">
+            <a:avLst/>
+          </a:prstGeom>
+          <a:noFill/>
+          <a:ln/>
+        </p:spPr>
+        <p:txBody>
+          <a:bodyPr wrap="square" lIns="0" tIns="0" rIns="0" bIns="0" rtlCol="0" anchor="ctr"/>
+          <a:lstStyle/>
+          <a:p>
+            <a:pPr marL="0" indent="0">
+              <a:buNone/>
+            </a:pPr>
+            <a:r>
+              <a:rPr lang="en-US" sz="700" dirty="0">
+                <a:solidFill>
+                  <a:srgbClr val="5A6B75"/>
+                </a:solidFill>
+                <a:latin typeface="Consolas" pitchFamily="34" charset="0"/>
+                <a:ea typeface="Consolas" pitchFamily="34" charset="-122"/>
+                <a:cs typeface="Consolas" pitchFamily="34" charset="-120"/>
+              </a:rPr>
+              <a:t>Σ mvts · $0 → $13.59M</a:t>
+            </a:r>
+            <a:endParaRPr lang="en-US" sz="700" dirty="0"/>
+          </a:p>
+        </p:txBody>
+      </p:sp>
+      <p:sp>
+        <p:nvSpPr>
+          <p:cNvPr id="60" name="Shape 58"/>
+          <p:cNvSpPr/>
+          <p:nvPr/>
+        </p:nvSpPr>
+        <p:spPr>
+          <a:xfrm>
+            <a:off x="8146024" y="1291590"/>
+            <a:ext cx="3579876" cy="1337310"/>
+          </a:xfrm>
+          <a:prstGeom prst="roundRect">
+            <a:avLst>
+              <a:gd name="adj" fmla="val 4103"/>
+            </a:avLst>
+          </a:prstGeom>
+          <a:solidFill>
+            <a:srgbClr val="FDFBF3"/>
+          </a:solidFill>
+          <a:ln w="15240">
+            <a:solidFill>
+              <a:srgbClr val="8A6A2F"/>
+            </a:solidFill>
+            <a:prstDash val="solid"/>
+          </a:ln>
+        </p:spPr>
+        <p:txBody>
+          <a:bodyPr/>
+          <a:lstStyle/>
+          <a:p>
+            <a:endParaRPr lang="en-US"/>
+          </a:p>
+        </p:txBody>
+      </p:sp>
+      <p:sp>
+        <p:nvSpPr>
+          <p:cNvPr id="61" name="Text 59"/>
+          <p:cNvSpPr/>
+          <p:nvPr/>
+        </p:nvSpPr>
+        <p:spPr>
+          <a:xfrm>
+            <a:off x="8219176" y="1319022"/>
+            <a:ext cx="3433572" cy="182880"/>
+          </a:xfrm>
+          <a:prstGeom prst="rect">
+            <a:avLst/>
+          </a:prstGeom>
+          <a:noFill/>
+          <a:ln/>
+        </p:spPr>
+        <p:txBody>
+          <a:bodyPr wrap="square" lIns="0" tIns="0" rIns="0" bIns="0" rtlCol="0" anchor="ctr"/>
+          <a:lstStyle/>
+          <a:p>
+            <a:pPr marL="0" indent="0">
+              <a:buNone/>
+            </a:pPr>
+            <a:r>
+              <a:rPr lang="en-US" sz="700" b="1" dirty="0">
+                <a:solidFill>
+                  <a:srgbClr val="8A6A2F"/>
+                </a:solidFill>
+                <a:latin typeface="Consolas" pitchFamily="34" charset="0"/>
+                <a:ea typeface="Consolas" pitchFamily="34" charset="-122"/>
+                <a:cs typeface="Consolas" pitchFamily="34" charset="-120"/>
+              </a:rPr>
+              <a:t>LEGAL_AGREEMENT — THE FOUR KINDS (every agreement is exactly one)</a:t>
+            </a:r>
+            <a:endParaRPr lang="en-US" sz="700" dirty="0"/>
+          </a:p>
+        </p:txBody>
+      </p:sp>
+      <p:sp>
+        <p:nvSpPr>
+          <p:cNvPr id="62" name="Shape 60"/>
+          <p:cNvSpPr/>
+          <p:nvPr/>
+        </p:nvSpPr>
+        <p:spPr>
+          <a:xfrm>
+            <a:off x="8289219" y="1576883"/>
+            <a:ext cx="1646743" cy="303124"/>
+          </a:xfrm>
+          <a:prstGeom prst="roundRect">
+            <a:avLst>
+              <a:gd name="adj" fmla="val 12066"/>
+            </a:avLst>
+          </a:prstGeom>
+          <a:solidFill>
+            <a:srgbClr val="F4EDDD"/>
+          </a:solidFill>
+          <a:ln w="20320">
+            <a:solidFill>
+              <a:srgbClr val="8A6A2F"/>
+            </a:solidFill>
+            <a:prstDash val="solid"/>
+          </a:ln>
+        </p:spPr>
+        <p:txBody>
+          <a:bodyPr/>
+          <a:lstStyle/>
+          <a:p>
+            <a:endParaRPr lang="en-US"/>
+          </a:p>
+        </p:txBody>
+      </p:sp>
+      <p:sp>
+        <p:nvSpPr>
+          <p:cNvPr id="63" name="Text 61"/>
+          <p:cNvSpPr/>
+          <p:nvPr/>
+        </p:nvSpPr>
+        <p:spPr>
+          <a:xfrm>
+            <a:off x="8289219" y="1576883"/>
+            <a:ext cx="1646743" cy="303124"/>
+          </a:xfrm>
+          <a:prstGeom prst="rect">
+            <a:avLst/>
+          </a:prstGeom>
+          <a:noFill/>
+          <a:ln/>
+        </p:spPr>
+        <p:txBody>
+          <a:bodyPr wrap="square" lIns="0" tIns="0" rIns="0" bIns="0" rtlCol="0" anchor="ctr"/>
+          <a:lstStyle/>
+          <a:p>
+            <a:pPr marL="0" indent="0" algn="ctr">
+              <a:buNone/>
+            </a:pPr>
+            <a:r>
+              <a:rPr lang="en-US" sz="900" b="1" dirty="0">
+                <a:solidFill>
+                  <a:srgbClr val="1C2830"/>
+                </a:solidFill>
+                <a:latin typeface="Calibri" pitchFamily="34" charset="0"/>
+                <a:ea typeface="Calibri" pitchFamily="34" charset="-122"/>
+                <a:cs typeface="Calibri" pitchFamily="34" charset="-120"/>
+              </a:rPr>
+              <a:t>CSA  (this example)</a:t>
+            </a:r>
+            <a:endParaRPr lang="en-US" sz="900" dirty="0"/>
+          </a:p>
+        </p:txBody>
+      </p:sp>
+      <p:sp>
+        <p:nvSpPr>
+          <p:cNvPr id="64" name="Shape 62"/>
+          <p:cNvSpPr/>
+          <p:nvPr/>
+        </p:nvSpPr>
+        <p:spPr>
+          <a:xfrm>
+            <a:off x="10031425" y="1576883"/>
+            <a:ext cx="1646743" cy="303124"/>
+          </a:xfrm>
+          <a:prstGeom prst="roundRect">
+            <a:avLst>
+              <a:gd name="adj" fmla="val 12066"/>
+            </a:avLst>
+          </a:prstGeom>
+          <a:solidFill>
+            <a:srgbClr val="FFFFFF"/>
+          </a:solidFill>
+          <a:ln w="11430">
+            <a:solidFill>
+              <a:srgbClr val="8A6A2F"/>
+            </a:solidFill>
+            <a:prstDash val="solid"/>
+          </a:ln>
+        </p:spPr>
+        <p:txBody>
+          <a:bodyPr/>
+          <a:lstStyle/>
+          <a:p>
+            <a:endParaRPr lang="en-US"/>
+          </a:p>
+        </p:txBody>
+      </p:sp>
+      <p:sp>
+        <p:nvSpPr>
+          <p:cNvPr id="65" name="Text 63"/>
+          <p:cNvSpPr/>
+          <p:nvPr/>
+        </p:nvSpPr>
+        <p:spPr>
+          <a:xfrm>
+            <a:off x="10031425" y="1576883"/>
+            <a:ext cx="1646743" cy="303124"/>
+          </a:xfrm>
+          <a:prstGeom prst="rect">
+            <a:avLst/>
+          </a:prstGeom>
+          <a:noFill/>
+          <a:ln/>
+        </p:spPr>
+        <p:txBody>
+          <a:bodyPr wrap="square" lIns="0" tIns="0" rIns="0" bIns="0" rtlCol="0" anchor="ctr"/>
+          <a:lstStyle/>
+          <a:p>
+            <a:pPr marL="0" indent="0" algn="ctr">
+              <a:buNone/>
+            </a:pPr>
+            <a:r>
+              <a:rPr lang="en-US" sz="900" dirty="0">
+                <a:solidFill>
+                  <a:srgbClr val="1C2830"/>
+                </a:solidFill>
+                <a:latin typeface="Calibri" pitchFamily="34" charset="0"/>
+                <a:ea typeface="Calibri" pitchFamily="34" charset="-122"/>
+                <a:cs typeface="Calibri" pitchFamily="34" charset="-120"/>
+              </a:rPr>
+              <a:t>GMRA — repo</a:t>
+            </a:r>
+            <a:endParaRPr lang="en-US" sz="900" dirty="0"/>
+          </a:p>
+        </p:txBody>
+      </p:sp>
+      <p:sp>
+        <p:nvSpPr>
+          <p:cNvPr id="66" name="Shape 64"/>
+          <p:cNvSpPr/>
+          <p:nvPr/>
+        </p:nvSpPr>
+        <p:spPr>
+          <a:xfrm>
+            <a:off x="8289219" y="1986991"/>
+            <a:ext cx="1646743" cy="303124"/>
+          </a:xfrm>
+          <a:prstGeom prst="roundRect">
+            <a:avLst>
+              <a:gd name="adj" fmla="val 12066"/>
+            </a:avLst>
+          </a:prstGeom>
+          <a:solidFill>
+            <a:srgbClr val="FFFFFF"/>
+          </a:solidFill>
+          <a:ln w="11430">
+            <a:solidFill>
+              <a:srgbClr val="8A6A2F"/>
+            </a:solidFill>
+            <a:prstDash val="solid"/>
+          </a:ln>
+        </p:spPr>
+        <p:txBody>
+          <a:bodyPr/>
+          <a:lstStyle/>
+          <a:p>
+            <a:endParaRPr lang="en-US"/>
+          </a:p>
+        </p:txBody>
+      </p:sp>
+      <p:sp>
+        <p:nvSpPr>
+          <p:cNvPr id="67" name="Text 65"/>
+          <p:cNvSpPr/>
+          <p:nvPr/>
+        </p:nvSpPr>
+        <p:spPr>
+          <a:xfrm>
+            <a:off x="8289219" y="1986991"/>
+            <a:ext cx="1646743" cy="303124"/>
+          </a:xfrm>
+          <a:prstGeom prst="rect">
+            <a:avLst/>
+          </a:prstGeom>
+          <a:noFill/>
+          <a:ln/>
+        </p:spPr>
+        <p:txBody>
+          <a:bodyPr wrap="square" lIns="0" tIns="0" rIns="0" bIns="0" rtlCol="0" anchor="ctr"/>
+          <a:lstStyle/>
+          <a:p>
+            <a:pPr marL="0" indent="0" algn="ctr">
+              <a:buNone/>
+            </a:pPr>
+            <a:r>
+              <a:rPr lang="en-US" sz="900" dirty="0">
+                <a:solidFill>
+                  <a:srgbClr val="1C2830"/>
+                </a:solidFill>
+                <a:latin typeface="Calibri" pitchFamily="34" charset="0"/>
+                <a:ea typeface="Calibri" pitchFamily="34" charset="-122"/>
+                <a:cs typeface="Calibri" pitchFamily="34" charset="-120"/>
+              </a:rPr>
+              <a:t>GMSLA — sec lending</a:t>
+            </a:r>
+            <a:endParaRPr lang="en-US" sz="900" dirty="0"/>
+          </a:p>
+        </p:txBody>
+      </p:sp>
+      <p:sp>
+        <p:nvSpPr>
+          <p:cNvPr id="68" name="Shape 66"/>
+          <p:cNvSpPr/>
+          <p:nvPr/>
+        </p:nvSpPr>
+        <p:spPr>
+          <a:xfrm>
+            <a:off x="10031425" y="1986991"/>
+            <a:ext cx="1646743" cy="303124"/>
+          </a:xfrm>
+          <a:prstGeom prst="roundRect">
+            <a:avLst>
+              <a:gd name="adj" fmla="val 12066"/>
+            </a:avLst>
+          </a:prstGeom>
+          <a:solidFill>
+            <a:srgbClr val="FFFFFF"/>
+          </a:solidFill>
+          <a:ln w="11430">
+            <a:solidFill>
+              <a:srgbClr val="8A6A2F"/>
+            </a:solidFill>
+            <a:prstDash val="solid"/>
+          </a:ln>
+        </p:spPr>
+        <p:txBody>
+          <a:bodyPr/>
+          <a:lstStyle/>
+          <a:p>
+            <a:endParaRPr lang="en-US"/>
+          </a:p>
+        </p:txBody>
+      </p:sp>
+      <p:sp>
+        <p:nvSpPr>
+          <p:cNvPr id="69" name="Text 67"/>
+          <p:cNvSpPr/>
+          <p:nvPr/>
+        </p:nvSpPr>
+        <p:spPr>
+          <a:xfrm>
+            <a:off x="10031425" y="1986991"/>
+            <a:ext cx="1646743" cy="303124"/>
+          </a:xfrm>
+          <a:prstGeom prst="rect">
+            <a:avLst/>
+          </a:prstGeom>
+          <a:noFill/>
+          <a:ln/>
+        </p:spPr>
+        <p:txBody>
+          <a:bodyPr wrap="square" lIns="0" tIns="0" rIns="0" bIns="0" rtlCol="0" anchor="ctr"/>
+          <a:lstStyle/>
+          <a:p>
+            <a:pPr marL="0" indent="0" algn="ctr">
+              <a:buNone/>
+            </a:pPr>
+            <a:r>
+              <a:rPr lang="en-US" sz="900" dirty="0">
+                <a:solidFill>
+                  <a:srgbClr val="1C2830"/>
+                </a:solidFill>
+                <a:latin typeface="Calibri" pitchFamily="34" charset="0"/>
+                <a:ea typeface="Calibri" pitchFamily="34" charset="-122"/>
+                <a:cs typeface="Calibri" pitchFamily="34" charset="-120"/>
+              </a:rPr>
+              <a:t>PBA — prime</a:t>
+            </a:r>
+            <a:endParaRPr lang="en-US" sz="900" dirty="0"/>
+          </a:p>
+        </p:txBody>
+      </p:sp>
+      <p:sp>
+        <p:nvSpPr>
+          <p:cNvPr id="70" name="Shape 68"/>
+          <p:cNvSpPr/>
+          <p:nvPr/>
+        </p:nvSpPr>
+        <p:spPr>
+          <a:xfrm flipV="1">
+            <a:off x="5258257" y="2004822"/>
+            <a:ext cx="2887767" cy="534924"/>
+          </a:xfrm>
+          <a:prstGeom prst="line">
+            <a:avLst/>
+          </a:prstGeom>
+          <a:noFill/>
+          <a:ln w="15875">
+            <a:solidFill>
+              <a:srgbClr val="5A6B75"/>
+            </a:solidFill>
+            <a:prstDash val="dash"/>
+            <a:tailEnd type="triangle"/>
+          </a:ln>
+        </p:spPr>
+        <p:txBody>
+          <a:bodyPr/>
+          <a:lstStyle/>
+          <a:p>
+            <a:endParaRPr lang="en-US"/>
+          </a:p>
+        </p:txBody>
+      </p:sp>
+      <p:sp>
+        <p:nvSpPr>
+          <p:cNvPr id="71" name="Text 69"/>
+          <p:cNvSpPr/>
+          <p:nvPr/>
+        </p:nvSpPr>
+        <p:spPr>
+          <a:xfrm>
+            <a:off x="6391885" y="2165299"/>
+            <a:ext cx="1371600" cy="164592"/>
+          </a:xfrm>
+          <a:prstGeom prst="rect">
+            <a:avLst/>
+          </a:prstGeom>
+          <a:noFill/>
+          <a:ln/>
+        </p:spPr>
+        <p:txBody>
+          <a:bodyPr wrap="square" lIns="0" tIns="0" rIns="0" bIns="0" rtlCol="0" anchor="ctr"/>
+          <a:lstStyle/>
+          <a:p>
+            <a:pPr marL="0" indent="0">
+              <a:buNone/>
+            </a:pPr>
+            <a:r>
+              <a:rPr lang="en-US" sz="750" b="1" dirty="0">
+                <a:solidFill>
+                  <a:srgbClr val="6B6353"/>
+                </a:solidFill>
+                <a:latin typeface="Consolas" pitchFamily="34" charset="0"/>
+                <a:ea typeface="Consolas" pitchFamily="34" charset="-122"/>
+                <a:cs typeface="Consolas" pitchFamily="34" charset="-120"/>
+              </a:rPr>
+              <a:t>is of kind</a:t>
+            </a:r>
+            <a:endParaRPr lang="en-US" sz="750" dirty="0"/>
+          </a:p>
+        </p:txBody>
+      </p:sp>
+      <p:sp>
+        <p:nvSpPr>
+          <p:cNvPr id="72" name="Shape 70"/>
+          <p:cNvSpPr/>
+          <p:nvPr/>
+        </p:nvSpPr>
+        <p:spPr>
+          <a:xfrm flipV="1">
+            <a:off x="4303624" y="2022653"/>
+            <a:ext cx="0" cy="338785"/>
+          </a:xfrm>
+          <a:prstGeom prst="line">
+            <a:avLst/>
+          </a:prstGeom>
+          <a:noFill/>
+          <a:ln w="15875">
+            <a:solidFill>
+              <a:srgbClr val="8B8272"/>
+            </a:solidFill>
+            <a:prstDash val="solid"/>
+            <a:tailEnd type="triangle"/>
+          </a:ln>
+        </p:spPr>
+        <p:txBody>
+          <a:bodyPr/>
+          <a:lstStyle/>
+          <a:p>
+            <a:endParaRPr lang="en-US"/>
+          </a:p>
+        </p:txBody>
+      </p:sp>
+      <p:sp>
+        <p:nvSpPr>
+          <p:cNvPr id="73" name="Text 71"/>
+          <p:cNvSpPr/>
+          <p:nvPr/>
+        </p:nvSpPr>
+        <p:spPr>
+          <a:xfrm>
+            <a:off x="4375221" y="2147468"/>
+            <a:ext cx="1371600" cy="164592"/>
+          </a:xfrm>
+          <a:prstGeom prst="rect">
+            <a:avLst/>
+          </a:prstGeom>
+          <a:noFill/>
+          <a:ln/>
+        </p:spPr>
+        <p:txBody>
+          <a:bodyPr wrap="square" lIns="0" tIns="0" rIns="0" bIns="0" rtlCol="0" anchor="ctr"/>
+          <a:lstStyle/>
+          <a:p>
+            <a:pPr marL="0" indent="0">
+              <a:buNone/>
+            </a:pPr>
+            <a:r>
+              <a:rPr lang="en-US" sz="750" b="1" dirty="0">
+                <a:solidFill>
+                  <a:srgbClr val="6B6353"/>
+                </a:solidFill>
+                <a:latin typeface="Consolas" pitchFamily="34" charset="0"/>
+                <a:ea typeface="Consolas" pitchFamily="34" charset="-122"/>
+                <a:cs typeface="Consolas" pitchFamily="34" charset="-120"/>
+              </a:rPr>
+              <a:t>supports</a:t>
+            </a:r>
+            <a:endParaRPr lang="en-US" sz="750" dirty="0"/>
+          </a:p>
+        </p:txBody>
+      </p:sp>
+      <p:sp>
+        <p:nvSpPr>
+          <p:cNvPr id="74" name="Shape 72"/>
+          <p:cNvSpPr/>
+          <p:nvPr/>
+        </p:nvSpPr>
+        <p:spPr>
+          <a:xfrm flipH="1" flipV="1">
+            <a:off x="2633015" y="1844345"/>
+            <a:ext cx="715975" cy="677570"/>
+          </a:xfrm>
+          <a:prstGeom prst="line">
+            <a:avLst/>
+          </a:prstGeom>
+          <a:noFill/>
+          <a:ln w="15875">
+            <a:solidFill>
+              <a:srgbClr val="8B8272"/>
+            </a:solidFill>
+            <a:prstDash val="solid"/>
+            <a:tailEnd type="triangle"/>
+          </a:ln>
+        </p:spPr>
+        <p:txBody>
+          <a:bodyPr/>
+          <a:lstStyle/>
+          <a:p>
+            <a:endParaRPr lang="en-US"/>
+          </a:p>
+        </p:txBody>
+      </p:sp>
+      <p:sp>
+        <p:nvSpPr>
+          <p:cNvPr id="75" name="Text 73"/>
+          <p:cNvSpPr/>
+          <p:nvPr/>
+        </p:nvSpPr>
+        <p:spPr>
+          <a:xfrm>
+            <a:off x="2704612" y="2076145"/>
+            <a:ext cx="1371600" cy="164592"/>
+          </a:xfrm>
+          <a:prstGeom prst="rect">
+            <a:avLst/>
+          </a:prstGeom>
+          <a:noFill/>
+          <a:ln/>
+        </p:spPr>
+        <p:txBody>
+          <a:bodyPr wrap="square" lIns="0" tIns="0" rIns="0" bIns="0" rtlCol="0" anchor="ctr"/>
+          <a:lstStyle/>
+          <a:p>
+            <a:pPr marL="0" indent="0">
+              <a:buNone/>
+            </a:pPr>
+            <a:r>
+              <a:rPr lang="en-US" sz="750" b="1" dirty="0">
+                <a:solidFill>
+                  <a:srgbClr val="6B6353"/>
+                </a:solidFill>
+                <a:latin typeface="Consolas" pitchFamily="34" charset="0"/>
+                <a:ea typeface="Consolas" pitchFamily="34" charset="-122"/>
+                <a:cs typeface="Consolas" pitchFamily="34" charset="-120"/>
+              </a:rPr>
+              <a:t>between</a:t>
+            </a:r>
+            <a:endParaRPr lang="en-US" sz="750" dirty="0"/>
+          </a:p>
+        </p:txBody>
+      </p:sp>
+      <p:sp>
+        <p:nvSpPr>
+          <p:cNvPr id="76" name="Shape 74"/>
+          <p:cNvSpPr/>
+          <p:nvPr/>
+        </p:nvSpPr>
+        <p:spPr>
+          <a:xfrm flipH="1" flipV="1">
+            <a:off x="2633015" y="2539746"/>
+            <a:ext cx="715975" cy="196139"/>
+          </a:xfrm>
+          <a:prstGeom prst="line">
+            <a:avLst/>
+          </a:prstGeom>
+          <a:noFill/>
+          <a:ln w="15875">
+            <a:solidFill>
+              <a:srgbClr val="8B8272"/>
+            </a:solidFill>
+            <a:prstDash val="solid"/>
+            <a:tailEnd type="triangle"/>
+          </a:ln>
+        </p:spPr>
+        <p:txBody>
+          <a:bodyPr/>
+          <a:lstStyle/>
+          <a:p>
+            <a:endParaRPr lang="en-US"/>
+          </a:p>
+        </p:txBody>
+      </p:sp>
+      <p:sp>
+        <p:nvSpPr>
+          <p:cNvPr id="77" name="Text 75"/>
+          <p:cNvSpPr/>
+          <p:nvPr/>
+        </p:nvSpPr>
+        <p:spPr>
+          <a:xfrm>
+            <a:off x="2812009" y="2682392"/>
+            <a:ext cx="1371600" cy="164592"/>
+          </a:xfrm>
+          <a:prstGeom prst="rect">
+            <a:avLst/>
+          </a:prstGeom>
+          <a:noFill/>
+          <a:ln/>
+        </p:spPr>
+        <p:txBody>
+          <a:bodyPr wrap="square" lIns="0" tIns="0" rIns="0" bIns="0" rtlCol="0" anchor="ctr"/>
+          <a:lstStyle/>
+          <a:p>
+            <a:pPr marL="0" indent="0">
+              <a:buNone/>
+            </a:pPr>
+            <a:r>
+              <a:rPr lang="en-US" sz="750" b="1" dirty="0">
+                <a:solidFill>
+                  <a:srgbClr val="6B6353"/>
+                </a:solidFill>
+                <a:latin typeface="Consolas" pitchFamily="34" charset="0"/>
+                <a:ea typeface="Consolas" pitchFamily="34" charset="-122"/>
+                <a:cs typeface="Consolas" pitchFamily="34" charset="-120"/>
+              </a:rPr>
+              <a:t>and</a:t>
+            </a:r>
+            <a:endParaRPr lang="en-US" sz="750" dirty="0"/>
+          </a:p>
+        </p:txBody>
+      </p:sp>
+      <p:sp>
+        <p:nvSpPr>
+          <p:cNvPr id="78" name="Shape 76"/>
+          <p:cNvSpPr/>
+          <p:nvPr/>
+        </p:nvSpPr>
+        <p:spPr>
+          <a:xfrm flipV="1">
+            <a:off x="1797710" y="2932024"/>
+            <a:ext cx="1694475" cy="766724"/>
+          </a:xfrm>
+          <a:prstGeom prst="line">
+            <a:avLst/>
+          </a:prstGeom>
+          <a:noFill/>
+          <a:ln w="15875">
+            <a:solidFill>
+              <a:srgbClr val="8B8272"/>
+            </a:solidFill>
+            <a:prstDash val="solid"/>
+            <a:tailEnd type="triangle"/>
+          </a:ln>
+        </p:spPr>
+        <p:txBody>
+          <a:bodyPr/>
+          <a:lstStyle/>
+          <a:p>
+            <a:endParaRPr lang="en-US"/>
+          </a:p>
+        </p:txBody>
+      </p:sp>
+      <p:sp>
+        <p:nvSpPr>
+          <p:cNvPr id="79" name="Text 77"/>
+          <p:cNvSpPr/>
+          <p:nvPr/>
+        </p:nvSpPr>
+        <p:spPr>
+          <a:xfrm>
+            <a:off x="2155698" y="3270809"/>
+            <a:ext cx="1371600" cy="164592"/>
+          </a:xfrm>
+          <a:prstGeom prst="rect">
+            <a:avLst/>
+          </a:prstGeom>
+          <a:noFill/>
+          <a:ln/>
+        </p:spPr>
+        <p:txBody>
+          <a:bodyPr wrap="square" lIns="0" tIns="0" rIns="0" bIns="0" rtlCol="0" anchor="ctr"/>
+          <a:lstStyle/>
+          <a:p>
+            <a:pPr marL="0" indent="0">
+              <a:buNone/>
+            </a:pPr>
+            <a:r>
+              <a:rPr lang="en-US" sz="750" b="1" dirty="0">
+                <a:solidFill>
+                  <a:srgbClr val="6B6353"/>
+                </a:solidFill>
+                <a:latin typeface="Consolas" pitchFamily="34" charset="0"/>
+                <a:ea typeface="Consolas" pitchFamily="34" charset="-122"/>
+                <a:cs typeface="Consolas" pitchFamily="34" charset="-120"/>
+              </a:rPr>
+              <a:t>part of</a:t>
+            </a:r>
+            <a:endParaRPr lang="en-US" sz="750" dirty="0"/>
+          </a:p>
+        </p:txBody>
+      </p:sp>
+      <p:sp>
+        <p:nvSpPr>
+          <p:cNvPr id="80" name="Shape 78"/>
+          <p:cNvSpPr/>
+          <p:nvPr/>
+        </p:nvSpPr>
+        <p:spPr>
+          <a:xfrm flipV="1">
+            <a:off x="1702247" y="2967685"/>
+            <a:ext cx="1861536" cy="1551280"/>
+          </a:xfrm>
+          <a:prstGeom prst="line">
+            <a:avLst/>
+          </a:prstGeom>
+          <a:noFill/>
+          <a:ln w="15875">
+            <a:solidFill>
+              <a:srgbClr val="8B8272"/>
+            </a:solidFill>
+            <a:prstDash val="solid"/>
+            <a:tailEnd type="triangle"/>
+          </a:ln>
+        </p:spPr>
+        <p:txBody>
+          <a:bodyPr/>
+          <a:lstStyle/>
+          <a:p>
+            <a:endParaRPr lang="en-US"/>
+          </a:p>
+        </p:txBody>
+      </p:sp>
+      <p:sp>
+        <p:nvSpPr>
+          <p:cNvPr id="81" name="Text 79"/>
+          <p:cNvSpPr/>
+          <p:nvPr/>
+        </p:nvSpPr>
+        <p:spPr>
+          <a:xfrm>
+            <a:off x="2334692" y="3859225"/>
+            <a:ext cx="1371600" cy="164592"/>
+          </a:xfrm>
+          <a:prstGeom prst="rect">
+            <a:avLst/>
+          </a:prstGeom>
+          <a:noFill/>
+          <a:ln/>
+        </p:spPr>
+        <p:txBody>
+          <a:bodyPr wrap="square" lIns="0" tIns="0" rIns="0" bIns="0" rtlCol="0" anchor="ctr"/>
+          <a:lstStyle/>
+          <a:p>
+            <a:pPr marL="0" indent="0">
+              <a:buNone/>
+            </a:pPr>
+            <a:r>
+              <a:rPr lang="en-US" sz="750" b="1" dirty="0">
+                <a:solidFill>
+                  <a:srgbClr val="6B6353"/>
+                </a:solidFill>
+                <a:latin typeface="Consolas" pitchFamily="34" charset="0"/>
+                <a:ea typeface="Consolas" pitchFamily="34" charset="-122"/>
+                <a:cs typeface="Consolas" pitchFamily="34" charset="-120"/>
+              </a:rPr>
+              <a:t>part of</a:t>
+            </a:r>
+            <a:endParaRPr lang="en-US" sz="750" dirty="0"/>
+          </a:p>
+        </p:txBody>
+      </p:sp>
+      <p:sp>
+        <p:nvSpPr>
+          <p:cNvPr id="82" name="Shape 80"/>
+          <p:cNvSpPr/>
+          <p:nvPr/>
+        </p:nvSpPr>
+        <p:spPr>
+          <a:xfrm flipV="1">
+            <a:off x="1654515" y="5107381"/>
+            <a:ext cx="0" cy="231800"/>
+          </a:xfrm>
+          <a:prstGeom prst="line">
+            <a:avLst/>
+          </a:prstGeom>
+          <a:noFill/>
+          <a:ln w="15875">
+            <a:solidFill>
+              <a:srgbClr val="8B8272"/>
+            </a:solidFill>
+            <a:prstDash val="solid"/>
+            <a:tailEnd type="triangle"/>
+          </a:ln>
+        </p:spPr>
+        <p:txBody>
+          <a:bodyPr/>
+          <a:lstStyle/>
+          <a:p>
+            <a:endParaRPr lang="en-US"/>
+          </a:p>
+        </p:txBody>
+      </p:sp>
+      <p:sp>
+        <p:nvSpPr>
+          <p:cNvPr id="83" name="Text 81"/>
+          <p:cNvSpPr/>
+          <p:nvPr/>
+        </p:nvSpPr>
+        <p:spPr>
+          <a:xfrm>
+            <a:off x="1726113" y="5160874"/>
+            <a:ext cx="1371600" cy="164592"/>
+          </a:xfrm>
+          <a:prstGeom prst="rect">
+            <a:avLst/>
+          </a:prstGeom>
+          <a:noFill/>
+          <a:ln/>
+        </p:spPr>
+        <p:txBody>
+          <a:bodyPr wrap="square" lIns="0" tIns="0" rIns="0" bIns="0" rtlCol="0" anchor="ctr"/>
+          <a:lstStyle/>
+          <a:p>
+            <a:pPr marL="0" indent="0">
+              <a:buNone/>
+            </a:pPr>
+            <a:r>
+              <a:rPr lang="en-US" sz="750" b="1" dirty="0">
+                <a:solidFill>
+                  <a:srgbClr val="6B6353"/>
+                </a:solidFill>
+                <a:latin typeface="Consolas" pitchFamily="34" charset="0"/>
+                <a:ea typeface="Consolas" pitchFamily="34" charset="-122"/>
+                <a:cs typeface="Consolas" pitchFamily="34" charset="-120"/>
+              </a:rPr>
+              <a:t>conditioned on</a:t>
+            </a:r>
+            <a:endParaRPr lang="en-US" sz="750" dirty="0"/>
+          </a:p>
+        </p:txBody>
+      </p:sp>
+      <p:sp>
+        <p:nvSpPr>
+          <p:cNvPr id="84" name="Shape 82"/>
+          <p:cNvSpPr/>
+          <p:nvPr/>
+        </p:nvSpPr>
+        <p:spPr>
+          <a:xfrm flipV="1">
+            <a:off x="4303624" y="2949854"/>
+            <a:ext cx="0" cy="748894"/>
+          </a:xfrm>
+          <a:prstGeom prst="line">
+            <a:avLst/>
+          </a:prstGeom>
+          <a:noFill/>
+          <a:ln w="15875">
+            <a:solidFill>
+              <a:srgbClr val="8B8272"/>
+            </a:solidFill>
+            <a:prstDash val="solid"/>
+            <a:tailEnd type="triangle"/>
+          </a:ln>
+        </p:spPr>
+        <p:txBody>
+          <a:bodyPr/>
+          <a:lstStyle/>
+          <a:p>
+            <a:endParaRPr lang="en-US"/>
+          </a:p>
+        </p:txBody>
+      </p:sp>
+      <p:sp>
+        <p:nvSpPr>
+          <p:cNvPr id="85" name="Text 83"/>
+          <p:cNvSpPr/>
+          <p:nvPr/>
+        </p:nvSpPr>
+        <p:spPr>
+          <a:xfrm>
+            <a:off x="4375221" y="3270809"/>
+            <a:ext cx="1371600" cy="164592"/>
+          </a:xfrm>
+          <a:prstGeom prst="rect">
+            <a:avLst/>
+          </a:prstGeom>
+          <a:noFill/>
+          <a:ln/>
+        </p:spPr>
+        <p:txBody>
+          <a:bodyPr wrap="square" lIns="0" tIns="0" rIns="0" bIns="0" rtlCol="0" anchor="ctr"/>
+          <a:lstStyle/>
+          <a:p>
+            <a:pPr marL="0" indent="0">
+              <a:buNone/>
+            </a:pPr>
+            <a:r>
+              <a:rPr lang="en-US" sz="750" b="1" dirty="0">
+                <a:solidFill>
+                  <a:srgbClr val="6B6353"/>
+                </a:solidFill>
+                <a:latin typeface="Consolas" pitchFamily="34" charset="0"/>
+                <a:ea typeface="Consolas" pitchFamily="34" charset="-122"/>
+                <a:cs typeface="Consolas" pitchFamily="34" charset="-120"/>
+              </a:rPr>
+              <a:t>defined by</a:t>
+            </a:r>
+            <a:endParaRPr lang="en-US" sz="750" dirty="0"/>
+          </a:p>
+        </p:txBody>
+      </p:sp>
+      <p:sp>
+        <p:nvSpPr>
+          <p:cNvPr id="86" name="Shape 84"/>
+          <p:cNvSpPr/>
+          <p:nvPr/>
+        </p:nvSpPr>
+        <p:spPr>
+          <a:xfrm flipV="1">
+            <a:off x="4303624" y="4287164"/>
+            <a:ext cx="0" cy="570586"/>
+          </a:xfrm>
+          <a:prstGeom prst="line">
+            <a:avLst/>
+          </a:prstGeom>
+          <a:noFill/>
+          <a:ln w="15875">
+            <a:solidFill>
+              <a:srgbClr val="8B8272"/>
+            </a:solidFill>
+            <a:prstDash val="solid"/>
+            <a:tailEnd type="triangle"/>
+          </a:ln>
+        </p:spPr>
+        <p:txBody>
+          <a:bodyPr/>
+          <a:lstStyle/>
+          <a:p>
+            <a:endParaRPr lang="en-US"/>
+          </a:p>
+        </p:txBody>
+      </p:sp>
+      <p:sp>
+        <p:nvSpPr>
+          <p:cNvPr id="87" name="Text 85"/>
+          <p:cNvSpPr/>
+          <p:nvPr/>
+        </p:nvSpPr>
+        <p:spPr>
+          <a:xfrm>
+            <a:off x="4375221" y="4536796"/>
+            <a:ext cx="1371600" cy="164592"/>
+          </a:xfrm>
+          <a:prstGeom prst="rect">
+            <a:avLst/>
+          </a:prstGeom>
+          <a:noFill/>
+          <a:ln/>
+        </p:spPr>
+        <p:txBody>
+          <a:bodyPr wrap="square" lIns="0" tIns="0" rIns="0" bIns="0" rtlCol="0" anchor="ctr"/>
+          <a:lstStyle/>
+          <a:p>
+            <a:pPr marL="0" indent="0">
+              <a:buNone/>
+            </a:pPr>
+            <a:r>
+              <a:rPr lang="en-US" sz="750" b="1" dirty="0">
+                <a:solidFill>
+                  <a:srgbClr val="6B6353"/>
+                </a:solidFill>
+                <a:latin typeface="Consolas" pitchFamily="34" charset="0"/>
+                <a:ea typeface="Consolas" pitchFamily="34" charset="-122"/>
+                <a:cs typeface="Consolas" pitchFamily="34" charset="-120"/>
+              </a:rPr>
+              <a:t>member of</a:t>
+            </a:r>
+            <a:endParaRPr lang="en-US" sz="750" dirty="0"/>
+          </a:p>
+        </p:txBody>
+      </p:sp>
+      <p:sp>
+        <p:nvSpPr>
+          <p:cNvPr id="88" name="Shape 86"/>
+          <p:cNvSpPr/>
+          <p:nvPr/>
+        </p:nvSpPr>
+        <p:spPr>
+          <a:xfrm flipH="1">
+            <a:off x="5282123" y="3948379"/>
+            <a:ext cx="692109" cy="0"/>
+          </a:xfrm>
+          <a:prstGeom prst="line">
+            <a:avLst/>
+          </a:prstGeom>
+          <a:noFill/>
+          <a:ln w="15875">
+            <a:solidFill>
+              <a:srgbClr val="8B8272"/>
+            </a:solidFill>
+            <a:prstDash val="solid"/>
+            <a:tailEnd type="triangle"/>
+          </a:ln>
+        </p:spPr>
+        <p:txBody>
+          <a:bodyPr/>
+          <a:lstStyle/>
+          <a:p>
+            <a:endParaRPr lang="en-US"/>
+          </a:p>
+        </p:txBody>
+      </p:sp>
+      <p:sp>
+        <p:nvSpPr>
+          <p:cNvPr id="89" name="Text 87"/>
+          <p:cNvSpPr/>
+          <p:nvPr/>
+        </p:nvSpPr>
+        <p:spPr>
+          <a:xfrm>
+            <a:off x="5473050" y="3805733"/>
+            <a:ext cx="1371600" cy="164592"/>
+          </a:xfrm>
+          <a:prstGeom prst="rect">
+            <a:avLst/>
+          </a:prstGeom>
+          <a:noFill/>
+          <a:ln/>
+        </p:spPr>
+        <p:txBody>
+          <a:bodyPr wrap="square" lIns="0" tIns="0" rIns="0" bIns="0" rtlCol="0" anchor="ctr"/>
+          <a:lstStyle/>
+          <a:p>
+            <a:pPr marL="0" indent="0">
+              <a:buNone/>
+            </a:pPr>
+            <a:r>
+              <a:rPr lang="en-US" sz="750" b="1" dirty="0">
+                <a:solidFill>
+                  <a:srgbClr val="6B6353"/>
+                </a:solidFill>
+                <a:latin typeface="Consolas" pitchFamily="34" charset="0"/>
+                <a:ea typeface="Consolas" pitchFamily="34" charset="-122"/>
+                <a:cs typeface="Consolas" pitchFamily="34" charset="-120"/>
+              </a:rPr>
+              <a:t>for</a:t>
+            </a:r>
+            <a:endParaRPr lang="en-US" sz="750" dirty="0"/>
+          </a:p>
+        </p:txBody>
+      </p:sp>
+      <p:sp>
+        <p:nvSpPr>
+          <p:cNvPr id="90" name="Shape 88"/>
+          <p:cNvSpPr/>
+          <p:nvPr/>
+        </p:nvSpPr>
+        <p:spPr>
+          <a:xfrm flipH="1">
+            <a:off x="5115062" y="2914193"/>
+            <a:ext cx="883036" cy="766724"/>
+          </a:xfrm>
+          <a:prstGeom prst="line">
+            <a:avLst/>
+          </a:prstGeom>
+          <a:noFill/>
+          <a:ln w="15875">
+            <a:solidFill>
+              <a:srgbClr val="8B8272"/>
+            </a:solidFill>
+            <a:prstDash val="solid"/>
+            <a:tailEnd type="triangle"/>
+          </a:ln>
+        </p:spPr>
+        <p:txBody>
+          <a:bodyPr/>
+          <a:lstStyle/>
+          <a:p>
+            <a:endParaRPr lang="en-US"/>
+          </a:p>
+        </p:txBody>
+      </p:sp>
+      <p:sp>
+        <p:nvSpPr>
+          <p:cNvPr id="91" name="Text 89"/>
+          <p:cNvSpPr/>
+          <p:nvPr/>
+        </p:nvSpPr>
+        <p:spPr>
+          <a:xfrm>
+            <a:off x="4971867" y="3163824"/>
+            <a:ext cx="1371600" cy="164592"/>
+          </a:xfrm>
+          <a:prstGeom prst="rect">
+            <a:avLst/>
+          </a:prstGeom>
+          <a:noFill/>
+          <a:ln/>
+        </p:spPr>
+        <p:txBody>
+          <a:bodyPr wrap="square" lIns="0" tIns="0" rIns="0" bIns="0" rtlCol="0" anchor="ctr"/>
+          <a:lstStyle/>
+          <a:p>
+            <a:pPr marL="0" indent="0">
+              <a:buNone/>
+            </a:pPr>
+            <a:r>
+              <a:rPr lang="en-US" sz="750" b="1" dirty="0">
+                <a:solidFill>
+                  <a:srgbClr val="6B6353"/>
+                </a:solidFill>
+                <a:latin typeface="Consolas" pitchFamily="34" charset="0"/>
+                <a:ea typeface="Consolas" pitchFamily="34" charset="-122"/>
+                <a:cs typeface="Consolas" pitchFamily="34" charset="-120"/>
+              </a:rPr>
+              <a:t>calculated for</a:t>
+            </a:r>
+            <a:endParaRPr lang="en-US" sz="750" dirty="0"/>
+          </a:p>
+        </p:txBody>
+      </p:sp>
+      <p:sp>
+        <p:nvSpPr>
+          <p:cNvPr id="92" name="Shape 90"/>
+          <p:cNvSpPr/>
+          <p:nvPr/>
+        </p:nvSpPr>
+        <p:spPr>
+          <a:xfrm>
+            <a:off x="6905000" y="3128162"/>
+            <a:ext cx="0" cy="552755"/>
+          </a:xfrm>
+          <a:prstGeom prst="line">
+            <a:avLst/>
+          </a:prstGeom>
+          <a:noFill/>
+          <a:ln w="15875">
+            <a:solidFill>
+              <a:srgbClr val="8B8272"/>
+            </a:solidFill>
+            <a:prstDash val="solid"/>
+            <a:tailEnd type="triangle"/>
+          </a:ln>
+        </p:spPr>
+        <p:txBody>
+          <a:bodyPr/>
+          <a:lstStyle/>
+          <a:p>
+            <a:endParaRPr lang="en-US"/>
+          </a:p>
+        </p:txBody>
+      </p:sp>
+      <p:sp>
+        <p:nvSpPr>
+          <p:cNvPr id="93" name="Text 91"/>
+          <p:cNvSpPr/>
+          <p:nvPr/>
+        </p:nvSpPr>
+        <p:spPr>
+          <a:xfrm>
+            <a:off x="6976598" y="3359963"/>
+            <a:ext cx="1371600" cy="164592"/>
+          </a:xfrm>
+          <a:prstGeom prst="rect">
+            <a:avLst/>
+          </a:prstGeom>
+          <a:noFill/>
+          <a:ln/>
+        </p:spPr>
+        <p:txBody>
+          <a:bodyPr wrap="square" lIns="0" tIns="0" rIns="0" bIns="0" rtlCol="0" anchor="ctr"/>
+          <a:lstStyle/>
+          <a:p>
+            <a:pPr marL="0" indent="0">
+              <a:buNone/>
+            </a:pPr>
+            <a:r>
+              <a:rPr lang="en-US" sz="750" b="1" dirty="0">
+                <a:solidFill>
+                  <a:srgbClr val="6B6353"/>
+                </a:solidFill>
+                <a:latin typeface="Consolas" pitchFamily="34" charset="0"/>
+                <a:ea typeface="Consolas" pitchFamily="34" charset="-122"/>
+                <a:cs typeface="Consolas" pitchFamily="34" charset="-120"/>
+              </a:rPr>
+              <a:t>based on</a:t>
+            </a:r>
+            <a:endParaRPr lang="en-US" sz="750" dirty="0"/>
+          </a:p>
+        </p:txBody>
+      </p:sp>
+      <p:sp>
+        <p:nvSpPr>
+          <p:cNvPr id="94" name="Shape 92"/>
+          <p:cNvSpPr/>
+          <p:nvPr/>
+        </p:nvSpPr>
+        <p:spPr>
+          <a:xfrm>
+            <a:off x="7859634" y="2860700"/>
+            <a:ext cx="1360353" cy="820217"/>
+          </a:xfrm>
+          <a:prstGeom prst="line">
+            <a:avLst/>
+          </a:prstGeom>
+          <a:noFill/>
+          <a:ln w="15875">
+            <a:solidFill>
+              <a:srgbClr val="8B8272"/>
+            </a:solidFill>
+            <a:prstDash val="solid"/>
+            <a:tailEnd type="triangle"/>
+          </a:ln>
+        </p:spPr>
+        <p:txBody>
+          <a:bodyPr/>
+          <a:lstStyle/>
+          <a:p>
+            <a:endParaRPr lang="en-US"/>
+          </a:p>
+        </p:txBody>
+      </p:sp>
+      <p:sp>
+        <p:nvSpPr>
+          <p:cNvPr id="95" name="Text 93"/>
+          <p:cNvSpPr/>
+          <p:nvPr/>
+        </p:nvSpPr>
+        <p:spPr>
+          <a:xfrm>
+            <a:off x="8289219" y="3092501"/>
+            <a:ext cx="1371600" cy="164592"/>
+          </a:xfrm>
+          <a:prstGeom prst="rect">
+            <a:avLst/>
+          </a:prstGeom>
+          <a:noFill/>
+          <a:ln/>
+        </p:spPr>
+        <p:txBody>
+          <a:bodyPr wrap="square" lIns="0" tIns="0" rIns="0" bIns="0" rtlCol="0" anchor="ctr"/>
+          <a:lstStyle/>
+          <a:p>
+            <a:pPr marL="0" indent="0">
+              <a:buNone/>
+            </a:pPr>
+            <a:r>
+              <a:rPr lang="en-US" sz="750" b="1" dirty="0">
+                <a:solidFill>
+                  <a:srgbClr val="6B6353"/>
+                </a:solidFill>
+                <a:latin typeface="Consolas" pitchFamily="34" charset="0"/>
+                <a:ea typeface="Consolas" pitchFamily="34" charset="-122"/>
+                <a:cs typeface="Consolas" pitchFamily="34" charset="-120"/>
+              </a:rPr>
+              <a:t>based on</a:t>
+            </a:r>
+            <a:endParaRPr lang="en-US" sz="750" dirty="0"/>
+          </a:p>
+        </p:txBody>
+      </p:sp>
+      <p:sp>
+        <p:nvSpPr>
+          <p:cNvPr id="96" name="Shape 94"/>
+          <p:cNvSpPr/>
+          <p:nvPr/>
+        </p:nvSpPr>
+        <p:spPr>
+          <a:xfrm flipV="1">
+            <a:off x="6905000" y="3128162"/>
+            <a:ext cx="0" cy="1711757"/>
+          </a:xfrm>
+          <a:prstGeom prst="line">
+            <a:avLst/>
+          </a:prstGeom>
+          <a:noFill/>
+          <a:ln w="15875">
+            <a:solidFill>
+              <a:srgbClr val="8B8272"/>
+            </a:solidFill>
+            <a:prstDash val="solid"/>
+            <a:tailEnd type="triangle"/>
+          </a:ln>
+        </p:spPr>
+        <p:txBody>
+          <a:bodyPr/>
+          <a:lstStyle/>
+          <a:p>
+            <a:endParaRPr lang="en-US"/>
+          </a:p>
+        </p:txBody>
+      </p:sp>
+      <p:sp>
+        <p:nvSpPr>
+          <p:cNvPr id="97" name="Text 95"/>
+          <p:cNvSpPr/>
+          <p:nvPr/>
+        </p:nvSpPr>
+        <p:spPr>
+          <a:xfrm>
+            <a:off x="6976598" y="4091026"/>
+            <a:ext cx="1371600" cy="164592"/>
+          </a:xfrm>
+          <a:prstGeom prst="rect">
+            <a:avLst/>
+          </a:prstGeom>
+          <a:noFill/>
+          <a:ln/>
+        </p:spPr>
+        <p:txBody>
+          <a:bodyPr wrap="square" lIns="0" tIns="0" rIns="0" bIns="0" rtlCol="0" anchor="ctr"/>
+          <a:lstStyle/>
+          <a:p>
+            <a:pPr marL="0" indent="0">
+              <a:buNone/>
+            </a:pPr>
+            <a:r>
+              <a:rPr lang="en-US" sz="750" b="1" dirty="0">
+                <a:solidFill>
+                  <a:srgbClr val="6B6353"/>
+                </a:solidFill>
+                <a:latin typeface="Consolas" pitchFamily="34" charset="0"/>
+                <a:ea typeface="Consolas" pitchFamily="34" charset="-122"/>
+                <a:cs typeface="Consolas" pitchFamily="34" charset="-120"/>
+              </a:rPr>
+              <a:t>satisfies</a:t>
+            </a:r>
+            <a:endParaRPr lang="en-US" sz="750" dirty="0"/>
+          </a:p>
+        </p:txBody>
+      </p:sp>
+      <p:sp>
+        <p:nvSpPr>
+          <p:cNvPr id="98" name="Shape 96"/>
+          <p:cNvSpPr/>
+          <p:nvPr/>
+        </p:nvSpPr>
+        <p:spPr>
+          <a:xfrm flipH="1" flipV="1">
+            <a:off x="4566148" y="2949854"/>
+            <a:ext cx="1408085" cy="2104034"/>
+          </a:xfrm>
+          <a:prstGeom prst="line">
+            <a:avLst/>
+          </a:prstGeom>
+          <a:noFill/>
+          <a:ln w="15875">
+            <a:solidFill>
+              <a:srgbClr val="8B8272"/>
+            </a:solidFill>
+            <a:prstDash val="solid"/>
+            <a:tailEnd type="triangle"/>
+          </a:ln>
+        </p:spPr>
+        <p:txBody>
+          <a:bodyPr/>
+          <a:lstStyle/>
+          <a:p>
+            <a:endParaRPr lang="en-US"/>
+          </a:p>
+        </p:txBody>
+      </p:sp>
+      <p:sp>
+        <p:nvSpPr>
+          <p:cNvPr id="99" name="Text 97"/>
+          <p:cNvSpPr/>
+          <p:nvPr/>
+        </p:nvSpPr>
+        <p:spPr>
+          <a:xfrm>
+            <a:off x="4804806" y="4304995"/>
+            <a:ext cx="1371600" cy="164592"/>
+          </a:xfrm>
+          <a:prstGeom prst="rect">
+            <a:avLst/>
+          </a:prstGeom>
+          <a:noFill/>
+          <a:ln/>
+        </p:spPr>
+        <p:txBody>
+          <a:bodyPr wrap="square" lIns="0" tIns="0" rIns="0" bIns="0" rtlCol="0" anchor="ctr"/>
+          <a:lstStyle/>
+          <a:p>
+            <a:pPr marL="0" indent="0">
+              <a:buNone/>
+            </a:pPr>
+            <a:r>
+              <a:rPr lang="en-US" sz="750" b="1" dirty="0">
+                <a:solidFill>
+                  <a:srgbClr val="6B6353"/>
+                </a:solidFill>
+                <a:latin typeface="Consolas" pitchFamily="34" charset="0"/>
+                <a:ea typeface="Consolas" pitchFamily="34" charset="-122"/>
+                <a:cs typeface="Consolas" pitchFamily="34" charset="-120"/>
+              </a:rPr>
+              <a:t>made under</a:t>
+            </a:r>
+            <a:endParaRPr lang="en-US" sz="750" dirty="0"/>
+          </a:p>
+        </p:txBody>
+      </p:sp>
+      <p:sp>
+        <p:nvSpPr>
+          <p:cNvPr id="100" name="Shape 98"/>
+          <p:cNvSpPr/>
+          <p:nvPr/>
+        </p:nvSpPr>
+        <p:spPr>
+          <a:xfrm>
+            <a:off x="7859634" y="5285689"/>
+            <a:ext cx="859170" cy="320954"/>
+          </a:xfrm>
+          <a:prstGeom prst="line">
+            <a:avLst/>
+          </a:prstGeom>
+          <a:noFill/>
+          <a:ln w="15875">
+            <a:solidFill>
+              <a:srgbClr val="8B8272"/>
+            </a:solidFill>
+            <a:prstDash val="solid"/>
+            <a:tailEnd type="triangle"/>
+          </a:ln>
+        </p:spPr>
+        <p:txBody>
+          <a:bodyPr/>
+          <a:lstStyle/>
+          <a:p>
+            <a:endParaRPr lang="en-US"/>
+          </a:p>
+        </p:txBody>
+      </p:sp>
+      <p:sp>
+        <p:nvSpPr>
+          <p:cNvPr id="101" name="Text 99"/>
+          <p:cNvSpPr/>
+          <p:nvPr/>
+        </p:nvSpPr>
+        <p:spPr>
+          <a:xfrm>
+            <a:off x="7883500" y="5499659"/>
+            <a:ext cx="1371600" cy="164592"/>
+          </a:xfrm>
+          <a:prstGeom prst="rect">
+            <a:avLst/>
+          </a:prstGeom>
+          <a:noFill/>
+          <a:ln/>
+        </p:spPr>
+        <p:txBody>
+          <a:bodyPr wrap="square" lIns="0" tIns="0" rIns="0" bIns="0" rtlCol="0" anchor="ctr"/>
+          <a:lstStyle/>
+          <a:p>
+            <a:pPr marL="0" indent="0">
+              <a:buNone/>
+            </a:pPr>
+            <a:r>
+              <a:rPr lang="en-US" sz="750" b="1" dirty="0">
+                <a:solidFill>
+                  <a:srgbClr val="6B6353"/>
+                </a:solidFill>
+                <a:latin typeface="Consolas" pitchFamily="34" charset="0"/>
+                <a:ea typeface="Consolas" pitchFamily="34" charset="-122"/>
+                <a:cs typeface="Consolas" pitchFamily="34" charset="-120"/>
+              </a:rPr>
+              <a:t>references</a:t>
+            </a:r>
+            <a:endParaRPr lang="en-US" sz="750" dirty="0"/>
+          </a:p>
+        </p:txBody>
+      </p:sp>
+      <p:sp>
+        <p:nvSpPr>
+          <p:cNvPr id="102" name="Shape 100"/>
+          <p:cNvSpPr/>
+          <p:nvPr/>
+        </p:nvSpPr>
+        <p:spPr>
+          <a:xfrm flipH="1">
+            <a:off x="7931231" y="4287164"/>
+            <a:ext cx="1312621" cy="766724"/>
+          </a:xfrm>
+          <a:prstGeom prst="line">
+            <a:avLst/>
+          </a:prstGeom>
+          <a:noFill/>
+          <a:ln w="15875">
+            <a:solidFill>
+              <a:srgbClr val="5A6B75"/>
+            </a:solidFill>
+            <a:prstDash val="dash"/>
+            <a:tailEnd type="triangle"/>
+          </a:ln>
+        </p:spPr>
+        <p:txBody>
+          <a:bodyPr/>
+          <a:lstStyle/>
+          <a:p>
+            <a:endParaRPr lang="en-US"/>
+          </a:p>
+        </p:txBody>
+      </p:sp>
+      <p:sp>
+        <p:nvSpPr>
+          <p:cNvPr id="103" name="Text 101"/>
+          <p:cNvSpPr/>
+          <p:nvPr/>
+        </p:nvSpPr>
+        <p:spPr>
+          <a:xfrm>
+            <a:off x="8217621" y="4715104"/>
+            <a:ext cx="1371600" cy="164592"/>
+          </a:xfrm>
+          <a:prstGeom prst="rect">
+            <a:avLst/>
+          </a:prstGeom>
+          <a:noFill/>
+          <a:ln/>
+        </p:spPr>
+        <p:txBody>
+          <a:bodyPr wrap="square" lIns="0" tIns="0" rIns="0" bIns="0" rtlCol="0" anchor="ctr"/>
+          <a:lstStyle/>
+          <a:p>
+            <a:pPr marL="0" indent="0">
+              <a:buNone/>
+            </a:pPr>
+            <a:r>
+              <a:rPr lang="en-US" sz="750" b="1" dirty="0">
+                <a:solidFill>
+                  <a:srgbClr val="6B6353"/>
+                </a:solidFill>
+                <a:latin typeface="Consolas" pitchFamily="34" charset="0"/>
+                <a:ea typeface="Consolas" pitchFamily="34" charset="-122"/>
+                <a:cs typeface="Consolas" pitchFamily="34" charset="-120"/>
+              </a:rPr>
+              <a:t>derived from</a:t>
+            </a:r>
+            <a:endParaRPr lang="en-US" sz="750" dirty="0"/>
+          </a:p>
+        </p:txBody>
+      </p:sp>
+      <p:sp>
+        <p:nvSpPr>
+          <p:cNvPr id="104" name="Text 102"/>
+          <p:cNvSpPr/>
+          <p:nvPr/>
+        </p:nvSpPr>
+        <p:spPr>
+          <a:xfrm>
+            <a:off x="365760" y="6455664"/>
+            <a:ext cx="11430000" cy="274320"/>
+          </a:xfrm>
+          <a:prstGeom prst="rect">
+            <a:avLst/>
+          </a:prstGeom>
+          <a:noFill/>
+          <a:ln/>
+        </p:spPr>
+        <p:txBody>
+          <a:bodyPr wrap="square" lIns="0" tIns="0" rIns="0" bIns="0" rtlCol="0" anchor="ctr"/>
+          <a:lstStyle/>
+          <a:p>
+            <a:pPr marL="0" indent="0">
+              <a:buNone/>
+            </a:pPr>
+            <a:r>
+              <a:rPr lang="en-US" sz="900" dirty="0">
+                <a:solidFill>
+                  <a:srgbClr val="8A6A2F"/>
+                </a:solidFill>
+                <a:latin typeface="Calibri" pitchFamily="34" charset="0"/>
+                <a:ea typeface="Calibri" pitchFamily="34" charset="-122"/>
+                <a:cs typeface="Calibri" pitchFamily="34" charset="-120"/>
+              </a:rPr>
+              <a:t>■ </a:t>
+            </a:r>
+            <a:r>
+              <a:rPr lang="en-US" sz="900" dirty="0">
+                <a:solidFill>
+                  <a:srgbClr val="1C2830"/>
+                </a:solidFill>
+                <a:latin typeface="Calibri" pitchFamily="34" charset="0"/>
+                <a:ea typeface="Calibri" pitchFamily="34" charset="-122"/>
+                <a:cs typeface="Calibri" pitchFamily="34" charset="-120"/>
+              </a:rPr>
+              <a:t>legal &amp; terms   </a:t>
+            </a:r>
+            <a:r>
+              <a:rPr lang="en-US" sz="900" dirty="0">
+                <a:solidFill>
+                  <a:srgbClr val="2E4A66"/>
+                </a:solidFill>
+                <a:latin typeface="Calibri" pitchFamily="34" charset="0"/>
+                <a:ea typeface="Calibri" pitchFamily="34" charset="-122"/>
+                <a:cs typeface="Calibri" pitchFamily="34" charset="-120"/>
+              </a:rPr>
+              <a:t>■ </a:t>
+            </a:r>
+            <a:r>
+              <a:rPr lang="en-US" sz="900" dirty="0">
+                <a:solidFill>
+                  <a:srgbClr val="1C2830"/>
+                </a:solidFill>
+                <a:latin typeface="Calibri" pitchFamily="34" charset="0"/>
+                <a:ea typeface="Calibri" pitchFamily="34" charset="-122"/>
+                <a:cs typeface="Calibri" pitchFamily="34" charset="-120"/>
+              </a:rPr>
+              <a:t>trading   </a:t>
+            </a:r>
+            <a:r>
+              <a:rPr lang="en-US" sz="900" dirty="0">
+                <a:solidFill>
+                  <a:srgbClr val="216A5E"/>
+                </a:solidFill>
+                <a:latin typeface="Calibri" pitchFamily="34" charset="0"/>
+                <a:ea typeface="Calibri" pitchFamily="34" charset="-122"/>
+                <a:cs typeface="Calibri" pitchFamily="34" charset="-120"/>
+              </a:rPr>
+              <a:t>■ </a:t>
+            </a:r>
+            <a:r>
+              <a:rPr lang="en-US" sz="900" dirty="0">
+                <a:solidFill>
+                  <a:srgbClr val="1C2830"/>
+                </a:solidFill>
+                <a:latin typeface="Calibri" pitchFamily="34" charset="0"/>
+                <a:ea typeface="Calibri" pitchFamily="34" charset="-122"/>
+                <a:cs typeface="Calibri" pitchFamily="34" charset="-120"/>
+              </a:rPr>
+              <a:t>events (CMOS · Colline)   </a:t>
+            </a:r>
+            <a:r>
+              <a:rPr lang="en-US" sz="900" dirty="0">
+                <a:solidFill>
+                  <a:srgbClr val="5A6B75"/>
+                </a:solidFill>
+                <a:latin typeface="Calibri" pitchFamily="34" charset="0"/>
+                <a:ea typeface="Calibri" pitchFamily="34" charset="-122"/>
+                <a:cs typeface="Calibri" pitchFamily="34" charset="-120"/>
+              </a:rPr>
+              <a:t>▨ </a:t>
+            </a:r>
+            <a:r>
+              <a:rPr lang="en-US" sz="900" dirty="0">
+                <a:solidFill>
+                  <a:srgbClr val="1C2830"/>
+                </a:solidFill>
+                <a:latin typeface="Calibri" pitchFamily="34" charset="0"/>
+                <a:ea typeface="Calibri" pitchFamily="34" charset="-122"/>
+                <a:cs typeface="Calibri" pitchFamily="34" charset="-120"/>
+              </a:rPr>
+              <a:t>derived — never stored, always Σ of settled movements.   </a:t>
+            </a:r>
+            <a:r>
+              <a:rPr lang="en-US" sz="900" i="1" dirty="0">
+                <a:solidFill>
+                  <a:srgbClr val="6B7670"/>
+                </a:solidFill>
+                <a:latin typeface="Calibri" pitchFamily="34" charset="0"/>
+                <a:ea typeface="Calibri" pitchFamily="34" charset="-122"/>
+                <a:cs typeface="Calibri" pitchFamily="34" charset="-120"/>
+              </a:rPr>
+              <a:t>Every card names its system of record; every line is a business sentence.</a:t>
             </a:r>
             <a:endParaRPr lang="en-US" sz="900" dirty="0"/>
           </a:p>
@@ -9131,4 +13438,319 @@
     </a:ext>
   </a:extLst>
 </a:theme>
+</file>
+
+<file path=ppt/theme/theme2.xml><?xml version="1.0" encoding="utf-8"?>
+<a:theme xmlns:a="http://schemas.openxmlformats.org/drawingml/2006/main" name="Office Theme">
+  <a:themeElements>
+    <a:clrScheme name="Office">
+      <a:dk1>
+        <a:sysClr val="windowText" lastClr="000000"/>
+      </a:dk1>
+      <a:lt1>
+        <a:sysClr val="window" lastClr="FFFFFF"/>
+      </a:lt1>
+      <a:dk2>
+        <a:srgbClr val="0E2841"/>
+      </a:dk2>
+      <a:lt2>
+        <a:srgbClr val="E8E8E8"/>
+      </a:lt2>
+      <a:accent1>
+        <a:srgbClr val="156082"/>
+      </a:accent1>
+      <a:accent2>
+        <a:srgbClr val="E97132"/>
+      </a:accent2>
+      <a:accent3>
+        <a:srgbClr val="196B24"/>
+      </a:accent3>
+      <a:accent4>
+        <a:srgbClr val="0F9ED5"/>
+      </a:accent4>
+      <a:accent5>
+        <a:srgbClr val="A02B93"/>
+      </a:accent5>
+      <a:accent6>
+        <a:srgbClr val="4EA72E"/>
+      </a:accent6>
+      <a:hlink>
+        <a:srgbClr val="467886"/>
+      </a:hlink>
+      <a:folHlink>
+        <a:srgbClr val="96607D"/>
+      </a:folHlink>
+    </a:clrScheme>
+    <a:fontScheme name="Office">
+      <a:majorFont>
+        <a:latin typeface="Aptos Display" panose="02110004020202020204"/>
+        <a:ea typeface=""/>
+        <a:cs typeface=""/>
+        <a:font script="Jpan" typeface="游ゴシック Light"/>
+        <a:font script="Hang" typeface="맑은 고딕"/>
+        <a:font script="Hans" typeface="等线 Light"/>
+        <a:font script="Hant" typeface="新細明體"/>
+        <a:font script="Arab" typeface="Times New Roman"/>
+        <a:font script="Hebr" typeface="Times New Roman"/>
+        <a:font script="Thai" typeface="Angsana New"/>
+        <a:font script="Ethi" typeface="Nyala"/>
+        <a:font script="Beng" typeface="Vrinda"/>
+        <a:font script="Gujr" typeface="Shruti"/>
+        <a:font script="Khmr" typeface="MoolBoran"/>
+        <a:font script="Knda" typeface="Tunga"/>
+        <a:font script="Guru" typeface="Raavi"/>
+        <a:font script="Cans" typeface="Euphemia"/>
+        <a:font script="Cher" typeface="Plantagenet Cherokee"/>
+        <a:font script="Yiii" typeface="Microsoft Yi Baiti"/>
+        <a:font script="Tibt" typeface="Microsoft Himalaya"/>
+        <a:font script="Thaa" typeface="MV Boli"/>
+        <a:font script="Deva" typeface="Mangal"/>
+        <a:font script="Telu" typeface="Gautami"/>
+        <a:font script="Taml" typeface="Latha"/>
+        <a:font script="Syrc" typeface="Estrangelo Edessa"/>
+        <a:font script="Orya" typeface="Kalinga"/>
+        <a:font script="Mlym" typeface="Kartika"/>
+        <a:font script="Laoo" typeface="DokChampa"/>
+        <a:font script="Sinh" typeface="Iskoola Pota"/>
+        <a:font script="Mong" typeface="Mongolian Baiti"/>
+        <a:font script="Viet" typeface="Times New Roman"/>
+        <a:font script="Uigh" typeface="Microsoft Uighur"/>
+        <a:font script="Geor" typeface="Sylfaen"/>
+        <a:font script="Armn" typeface="Arial"/>
+        <a:font script="Bugi" typeface="Leelawadee UI"/>
+        <a:font script="Bopo" typeface="Microsoft JhengHei"/>
+        <a:font script="Java" typeface="Javanese Text"/>
+        <a:font script="Lisu" typeface="Segoe UI"/>
+        <a:font script="Mymr" typeface="Myanmar Text"/>
+        <a:font script="Nkoo" typeface="Ebrima"/>
+        <a:font script="Olck" typeface="Nirmala UI"/>
+        <a:font script="Osma" typeface="Ebrima"/>
+        <a:font script="Phag" typeface="Phagspa"/>
+        <a:font script="Syrn" typeface="Estrangelo Edessa"/>
+        <a:font script="Syrj" typeface="Estrangelo Edessa"/>
+        <a:font script="Syre" typeface="Estrangelo Edessa"/>
+        <a:font script="Sora" typeface="Nirmala UI"/>
+        <a:font script="Tale" typeface="Microsoft Tai Le"/>
+        <a:font script="Talu" typeface="Microsoft New Tai Lue"/>
+        <a:font script="Tfng" typeface="Ebrima"/>
+      </a:majorFont>
+      <a:minorFont>
+        <a:latin typeface="Aptos" panose="02110004020202020204"/>
+        <a:ea typeface=""/>
+        <a:cs typeface=""/>
+        <a:font script="Jpan" typeface="游ゴシック"/>
+        <a:font script="Hang" typeface="맑은 고딕"/>
+        <a:font script="Hans" typeface="等线"/>
+        <a:font script="Hant" typeface="新細明體"/>
+        <a:font script="Arab" typeface="Arial"/>
+        <a:font script="Hebr" typeface="Arial"/>
+        <a:font script="Thai" typeface="Cordia New"/>
+        <a:font script="Ethi" typeface="Nyala"/>
+        <a:font script="Beng" typeface="Vrinda"/>
+        <a:font script="Gujr" typeface="Shruti"/>
+        <a:font script="Khmr" typeface="DaunPenh"/>
+        <a:font script="Knda" typeface="Tunga"/>
+        <a:font script="Guru" typeface="Raavi"/>
+        <a:font script="Cans" typeface="Euphemia"/>
+        <a:font script="Cher" typeface="Plantagenet Cherokee"/>
+        <a:font script="Yiii" typeface="Microsoft Yi Baiti"/>
+        <a:font script="Tibt" typeface="Microsoft Himalaya"/>
+        <a:font script="Thaa" typeface="MV Boli"/>
+        <a:font script="Deva" typeface="Mangal"/>
+        <a:font script="Telu" typeface="Gautami"/>
+        <a:font script="Taml" typeface="Latha"/>
+        <a:font script="Syrc" typeface="Estrangelo Edessa"/>
+        <a:font script="Orya" typeface="Kalinga"/>
+        <a:font script="Mlym" typeface="Kartika"/>
+        <a:font script="Laoo" typeface="DokChampa"/>
+        <a:font script="Sinh" typeface="Iskoola Pota"/>
+        <a:font script="Mong" typeface="Mongolian Baiti"/>
+        <a:font script="Viet" typeface="Arial"/>
+        <a:font script="Uigh" typeface="Microsoft Uighur"/>
+        <a:font script="Geor" typeface="Sylfaen"/>
+        <a:font script="Armn" typeface="Arial"/>
+        <a:font script="Bugi" typeface="Leelawadee UI"/>
+        <a:font script="Bopo" typeface="Microsoft JhengHei"/>
+        <a:font script="Java" typeface="Javanese Text"/>
+        <a:font script="Lisu" typeface="Segoe UI"/>
+        <a:font script="Mymr" typeface="Myanmar Text"/>
+        <a:font script="Nkoo" typeface="Ebrima"/>
+        <a:font script="Olck" typeface="Nirmala UI"/>
+        <a:font script="Osma" typeface="Ebrima"/>
+        <a:font script="Phag" typeface="Phagspa"/>
+        <a:font script="Syrn" typeface="Estrangelo Edessa"/>
+        <a:font script="Syrj" typeface="Estrangelo Edessa"/>
+        <a:font script="Syre" typeface="Estrangelo Edessa"/>
+        <a:font script="Sora" typeface="Nirmala UI"/>
+        <a:font script="Tale" typeface="Microsoft Tai Le"/>
+        <a:font script="Talu" typeface="Microsoft New Tai Lue"/>
+        <a:font script="Tfng" typeface="Ebrima"/>
+      </a:minorFont>
+    </a:fontScheme>
+    <a:fmtScheme name="Office">
+      <a:fillStyleLst>
+        <a:solidFill>
+          <a:schemeClr val="phClr"/>
+        </a:solidFill>
+        <a:gradFill rotWithShape="1">
+          <a:gsLst>
+            <a:gs pos="0">
+              <a:schemeClr val="phClr">
+                <a:lumMod val="110000"/>
+                <a:satMod val="105000"/>
+                <a:tint val="67000"/>
+              </a:schemeClr>
+            </a:gs>
+            <a:gs pos="50000">
+              <a:schemeClr val="phClr">
+                <a:lumMod val="105000"/>
+                <a:satMod val="103000"/>
+                <a:tint val="73000"/>
+              </a:schemeClr>
+            </a:gs>
+            <a:gs pos="100000">
+              <a:schemeClr val="phClr">
+                <a:lumMod val="105000"/>
+                <a:satMod val="109000"/>
+                <a:tint val="81000"/>
+              </a:schemeClr>
+            </a:gs>
+          </a:gsLst>
+          <a:lin ang="5400000" scaled="0"/>
+        </a:gradFill>
+        <a:gradFill rotWithShape="1">
+          <a:gsLst>
+            <a:gs pos="0">
+              <a:schemeClr val="phClr">
+                <a:satMod val="103000"/>
+                <a:lumMod val="102000"/>
+                <a:tint val="94000"/>
+              </a:schemeClr>
+            </a:gs>
+            <a:gs pos="50000">
+              <a:schemeClr val="phClr">
+                <a:satMod val="110000"/>
+                <a:lumMod val="100000"/>
+                <a:shade val="100000"/>
+              </a:schemeClr>
+            </a:gs>
+            <a:gs pos="100000">
+              <a:schemeClr val="phClr">
+                <a:lumMod val="99000"/>
+                <a:satMod val="120000"/>
+                <a:shade val="78000"/>
+              </a:schemeClr>
+            </a:gs>
+          </a:gsLst>
+          <a:lin ang="5400000" scaled="0"/>
+        </a:gradFill>
+      </a:fillStyleLst>
+      <a:lnStyleLst>
+        <a:ln w="12700" cap="flat" cmpd="sng" algn="ctr">
+          <a:solidFill>
+            <a:schemeClr val="phClr"/>
+          </a:solidFill>
+          <a:prstDash val="solid"/>
+          <a:miter lim="800000"/>
+        </a:ln>
+        <a:ln w="19050" cap="flat" cmpd="sng" algn="ctr">
+          <a:solidFill>
+            <a:schemeClr val="phClr"/>
+          </a:solidFill>
+          <a:prstDash val="solid"/>
+          <a:miter lim="800000"/>
+        </a:ln>
+        <a:ln w="25400" cap="flat" cmpd="sng" algn="ctr">
+          <a:solidFill>
+            <a:schemeClr val="phClr"/>
+          </a:solidFill>
+          <a:prstDash val="solid"/>
+          <a:miter lim="800000"/>
+        </a:ln>
+      </a:lnStyleLst>
+      <a:effectStyleLst>
+        <a:effectStyle>
+          <a:effectLst/>
+        </a:effectStyle>
+        <a:effectStyle>
+          <a:effectLst/>
+        </a:effectStyle>
+        <a:effectStyle>
+          <a:effectLst>
+            <a:outerShdw blurRad="57150" dist="19050" dir="5400000" algn="ctr" rotWithShape="0">
+              <a:srgbClr val="000000">
+                <a:alpha val="63000"/>
+              </a:srgbClr>
+            </a:outerShdw>
+          </a:effectLst>
+        </a:effectStyle>
+      </a:effectStyleLst>
+      <a:bgFillStyleLst>
+        <a:solidFill>
+          <a:schemeClr val="phClr"/>
+        </a:solidFill>
+        <a:solidFill>
+          <a:schemeClr val="phClr">
+            <a:tint val="95000"/>
+            <a:satMod val="170000"/>
+          </a:schemeClr>
+        </a:solidFill>
+        <a:gradFill rotWithShape="1">
+          <a:gsLst>
+            <a:gs pos="0">
+              <a:schemeClr val="phClr">
+                <a:tint val="93000"/>
+                <a:satMod val="150000"/>
+                <a:shade val="98000"/>
+                <a:lumMod val="102000"/>
+              </a:schemeClr>
+            </a:gs>
+            <a:gs pos="50000">
+              <a:schemeClr val="phClr">
+                <a:tint val="98000"/>
+                <a:satMod val="130000"/>
+                <a:shade val="90000"/>
+                <a:lumMod val="103000"/>
+              </a:schemeClr>
+            </a:gs>
+            <a:gs pos="100000">
+              <a:schemeClr val="phClr">
+                <a:shade val="63000"/>
+                <a:satMod val="120000"/>
+              </a:schemeClr>
+            </a:gs>
+          </a:gsLst>
+          <a:lin ang="5400000" scaled="0"/>
+        </a:gradFill>
+      </a:bgFillStyleLst>
+    </a:fmtScheme>
+  </a:themeElements>
+  <a:objectDefaults>
+    <a:lnDef>
+      <a:spPr/>
+      <a:bodyPr/>
+      <a:lstStyle/>
+      <a:style>
+        <a:lnRef idx="2">
+          <a:schemeClr val="accent1"/>
+        </a:lnRef>
+        <a:fillRef idx="0">
+          <a:schemeClr val="accent1"/>
+        </a:fillRef>
+        <a:effectRef idx="1">
+          <a:schemeClr val="accent1"/>
+        </a:effectRef>
+        <a:fontRef idx="minor">
+          <a:schemeClr val="tx1"/>
+        </a:fontRef>
+      </a:style>
+    </a:lnDef>
+  </a:objectDefaults>
+  <a:extraClrSchemeLst/>
+  <a:extLst>
+    <a:ext uri="{05A4C25C-085E-4340-85A3-A5531E510DB2}">
+      <thm15:themeFamily xmlns:thm15="http://schemas.microsoft.com/office/thememl/2012/main" name="Office Theme" id="{2E142A2C-CD16-42D6-873A-C26D2A0506FA}" vid="{1BDDFF52-6CD6-40A5-AB3C-68EB2F1E4D0A}"/>
+    </a:ext>
+  </a:extLst>
+</a:theme>
 </file>